--- a/dist/livrables/C1.2 - WP-02 - Thèse produit, outcomes et hypothèses critiques.pptx
+++ b/dist/livrables/C1.2 - WP-02 - Thèse produit, outcomes et hypothèses critiques.pptx
@@ -3171,7 +3171,7 @@
     <p:bg>
       <p:bgPr>
         <a:solidFill>
-          <a:srgbClr val="0F1318"/>
+          <a:srgbClr val="2A0F57"/>
         </a:solidFill>
       </p:bgPr>
     </p:bg>
@@ -3204,7 +3204,7 @@
             <a:avLst/>
           </a:prstGeom>
           <a:solidFill>
-            <a:srgbClr val="D98324"/>
+            <a:srgbClr val="6D3FD1"/>
           </a:solidFill>
           <a:ln/>
         </p:spPr>
@@ -3239,7 +3239,7 @@
             <a:r>
               <a:rPr lang="en-US" sz="800" b="1" spc="130" kern="0" dirty="0">
                 <a:solidFill>
-                  <a:srgbClr val="8C8478"/>
+                  <a:srgbClr val="6C6873"/>
                 </a:solidFill>
                 <a:latin typeface="Arial" pitchFamily="34" charset="0"/>
                 <a:ea typeface="Arial" pitchFamily="34" charset="-122"/>
@@ -3281,7 +3281,7 @@
             <a:r>
               <a:rPr lang="en-US" sz="4600" b="1" spc="-80" kern="0" dirty="0">
                 <a:solidFill>
-                  <a:srgbClr val="F1ECE3"/>
+                  <a:srgbClr val="F6F4F9"/>
                 </a:solidFill>
                 <a:latin typeface="Arial" pitchFamily="34" charset="0"/>
                 <a:ea typeface="Arial" pitchFamily="34" charset="-122"/>
@@ -3323,7 +3323,7 @@
             <a:r>
               <a:rPr lang="en-US" sz="1400" dirty="0">
                 <a:solidFill>
-                  <a:srgbClr val="C6BFB3"/>
+                  <a:srgbClr val="D9CCF5"/>
                 </a:solidFill>
                 <a:latin typeface="Calibri" pitchFamily="34" charset="0"/>
                 <a:ea typeface="Calibri" pitchFamily="34" charset="-122"/>
@@ -3365,13 +3365,13 @@
             <a:r>
               <a:rPr lang="en-US" sz="950" dirty="0">
                 <a:solidFill>
-                  <a:srgbClr val="8C8478"/>
+                  <a:srgbClr val="6C6873"/>
                 </a:solidFill>
                 <a:latin typeface="Calibri" pitchFamily="34" charset="0"/>
                 <a:ea typeface="Calibri" pitchFamily="34" charset="-122"/>
                 <a:cs typeface="Calibri" pitchFamily="34" charset="-120"/>
               </a:rPr>
-              <a:t>Livrable partiel · projection du dépôt  ·  2026-10-08</a:t>
+              <a:t>Livrable partiel · projection du dépôt  ·  2026-10-09</a:t>
             </a:r>
             <a:endParaRPr lang="en-US" sz="950" dirty="0"/>
           </a:p>
@@ -3391,7 +3391,7 @@
     <p:bg>
       <p:bgPr>
         <a:solidFill>
-          <a:srgbClr val="F1ECE3"/>
+          <a:srgbClr val="F6F4F9"/>
         </a:solidFill>
       </p:bgPr>
     </p:bg>
@@ -3424,7 +3424,7 @@
             <a:avLst/>
           </a:prstGeom>
           <a:solidFill>
-            <a:srgbClr val="D98324"/>
+            <a:srgbClr val="6D3FD1"/>
           </a:solidFill>
           <a:ln/>
         </p:spPr>
@@ -3459,7 +3459,7 @@
             <a:r>
               <a:rPr lang="en-US" sz="800" b="1" spc="130" kern="0" dirty="0">
                 <a:solidFill>
-                  <a:srgbClr val="7C766B"/>
+                  <a:srgbClr val="6C6873"/>
                 </a:solidFill>
                 <a:latin typeface="Arial" pitchFamily="34" charset="0"/>
                 <a:ea typeface="Arial" pitchFamily="34" charset="-122"/>
@@ -3501,7 +3501,7 @@
             <a:r>
               <a:rPr lang="en-US" sz="2400" b="1" spc="-30" kern="0" dirty="0">
                 <a:solidFill>
-                  <a:srgbClr val="0F1318"/>
+                  <a:srgbClr val="2A0F57"/>
                 </a:solidFill>
                 <a:latin typeface="Arial" pitchFamily="34" charset="0"/>
                 <a:ea typeface="Arial" pitchFamily="34" charset="-122"/>
@@ -3543,7 +3543,7 @@
             <a:r>
               <a:rPr lang="en-US" sz="750" dirty="0">
                 <a:solidFill>
-                  <a:srgbClr val="7C766B"/>
+                  <a:srgbClr val="6C6873"/>
                 </a:solidFill>
                 <a:latin typeface="Calibri" pitchFamily="34" charset="0"/>
                 <a:ea typeface="Calibri" pitchFamily="34" charset="-122"/>
@@ -3585,7 +3585,7 @@
             <a:r>
               <a:rPr lang="en-US" sz="800" dirty="0">
                 <a:solidFill>
-                  <a:srgbClr val="7C766B"/>
+                  <a:srgbClr val="6C6873"/>
                 </a:solidFill>
                 <a:latin typeface="Calibri" pitchFamily="34" charset="0"/>
                 <a:ea typeface="Calibri" pitchFamily="34" charset="-122"/>
@@ -3611,7 +3611,7 @@
     <p:bg>
       <p:bgPr>
         <a:solidFill>
-          <a:srgbClr val="F1ECE3"/>
+          <a:srgbClr val="F6F4F9"/>
         </a:solidFill>
       </p:bgPr>
     </p:bg>
@@ -3644,7 +3644,7 @@
             <a:avLst/>
           </a:prstGeom>
           <a:solidFill>
-            <a:srgbClr val="D98324"/>
+            <a:srgbClr val="6D3FD1"/>
           </a:solidFill>
           <a:ln/>
         </p:spPr>
@@ -3679,7 +3679,7 @@
             <a:r>
               <a:rPr lang="en-US" sz="800" b="1" spc="130" kern="0" dirty="0">
                 <a:solidFill>
-                  <a:srgbClr val="7C766B"/>
+                  <a:srgbClr val="6C6873"/>
                 </a:solidFill>
                 <a:latin typeface="Arial" pitchFamily="34" charset="0"/>
                 <a:ea typeface="Arial" pitchFamily="34" charset="-122"/>
@@ -3721,7 +3721,7 @@
             <a:r>
               <a:rPr lang="en-US" sz="2200" b="1" spc="-30" kern="0" dirty="0">
                 <a:solidFill>
-                  <a:srgbClr val="0F1318"/>
+                  <a:srgbClr val="2A0F57"/>
                 </a:solidFill>
                 <a:latin typeface="Arial" pitchFamily="34" charset="0"/>
                 <a:ea typeface="Arial" pitchFamily="34" charset="-122"/>
@@ -3768,7 +3768,7 @@
             <a:r>
               <a:rPr lang="en-US" sz="1150" dirty="0">
                 <a:solidFill>
-                  <a:srgbClr val="4A453E"/>
+                  <a:srgbClr val="47444D"/>
                 </a:solidFill>
                 <a:latin typeface="Calibri" pitchFamily="34" charset="0"/>
                 <a:ea typeface="Calibri" pitchFamily="34" charset="-122"/>
@@ -3791,7 +3791,7 @@
             <a:r>
               <a:rPr lang="en-US" sz="1150" dirty="0">
                 <a:solidFill>
-                  <a:srgbClr val="4A453E"/>
+                  <a:srgbClr val="47444D"/>
                 </a:solidFill>
                 <a:latin typeface="Calibri" pitchFamily="34" charset="0"/>
                 <a:ea typeface="Calibri" pitchFamily="34" charset="-122"/>
@@ -3814,7 +3814,7 @@
             <a:r>
               <a:rPr lang="en-US" sz="1150" dirty="0">
                 <a:solidFill>
-                  <a:srgbClr val="4A453E"/>
+                  <a:srgbClr val="47444D"/>
                 </a:solidFill>
                 <a:latin typeface="Calibri" pitchFamily="34" charset="0"/>
                 <a:ea typeface="Calibri" pitchFamily="34" charset="-122"/>
@@ -3837,7 +3837,7 @@
             <a:r>
               <a:rPr lang="en-US" sz="1150" dirty="0">
                 <a:solidFill>
-                  <a:srgbClr val="4A453E"/>
+                  <a:srgbClr val="47444D"/>
                 </a:solidFill>
                 <a:latin typeface="Calibri" pitchFamily="34" charset="0"/>
                 <a:ea typeface="Calibri" pitchFamily="34" charset="-122"/>
@@ -3904,7 +3904,7 @@
                     </a:lnT>
                     <a:lnB w="12700" cap="flat" cmpd="sng" algn="ctr">
                       <a:solidFill>
-                        <a:srgbClr val="0F1318"/>
+                        <a:srgbClr val="2A0F57"/>
                       </a:solidFill>
                       <a:prstDash val="solid"/>
                       <a:round/>
@@ -3924,7 +3924,7 @@
                       <a:r>
                         <a:rPr lang="en-US" sz="750" b="1" spc="100" kern="0" dirty="0">
                           <a:solidFill>
-                            <a:srgbClr val="7C766B"/>
+                            <a:srgbClr val="6C6873"/>
                           </a:solidFill>
                           <a:latin typeface="Arial" pitchFamily="34" charset="0"/>
                           <a:ea typeface="Arial" pitchFamily="34" charset="-122"/>
@@ -3951,7 +3951,7 @@
                     </a:lnT>
                     <a:lnB w="12700" cap="flat" cmpd="sng" algn="ctr">
                       <a:solidFill>
-                        <a:srgbClr val="0F1318"/>
+                        <a:srgbClr val="2A0F57"/>
                       </a:solidFill>
                       <a:prstDash val="solid"/>
                       <a:round/>
@@ -3971,7 +3971,7 @@
                       <a:r>
                         <a:rPr lang="en-US" sz="750" b="1" spc="100" kern="0" dirty="0">
                           <a:solidFill>
-                            <a:srgbClr val="7C766B"/>
+                            <a:srgbClr val="6C6873"/>
                           </a:solidFill>
                           <a:latin typeface="Arial" pitchFamily="34" charset="0"/>
                           <a:ea typeface="Arial" pitchFamily="34" charset="-122"/>
@@ -3998,7 +3998,7 @@
                     </a:lnT>
                     <a:lnB w="12700" cap="flat" cmpd="sng" algn="ctr">
                       <a:solidFill>
-                        <a:srgbClr val="0F1318"/>
+                        <a:srgbClr val="2A0F57"/>
                       </a:solidFill>
                       <a:prstDash val="solid"/>
                       <a:round/>
@@ -4020,7 +4020,7 @@
                       <a:r>
                         <a:rPr lang="en-US" sz="1000" b="1" dirty="0">
                           <a:solidFill>
-                            <a:srgbClr val="0F1318"/>
+                            <a:srgbClr val="2A0F57"/>
                           </a:solidFill>
                           <a:latin typeface="Calibri" pitchFamily="34" charset="0"/>
                           <a:ea typeface="Calibri" pitchFamily="34" charset="-122"/>
@@ -4047,7 +4047,7 @@
                     </a:lnT>
                     <a:lnB w="7620" cap="flat" cmpd="sng" algn="ctr">
                       <a:solidFill>
-                        <a:srgbClr val="DCD3C3"/>
+                        <a:srgbClr val="DDD9E5"/>
                       </a:solidFill>
                       <a:prstDash val="solid"/>
                       <a:round/>
@@ -4067,7 +4067,7 @@
                       <a:r>
                         <a:rPr lang="en-US" sz="1000" dirty="0">
                           <a:solidFill>
-                            <a:srgbClr val="4A453E"/>
+                            <a:srgbClr val="47444D"/>
                           </a:solidFill>
                           <a:latin typeface="Calibri" pitchFamily="34" charset="0"/>
                           <a:ea typeface="Calibri" pitchFamily="34" charset="-122"/>
@@ -4094,7 +4094,7 @@
                     </a:lnT>
                     <a:lnB w="7620" cap="flat" cmpd="sng" algn="ctr">
                       <a:solidFill>
-                        <a:srgbClr val="DCD3C3"/>
+                        <a:srgbClr val="DDD9E5"/>
                       </a:solidFill>
                       <a:prstDash val="solid"/>
                       <a:round/>
@@ -4114,7 +4114,7 @@
                       <a:r>
                         <a:rPr lang="en-US" sz="1000" dirty="0">
                           <a:solidFill>
-                            <a:srgbClr val="4A453E"/>
+                            <a:srgbClr val="47444D"/>
                           </a:solidFill>
                           <a:latin typeface="Calibri" pitchFamily="34" charset="0"/>
                           <a:ea typeface="Calibri" pitchFamily="34" charset="-122"/>
@@ -4141,7 +4141,7 @@
                     </a:lnT>
                     <a:lnB w="7620" cap="flat" cmpd="sng" algn="ctr">
                       <a:solidFill>
-                        <a:srgbClr val="DCD3C3"/>
+                        <a:srgbClr val="DDD9E5"/>
                       </a:solidFill>
                       <a:prstDash val="solid"/>
                       <a:round/>
@@ -4163,7 +4163,7 @@
                       <a:r>
                         <a:rPr lang="en-US" sz="1000" b="1" dirty="0">
                           <a:solidFill>
-                            <a:srgbClr val="0F1318"/>
+                            <a:srgbClr val="2A0F57"/>
                           </a:solidFill>
                           <a:latin typeface="Calibri" pitchFamily="34" charset="0"/>
                           <a:ea typeface="Calibri" pitchFamily="34" charset="-122"/>
@@ -4190,7 +4190,7 @@
                     </a:lnT>
                     <a:lnB w="7620" cap="flat" cmpd="sng" algn="ctr">
                       <a:solidFill>
-                        <a:srgbClr val="DCD3C3"/>
+                        <a:srgbClr val="DDD9E5"/>
                       </a:solidFill>
                       <a:prstDash val="solid"/>
                       <a:round/>
@@ -4210,7 +4210,7 @@
                       <a:r>
                         <a:rPr lang="en-US" sz="1000" dirty="0">
                           <a:solidFill>
-                            <a:srgbClr val="4A453E"/>
+                            <a:srgbClr val="47444D"/>
                           </a:solidFill>
                           <a:latin typeface="Calibri" pitchFamily="34" charset="0"/>
                           <a:ea typeface="Calibri" pitchFamily="34" charset="-122"/>
@@ -4237,7 +4237,7 @@
                     </a:lnT>
                     <a:lnB w="7620" cap="flat" cmpd="sng" algn="ctr">
                       <a:solidFill>
-                        <a:srgbClr val="DCD3C3"/>
+                        <a:srgbClr val="DDD9E5"/>
                       </a:solidFill>
                       <a:prstDash val="solid"/>
                       <a:round/>
@@ -4257,7 +4257,7 @@
                       <a:r>
                         <a:rPr lang="en-US" sz="1000" dirty="0">
                           <a:solidFill>
-                            <a:srgbClr val="4A453E"/>
+                            <a:srgbClr val="47444D"/>
                           </a:solidFill>
                           <a:latin typeface="Calibri" pitchFamily="34" charset="0"/>
                           <a:ea typeface="Calibri" pitchFamily="34" charset="-122"/>
@@ -4284,7 +4284,7 @@
                     </a:lnT>
                     <a:lnB w="7620" cap="flat" cmpd="sng" algn="ctr">
                       <a:solidFill>
-                        <a:srgbClr val="DCD3C3"/>
+                        <a:srgbClr val="DDD9E5"/>
                       </a:solidFill>
                       <a:prstDash val="solid"/>
                       <a:round/>
@@ -4306,7 +4306,7 @@
                       <a:r>
                         <a:rPr lang="en-US" sz="1000" b="1" dirty="0">
                           <a:solidFill>
-                            <a:srgbClr val="0F1318"/>
+                            <a:srgbClr val="2A0F57"/>
                           </a:solidFill>
                           <a:latin typeface="Calibri" pitchFamily="34" charset="0"/>
                           <a:ea typeface="Calibri" pitchFamily="34" charset="-122"/>
@@ -4333,7 +4333,7 @@
                     </a:lnT>
                     <a:lnB w="7620" cap="flat" cmpd="sng" algn="ctr">
                       <a:solidFill>
-                        <a:srgbClr val="DCD3C3"/>
+                        <a:srgbClr val="DDD9E5"/>
                       </a:solidFill>
                       <a:prstDash val="solid"/>
                       <a:round/>
@@ -4353,7 +4353,7 @@
                       <a:r>
                         <a:rPr lang="en-US" sz="1000" dirty="0">
                           <a:solidFill>
-                            <a:srgbClr val="4A453E"/>
+                            <a:srgbClr val="47444D"/>
                           </a:solidFill>
                           <a:latin typeface="Calibri" pitchFamily="34" charset="0"/>
                           <a:ea typeface="Calibri" pitchFamily="34" charset="-122"/>
@@ -4380,7 +4380,7 @@
                     </a:lnT>
                     <a:lnB w="7620" cap="flat" cmpd="sng" algn="ctr">
                       <a:solidFill>
-                        <a:srgbClr val="DCD3C3"/>
+                        <a:srgbClr val="DDD9E5"/>
                       </a:solidFill>
                       <a:prstDash val="solid"/>
                       <a:round/>
@@ -4400,7 +4400,7 @@
                       <a:r>
                         <a:rPr lang="en-US" sz="1000" dirty="0">
                           <a:solidFill>
-                            <a:srgbClr val="4A453E"/>
+                            <a:srgbClr val="47444D"/>
                           </a:solidFill>
                           <a:latin typeface="Calibri" pitchFamily="34" charset="0"/>
                           <a:ea typeface="Calibri" pitchFamily="34" charset="-122"/>
@@ -4427,7 +4427,7 @@
                     </a:lnT>
                     <a:lnB w="7620" cap="flat" cmpd="sng" algn="ctr">
                       <a:solidFill>
-                        <a:srgbClr val="DCD3C3"/>
+                        <a:srgbClr val="DDD9E5"/>
                       </a:solidFill>
                       <a:prstDash val="solid"/>
                       <a:round/>
@@ -4449,7 +4449,7 @@
                       <a:r>
                         <a:rPr lang="en-US" sz="1000" b="1" dirty="0">
                           <a:solidFill>
-                            <a:srgbClr val="0F1318"/>
+                            <a:srgbClr val="2A0F57"/>
                           </a:solidFill>
                           <a:latin typeface="Calibri" pitchFamily="34" charset="0"/>
                           <a:ea typeface="Calibri" pitchFamily="34" charset="-122"/>
@@ -4476,7 +4476,7 @@
                     </a:lnT>
                     <a:lnB w="7620" cap="flat" cmpd="sng" algn="ctr">
                       <a:solidFill>
-                        <a:srgbClr val="DCD3C3"/>
+                        <a:srgbClr val="DDD9E5"/>
                       </a:solidFill>
                       <a:prstDash val="solid"/>
                       <a:round/>
@@ -4496,7 +4496,7 @@
                       <a:r>
                         <a:rPr lang="en-US" sz="1000" dirty="0">
                           <a:solidFill>
-                            <a:srgbClr val="4A453E"/>
+                            <a:srgbClr val="47444D"/>
                           </a:solidFill>
                           <a:latin typeface="Calibri" pitchFamily="34" charset="0"/>
                           <a:ea typeface="Calibri" pitchFamily="34" charset="-122"/>
@@ -4523,7 +4523,7 @@
                     </a:lnT>
                     <a:lnB w="7620" cap="flat" cmpd="sng" algn="ctr">
                       <a:solidFill>
-                        <a:srgbClr val="DCD3C3"/>
+                        <a:srgbClr val="DDD9E5"/>
                       </a:solidFill>
                       <a:prstDash val="solid"/>
                       <a:round/>
@@ -4543,7 +4543,7 @@
                       <a:r>
                         <a:rPr lang="en-US" sz="1000" dirty="0">
                           <a:solidFill>
-                            <a:srgbClr val="4A453E"/>
+                            <a:srgbClr val="47444D"/>
                           </a:solidFill>
                           <a:latin typeface="Calibri" pitchFamily="34" charset="0"/>
                           <a:ea typeface="Calibri" pitchFamily="34" charset="-122"/>
@@ -4570,7 +4570,7 @@
                     </a:lnT>
                     <a:lnB w="7620" cap="flat" cmpd="sng" algn="ctr">
                       <a:solidFill>
-                        <a:srgbClr val="DCD3C3"/>
+                        <a:srgbClr val="DDD9E5"/>
                       </a:solidFill>
                       <a:prstDash val="solid"/>
                       <a:round/>
@@ -4592,7 +4592,7 @@
                       <a:r>
                         <a:rPr lang="en-US" sz="1000" b="1" dirty="0">
                           <a:solidFill>
-                            <a:srgbClr val="0F1318"/>
+                            <a:srgbClr val="2A0F57"/>
                           </a:solidFill>
                           <a:latin typeface="Calibri" pitchFamily="34" charset="0"/>
                           <a:ea typeface="Calibri" pitchFamily="34" charset="-122"/>
@@ -4619,7 +4619,7 @@
                     </a:lnT>
                     <a:lnB w="7620" cap="flat" cmpd="sng" algn="ctr">
                       <a:solidFill>
-                        <a:srgbClr val="DCD3C3"/>
+                        <a:srgbClr val="DDD9E5"/>
                       </a:solidFill>
                       <a:prstDash val="solid"/>
                       <a:round/>
@@ -4639,7 +4639,7 @@
                       <a:r>
                         <a:rPr lang="en-US" sz="1000" dirty="0">
                           <a:solidFill>
-                            <a:srgbClr val="4A453E"/>
+                            <a:srgbClr val="47444D"/>
                           </a:solidFill>
                           <a:latin typeface="Calibri" pitchFamily="34" charset="0"/>
                           <a:ea typeface="Calibri" pitchFamily="34" charset="-122"/>
@@ -4666,7 +4666,7 @@
                     </a:lnT>
                     <a:lnB w="7620" cap="flat" cmpd="sng" algn="ctr">
                       <a:solidFill>
-                        <a:srgbClr val="DCD3C3"/>
+                        <a:srgbClr val="DDD9E5"/>
                       </a:solidFill>
                       <a:prstDash val="solid"/>
                       <a:round/>
@@ -4686,7 +4686,7 @@
                       <a:r>
                         <a:rPr lang="en-US" sz="1000" dirty="0">
                           <a:solidFill>
-                            <a:srgbClr val="4A453E"/>
+                            <a:srgbClr val="47444D"/>
                           </a:solidFill>
                           <a:latin typeface="Calibri" pitchFamily="34" charset="0"/>
                           <a:ea typeface="Calibri" pitchFamily="34" charset="-122"/>
@@ -4713,7 +4713,7 @@
                     </a:lnT>
                     <a:lnB w="7620" cap="flat" cmpd="sng" algn="ctr">
                       <a:solidFill>
-                        <a:srgbClr val="DCD3C3"/>
+                        <a:srgbClr val="DDD9E5"/>
                       </a:solidFill>
                       <a:prstDash val="solid"/>
                       <a:round/>
@@ -4757,7 +4757,7 @@
             <a:r>
               <a:rPr lang="en-US" sz="750" dirty="0">
                 <a:solidFill>
-                  <a:srgbClr val="7C766B"/>
+                  <a:srgbClr val="6C6873"/>
                 </a:solidFill>
                 <a:latin typeface="Calibri" pitchFamily="34" charset="0"/>
                 <a:ea typeface="Calibri" pitchFamily="34" charset="-122"/>
@@ -4799,7 +4799,7 @@
             <a:r>
               <a:rPr lang="en-US" sz="800" dirty="0">
                 <a:solidFill>
-                  <a:srgbClr val="7C766B"/>
+                  <a:srgbClr val="6C6873"/>
                 </a:solidFill>
                 <a:latin typeface="Calibri" pitchFamily="34" charset="0"/>
                 <a:ea typeface="Calibri" pitchFamily="34" charset="-122"/>
@@ -4825,7 +4825,7 @@
     <p:bg>
       <p:bgPr>
         <a:solidFill>
-          <a:srgbClr val="F1ECE3"/>
+          <a:srgbClr val="F6F4F9"/>
         </a:solidFill>
       </p:bgPr>
     </p:bg>
@@ -4858,7 +4858,7 @@
             <a:avLst/>
           </a:prstGeom>
           <a:solidFill>
-            <a:srgbClr val="D98324"/>
+            <a:srgbClr val="6D3FD1"/>
           </a:solidFill>
           <a:ln/>
         </p:spPr>
@@ -4893,7 +4893,7 @@
             <a:r>
               <a:rPr lang="en-US" sz="800" b="1" spc="130" kern="0" dirty="0">
                 <a:solidFill>
-                  <a:srgbClr val="7C766B"/>
+                  <a:srgbClr val="6C6873"/>
                 </a:solidFill>
                 <a:latin typeface="Arial" pitchFamily="34" charset="0"/>
                 <a:ea typeface="Arial" pitchFamily="34" charset="-122"/>
@@ -4935,7 +4935,7 @@
             <a:r>
               <a:rPr lang="en-US" sz="2200" b="1" spc="-30" kern="0" dirty="0">
                 <a:solidFill>
-                  <a:srgbClr val="0F1318"/>
+                  <a:srgbClr val="2A0F57"/>
                 </a:solidFill>
                 <a:latin typeface="Arial" pitchFamily="34" charset="0"/>
                 <a:ea typeface="Arial" pitchFamily="34" charset="-122"/>
@@ -4982,7 +4982,7 @@
             <a:r>
               <a:rPr lang="en-US" sz="1150" dirty="0">
                 <a:solidFill>
-                  <a:srgbClr val="4A453E"/>
+                  <a:srgbClr val="47444D"/>
                 </a:solidFill>
                 <a:latin typeface="Calibri" pitchFamily="34" charset="0"/>
                 <a:ea typeface="Calibri" pitchFamily="34" charset="-122"/>
@@ -5005,7 +5005,7 @@
             <a:r>
               <a:rPr lang="en-US" sz="1150" dirty="0">
                 <a:solidFill>
-                  <a:srgbClr val="4A453E"/>
+                  <a:srgbClr val="47444D"/>
                 </a:solidFill>
                 <a:latin typeface="Calibri" pitchFamily="34" charset="0"/>
                 <a:ea typeface="Calibri" pitchFamily="34" charset="-122"/>
@@ -5073,7 +5073,7 @@
                     </a:lnT>
                     <a:lnB w="12700" cap="flat" cmpd="sng" algn="ctr">
                       <a:solidFill>
-                        <a:srgbClr val="0F1318"/>
+                        <a:srgbClr val="2A0F57"/>
                       </a:solidFill>
                       <a:prstDash val="solid"/>
                       <a:round/>
@@ -5093,7 +5093,7 @@
                       <a:r>
                         <a:rPr lang="en-US" sz="750" b="1" spc="100" kern="0" dirty="0">
                           <a:solidFill>
-                            <a:srgbClr val="7C766B"/>
+                            <a:srgbClr val="6C6873"/>
                           </a:solidFill>
                           <a:latin typeface="Arial" pitchFamily="34" charset="0"/>
                           <a:ea typeface="Arial" pitchFamily="34" charset="-122"/>
@@ -5120,7 +5120,7 @@
                     </a:lnT>
                     <a:lnB w="12700" cap="flat" cmpd="sng" algn="ctr">
                       <a:solidFill>
-                        <a:srgbClr val="0F1318"/>
+                        <a:srgbClr val="2A0F57"/>
                       </a:solidFill>
                       <a:prstDash val="solid"/>
                       <a:round/>
@@ -5140,7 +5140,7 @@
                       <a:r>
                         <a:rPr lang="en-US" sz="750" b="1" spc="100" kern="0" dirty="0">
                           <a:solidFill>
-                            <a:srgbClr val="7C766B"/>
+                            <a:srgbClr val="6C6873"/>
                           </a:solidFill>
                           <a:latin typeface="Arial" pitchFamily="34" charset="0"/>
                           <a:ea typeface="Arial" pitchFamily="34" charset="-122"/>
@@ -5167,7 +5167,7 @@
                     </a:lnT>
                     <a:lnB w="12700" cap="flat" cmpd="sng" algn="ctr">
                       <a:solidFill>
-                        <a:srgbClr val="0F1318"/>
+                        <a:srgbClr val="2A0F57"/>
                       </a:solidFill>
                       <a:prstDash val="solid"/>
                       <a:round/>
@@ -5187,7 +5187,7 @@
                       <a:r>
                         <a:rPr lang="en-US" sz="750" b="1" spc="100" kern="0" dirty="0">
                           <a:solidFill>
-                            <a:srgbClr val="7C766B"/>
+                            <a:srgbClr val="6C6873"/>
                           </a:solidFill>
                           <a:latin typeface="Arial" pitchFamily="34" charset="0"/>
                           <a:ea typeface="Arial" pitchFamily="34" charset="-122"/>
@@ -5214,7 +5214,7 @@
                     </a:lnT>
                     <a:lnB w="12700" cap="flat" cmpd="sng" algn="ctr">
                       <a:solidFill>
-                        <a:srgbClr val="0F1318"/>
+                        <a:srgbClr val="2A0F57"/>
                       </a:solidFill>
                       <a:prstDash val="solid"/>
                       <a:round/>
@@ -5236,7 +5236,7 @@
                       <a:r>
                         <a:rPr lang="en-US" sz="1100" b="1" dirty="0">
                           <a:solidFill>
-                            <a:srgbClr val="0F1318"/>
+                            <a:srgbClr val="2A0F57"/>
                           </a:solidFill>
                           <a:latin typeface="Calibri" pitchFamily="34" charset="0"/>
                           <a:ea typeface="Calibri" pitchFamily="34" charset="-122"/>
@@ -5263,7 +5263,7 @@
                     </a:lnT>
                     <a:lnB w="7620" cap="flat" cmpd="sng" algn="ctr">
                       <a:solidFill>
-                        <a:srgbClr val="DCD3C3"/>
+                        <a:srgbClr val="DDD9E5"/>
                       </a:solidFill>
                       <a:prstDash val="solid"/>
                       <a:round/>
@@ -5283,7 +5283,7 @@
                       <a:r>
                         <a:rPr lang="en-US" sz="1100" dirty="0">
                           <a:solidFill>
-                            <a:srgbClr val="4A453E"/>
+                            <a:srgbClr val="47444D"/>
                           </a:solidFill>
                           <a:latin typeface="Calibri" pitchFamily="34" charset="0"/>
                           <a:ea typeface="Calibri" pitchFamily="34" charset="-122"/>
@@ -5310,7 +5310,7 @@
                     </a:lnT>
                     <a:lnB w="7620" cap="flat" cmpd="sng" algn="ctr">
                       <a:solidFill>
-                        <a:srgbClr val="DCD3C3"/>
+                        <a:srgbClr val="DDD9E5"/>
                       </a:solidFill>
                       <a:prstDash val="solid"/>
                       <a:round/>
@@ -5330,7 +5330,7 @@
                       <a:r>
                         <a:rPr lang="en-US" sz="1100" dirty="0">
                           <a:solidFill>
-                            <a:srgbClr val="4A453E"/>
+                            <a:srgbClr val="47444D"/>
                           </a:solidFill>
                           <a:latin typeface="Calibri" pitchFamily="34" charset="0"/>
                           <a:ea typeface="Calibri" pitchFamily="34" charset="-122"/>
@@ -5357,7 +5357,7 @@
                     </a:lnT>
                     <a:lnB w="7620" cap="flat" cmpd="sng" algn="ctr">
                       <a:solidFill>
-                        <a:srgbClr val="DCD3C3"/>
+                        <a:srgbClr val="DDD9E5"/>
                       </a:solidFill>
                       <a:prstDash val="solid"/>
                       <a:round/>
@@ -5377,7 +5377,7 @@
                       <a:r>
                         <a:rPr lang="en-US" sz="1100" dirty="0">
                           <a:solidFill>
-                            <a:srgbClr val="4A453E"/>
+                            <a:srgbClr val="47444D"/>
                           </a:solidFill>
                           <a:latin typeface="Calibri" pitchFamily="34" charset="0"/>
                           <a:ea typeface="Calibri" pitchFamily="34" charset="-122"/>
@@ -5404,7 +5404,7 @@
                     </a:lnT>
                     <a:lnB w="7620" cap="flat" cmpd="sng" algn="ctr">
                       <a:solidFill>
-                        <a:srgbClr val="DCD3C3"/>
+                        <a:srgbClr val="DDD9E5"/>
                       </a:solidFill>
                       <a:prstDash val="solid"/>
                       <a:round/>
@@ -5426,7 +5426,7 @@
                       <a:r>
                         <a:rPr lang="en-US" sz="1100" b="1" dirty="0">
                           <a:solidFill>
-                            <a:srgbClr val="0F1318"/>
+                            <a:srgbClr val="2A0F57"/>
                           </a:solidFill>
                           <a:latin typeface="Calibri" pitchFamily="34" charset="0"/>
                           <a:ea typeface="Calibri" pitchFamily="34" charset="-122"/>
@@ -5453,7 +5453,7 @@
                     </a:lnT>
                     <a:lnB w="7620" cap="flat" cmpd="sng" algn="ctr">
                       <a:solidFill>
-                        <a:srgbClr val="DCD3C3"/>
+                        <a:srgbClr val="DDD9E5"/>
                       </a:solidFill>
                       <a:prstDash val="solid"/>
                       <a:round/>
@@ -5473,7 +5473,7 @@
                       <a:r>
                         <a:rPr lang="en-US" sz="1100" dirty="0">
                           <a:solidFill>
-                            <a:srgbClr val="4A453E"/>
+                            <a:srgbClr val="47444D"/>
                           </a:solidFill>
                           <a:latin typeface="Calibri" pitchFamily="34" charset="0"/>
                           <a:ea typeface="Calibri" pitchFamily="34" charset="-122"/>
@@ -5500,7 +5500,7 @@
                     </a:lnT>
                     <a:lnB w="7620" cap="flat" cmpd="sng" algn="ctr">
                       <a:solidFill>
-                        <a:srgbClr val="DCD3C3"/>
+                        <a:srgbClr val="DDD9E5"/>
                       </a:solidFill>
                       <a:prstDash val="solid"/>
                       <a:round/>
@@ -5520,7 +5520,7 @@
                       <a:r>
                         <a:rPr lang="en-US" sz="1100" dirty="0">
                           <a:solidFill>
-                            <a:srgbClr val="4A453E"/>
+                            <a:srgbClr val="47444D"/>
                           </a:solidFill>
                           <a:latin typeface="Calibri" pitchFamily="34" charset="0"/>
                           <a:ea typeface="Calibri" pitchFamily="34" charset="-122"/>
@@ -5547,7 +5547,7 @@
                     </a:lnT>
                     <a:lnB w="7620" cap="flat" cmpd="sng" algn="ctr">
                       <a:solidFill>
-                        <a:srgbClr val="DCD3C3"/>
+                        <a:srgbClr val="DDD9E5"/>
                       </a:solidFill>
                       <a:prstDash val="solid"/>
                       <a:round/>
@@ -5567,7 +5567,7 @@
                       <a:r>
                         <a:rPr lang="en-US" sz="1100" dirty="0">
                           <a:solidFill>
-                            <a:srgbClr val="4A453E"/>
+                            <a:srgbClr val="47444D"/>
                           </a:solidFill>
                           <a:latin typeface="Calibri" pitchFamily="34" charset="0"/>
                           <a:ea typeface="Calibri" pitchFamily="34" charset="-122"/>
@@ -5594,7 +5594,7 @@
                     </a:lnT>
                     <a:lnB w="7620" cap="flat" cmpd="sng" algn="ctr">
                       <a:solidFill>
-                        <a:srgbClr val="DCD3C3"/>
+                        <a:srgbClr val="DDD9E5"/>
                       </a:solidFill>
                       <a:prstDash val="solid"/>
                       <a:round/>
@@ -5616,7 +5616,7 @@
                       <a:r>
                         <a:rPr lang="en-US" sz="1100" b="1" dirty="0">
                           <a:solidFill>
-                            <a:srgbClr val="0F1318"/>
+                            <a:srgbClr val="2A0F57"/>
                           </a:solidFill>
                           <a:latin typeface="Calibri" pitchFamily="34" charset="0"/>
                           <a:ea typeface="Calibri" pitchFamily="34" charset="-122"/>
@@ -5643,7 +5643,7 @@
                     </a:lnT>
                     <a:lnB w="7620" cap="flat" cmpd="sng" algn="ctr">
                       <a:solidFill>
-                        <a:srgbClr val="DCD3C3"/>
+                        <a:srgbClr val="DDD9E5"/>
                       </a:solidFill>
                       <a:prstDash val="solid"/>
                       <a:round/>
@@ -5663,7 +5663,7 @@
                       <a:r>
                         <a:rPr lang="en-US" sz="1100" dirty="0">
                           <a:solidFill>
-                            <a:srgbClr val="4A453E"/>
+                            <a:srgbClr val="47444D"/>
                           </a:solidFill>
                           <a:latin typeface="Calibri" pitchFamily="34" charset="0"/>
                           <a:ea typeface="Calibri" pitchFamily="34" charset="-122"/>
@@ -5690,7 +5690,7 @@
                     </a:lnT>
                     <a:lnB w="7620" cap="flat" cmpd="sng" algn="ctr">
                       <a:solidFill>
-                        <a:srgbClr val="DCD3C3"/>
+                        <a:srgbClr val="DDD9E5"/>
                       </a:solidFill>
                       <a:prstDash val="solid"/>
                       <a:round/>
@@ -5710,7 +5710,7 @@
                       <a:r>
                         <a:rPr lang="en-US" sz="1100" dirty="0">
                           <a:solidFill>
-                            <a:srgbClr val="4A453E"/>
+                            <a:srgbClr val="47444D"/>
                           </a:solidFill>
                           <a:latin typeface="Calibri" pitchFamily="34" charset="0"/>
                           <a:ea typeface="Calibri" pitchFamily="34" charset="-122"/>
@@ -5737,7 +5737,7 @@
                     </a:lnT>
                     <a:lnB w="7620" cap="flat" cmpd="sng" algn="ctr">
                       <a:solidFill>
-                        <a:srgbClr val="DCD3C3"/>
+                        <a:srgbClr val="DDD9E5"/>
                       </a:solidFill>
                       <a:prstDash val="solid"/>
                       <a:round/>
@@ -5757,7 +5757,7 @@
                       <a:r>
                         <a:rPr lang="en-US" sz="1100" dirty="0">
                           <a:solidFill>
-                            <a:srgbClr val="4A453E"/>
+                            <a:srgbClr val="47444D"/>
                           </a:solidFill>
                           <a:latin typeface="Calibri" pitchFamily="34" charset="0"/>
                           <a:ea typeface="Calibri" pitchFamily="34" charset="-122"/>
@@ -5784,7 +5784,7 @@
                     </a:lnT>
                     <a:lnB w="7620" cap="flat" cmpd="sng" algn="ctr">
                       <a:solidFill>
-                        <a:srgbClr val="DCD3C3"/>
+                        <a:srgbClr val="DDD9E5"/>
                       </a:solidFill>
                       <a:prstDash val="solid"/>
                       <a:round/>
@@ -5828,7 +5828,7 @@
             <a:r>
               <a:rPr lang="en-US" sz="750" dirty="0">
                 <a:solidFill>
-                  <a:srgbClr val="7C766B"/>
+                  <a:srgbClr val="6C6873"/>
                 </a:solidFill>
                 <a:latin typeface="Calibri" pitchFamily="34" charset="0"/>
                 <a:ea typeface="Calibri" pitchFamily="34" charset="-122"/>
@@ -5870,7 +5870,7 @@
             <a:r>
               <a:rPr lang="en-US" sz="800" dirty="0">
                 <a:solidFill>
-                  <a:srgbClr val="7C766B"/>
+                  <a:srgbClr val="6C6873"/>
                 </a:solidFill>
                 <a:latin typeface="Calibri" pitchFamily="34" charset="0"/>
                 <a:ea typeface="Calibri" pitchFamily="34" charset="-122"/>
@@ -5896,7 +5896,7 @@
     <p:bg>
       <p:bgPr>
         <a:solidFill>
-          <a:srgbClr val="F1ECE3"/>
+          <a:srgbClr val="F6F4F9"/>
         </a:solidFill>
       </p:bgPr>
     </p:bg>
@@ -5929,7 +5929,7 @@
             <a:avLst/>
           </a:prstGeom>
           <a:solidFill>
-            <a:srgbClr val="D98324"/>
+            <a:srgbClr val="6D3FD1"/>
           </a:solidFill>
           <a:ln/>
         </p:spPr>
@@ -5964,7 +5964,7 @@
             <a:r>
               <a:rPr lang="en-US" sz="800" b="1" spc="130" kern="0" dirty="0">
                 <a:solidFill>
-                  <a:srgbClr val="7C766B"/>
+                  <a:srgbClr val="6C6873"/>
                 </a:solidFill>
                 <a:latin typeface="Arial" pitchFamily="34" charset="0"/>
                 <a:ea typeface="Arial" pitchFamily="34" charset="-122"/>
@@ -6006,7 +6006,7 @@
             <a:r>
               <a:rPr lang="en-US" sz="2200" b="1" spc="-30" kern="0" dirty="0">
                 <a:solidFill>
-                  <a:srgbClr val="0F1318"/>
+                  <a:srgbClr val="2A0F57"/>
                 </a:solidFill>
                 <a:latin typeface="Arial" pitchFamily="34" charset="0"/>
                 <a:ea typeface="Arial" pitchFamily="34" charset="-122"/>
@@ -6053,7 +6053,7 @@
             <a:r>
               <a:rPr lang="en-US" sz="1150" dirty="0">
                 <a:solidFill>
-                  <a:srgbClr val="4A453E"/>
+                  <a:srgbClr val="47444D"/>
                 </a:solidFill>
                 <a:latin typeface="Calibri" pitchFamily="34" charset="0"/>
                 <a:ea typeface="Calibri" pitchFamily="34" charset="-122"/>
@@ -6076,7 +6076,7 @@
             <a:r>
               <a:rPr lang="en-US" sz="1150" dirty="0">
                 <a:solidFill>
-                  <a:srgbClr val="4A453E"/>
+                  <a:srgbClr val="47444D"/>
                 </a:solidFill>
                 <a:latin typeface="Calibri" pitchFamily="34" charset="0"/>
                 <a:ea typeface="Calibri" pitchFamily="34" charset="-122"/>
@@ -6143,7 +6143,7 @@
                     </a:lnT>
                     <a:lnB w="12700" cap="flat" cmpd="sng" algn="ctr">
                       <a:solidFill>
-                        <a:srgbClr val="0F1318"/>
+                        <a:srgbClr val="2A0F57"/>
                       </a:solidFill>
                       <a:prstDash val="solid"/>
                       <a:round/>
@@ -6163,7 +6163,7 @@
                       <a:r>
                         <a:rPr lang="en-US" sz="750" b="1" spc="100" kern="0" dirty="0">
                           <a:solidFill>
-                            <a:srgbClr val="7C766B"/>
+                            <a:srgbClr val="6C6873"/>
                           </a:solidFill>
                           <a:latin typeface="Arial" pitchFamily="34" charset="0"/>
                           <a:ea typeface="Arial" pitchFamily="34" charset="-122"/>
@@ -6190,7 +6190,7 @@
                     </a:lnT>
                     <a:lnB w="12700" cap="flat" cmpd="sng" algn="ctr">
                       <a:solidFill>
-                        <a:srgbClr val="0F1318"/>
+                        <a:srgbClr val="2A0F57"/>
                       </a:solidFill>
                       <a:prstDash val="solid"/>
                       <a:round/>
@@ -6210,7 +6210,7 @@
                       <a:r>
                         <a:rPr lang="en-US" sz="750" b="1" spc="100" kern="0" dirty="0">
                           <a:solidFill>
-                            <a:srgbClr val="7C766B"/>
+                            <a:srgbClr val="6C6873"/>
                           </a:solidFill>
                           <a:latin typeface="Arial" pitchFamily="34" charset="0"/>
                           <a:ea typeface="Arial" pitchFamily="34" charset="-122"/>
@@ -6237,7 +6237,7 @@
                     </a:lnT>
                     <a:lnB w="12700" cap="flat" cmpd="sng" algn="ctr">
                       <a:solidFill>
-                        <a:srgbClr val="0F1318"/>
+                        <a:srgbClr val="2A0F57"/>
                       </a:solidFill>
                       <a:prstDash val="solid"/>
                       <a:round/>
@@ -6259,7 +6259,7 @@
                       <a:r>
                         <a:rPr lang="en-US" sz="1100" b="1" dirty="0">
                           <a:solidFill>
-                            <a:srgbClr val="0F1318"/>
+                            <a:srgbClr val="2A0F57"/>
                           </a:solidFill>
                           <a:latin typeface="Calibri" pitchFamily="34" charset="0"/>
                           <a:ea typeface="Calibri" pitchFamily="34" charset="-122"/>
@@ -6286,7 +6286,7 @@
                     </a:lnT>
                     <a:lnB w="7620" cap="flat" cmpd="sng" algn="ctr">
                       <a:solidFill>
-                        <a:srgbClr val="DCD3C3"/>
+                        <a:srgbClr val="DDD9E5"/>
                       </a:solidFill>
                       <a:prstDash val="solid"/>
                       <a:round/>
@@ -6306,7 +6306,7 @@
                       <a:r>
                         <a:rPr lang="en-US" sz="1100" dirty="0">
                           <a:solidFill>
-                            <a:srgbClr val="4A453E"/>
+                            <a:srgbClr val="47444D"/>
                           </a:solidFill>
                           <a:latin typeface="Calibri" pitchFamily="34" charset="0"/>
                           <a:ea typeface="Calibri" pitchFamily="34" charset="-122"/>
@@ -6333,7 +6333,7 @@
                     </a:lnT>
                     <a:lnB w="7620" cap="flat" cmpd="sng" algn="ctr">
                       <a:solidFill>
-                        <a:srgbClr val="DCD3C3"/>
+                        <a:srgbClr val="DDD9E5"/>
                       </a:solidFill>
                       <a:prstDash val="solid"/>
                       <a:round/>
@@ -6353,7 +6353,7 @@
                       <a:r>
                         <a:rPr lang="en-US" sz="1100" dirty="0">
                           <a:solidFill>
-                            <a:srgbClr val="4A453E"/>
+                            <a:srgbClr val="47444D"/>
                           </a:solidFill>
                           <a:latin typeface="Calibri" pitchFamily="34" charset="0"/>
                           <a:ea typeface="Calibri" pitchFamily="34" charset="-122"/>
@@ -6380,7 +6380,7 @@
                     </a:lnT>
                     <a:lnB w="7620" cap="flat" cmpd="sng" algn="ctr">
                       <a:solidFill>
-                        <a:srgbClr val="DCD3C3"/>
+                        <a:srgbClr val="DDD9E5"/>
                       </a:solidFill>
                       <a:prstDash val="solid"/>
                       <a:round/>
@@ -6402,7 +6402,7 @@
                       <a:r>
                         <a:rPr lang="en-US" sz="1100" b="1" dirty="0">
                           <a:solidFill>
-                            <a:srgbClr val="0F1318"/>
+                            <a:srgbClr val="2A0F57"/>
                           </a:solidFill>
                           <a:latin typeface="Calibri" pitchFamily="34" charset="0"/>
                           <a:ea typeface="Calibri" pitchFamily="34" charset="-122"/>
@@ -6429,7 +6429,7 @@
                     </a:lnT>
                     <a:lnB w="7620" cap="flat" cmpd="sng" algn="ctr">
                       <a:solidFill>
-                        <a:srgbClr val="DCD3C3"/>
+                        <a:srgbClr val="DDD9E5"/>
                       </a:solidFill>
                       <a:prstDash val="solid"/>
                       <a:round/>
@@ -6449,7 +6449,7 @@
                       <a:r>
                         <a:rPr lang="en-US" sz="1100" dirty="0">
                           <a:solidFill>
-                            <a:srgbClr val="4A453E"/>
+                            <a:srgbClr val="47444D"/>
                           </a:solidFill>
                           <a:latin typeface="Calibri" pitchFamily="34" charset="0"/>
                           <a:ea typeface="Calibri" pitchFamily="34" charset="-122"/>
@@ -6476,7 +6476,7 @@
                     </a:lnT>
                     <a:lnB w="7620" cap="flat" cmpd="sng" algn="ctr">
                       <a:solidFill>
-                        <a:srgbClr val="DCD3C3"/>
+                        <a:srgbClr val="DDD9E5"/>
                       </a:solidFill>
                       <a:prstDash val="solid"/>
                       <a:round/>
@@ -6496,7 +6496,7 @@
                       <a:r>
                         <a:rPr lang="en-US" sz="1100" dirty="0">
                           <a:solidFill>
-                            <a:srgbClr val="4A453E"/>
+                            <a:srgbClr val="47444D"/>
                           </a:solidFill>
                           <a:latin typeface="Calibri" pitchFamily="34" charset="0"/>
                           <a:ea typeface="Calibri" pitchFamily="34" charset="-122"/>
@@ -6523,7 +6523,7 @@
                     </a:lnT>
                     <a:lnB w="7620" cap="flat" cmpd="sng" algn="ctr">
                       <a:solidFill>
-                        <a:srgbClr val="DCD3C3"/>
+                        <a:srgbClr val="DDD9E5"/>
                       </a:solidFill>
                       <a:prstDash val="solid"/>
                       <a:round/>
@@ -6545,7 +6545,7 @@
                       <a:r>
                         <a:rPr lang="en-US" sz="1100" b="1" dirty="0">
                           <a:solidFill>
-                            <a:srgbClr val="0F1318"/>
+                            <a:srgbClr val="2A0F57"/>
                           </a:solidFill>
                           <a:latin typeface="Calibri" pitchFamily="34" charset="0"/>
                           <a:ea typeface="Calibri" pitchFamily="34" charset="-122"/>
@@ -6572,7 +6572,7 @@
                     </a:lnT>
                     <a:lnB w="7620" cap="flat" cmpd="sng" algn="ctr">
                       <a:solidFill>
-                        <a:srgbClr val="DCD3C3"/>
+                        <a:srgbClr val="DDD9E5"/>
                       </a:solidFill>
                       <a:prstDash val="solid"/>
                       <a:round/>
@@ -6592,7 +6592,7 @@
                       <a:r>
                         <a:rPr lang="en-US" sz="1100" dirty="0">
                           <a:solidFill>
-                            <a:srgbClr val="4A453E"/>
+                            <a:srgbClr val="47444D"/>
                           </a:solidFill>
                           <a:latin typeface="Calibri" pitchFamily="34" charset="0"/>
                           <a:ea typeface="Calibri" pitchFamily="34" charset="-122"/>
@@ -6619,7 +6619,7 @@
                     </a:lnT>
                     <a:lnB w="7620" cap="flat" cmpd="sng" algn="ctr">
                       <a:solidFill>
-                        <a:srgbClr val="DCD3C3"/>
+                        <a:srgbClr val="DDD9E5"/>
                       </a:solidFill>
                       <a:prstDash val="solid"/>
                       <a:round/>
@@ -6639,7 +6639,7 @@
                       <a:r>
                         <a:rPr lang="en-US" sz="1100" dirty="0">
                           <a:solidFill>
-                            <a:srgbClr val="4A453E"/>
+                            <a:srgbClr val="47444D"/>
                           </a:solidFill>
                           <a:latin typeface="Calibri" pitchFamily="34" charset="0"/>
                           <a:ea typeface="Calibri" pitchFamily="34" charset="-122"/>
@@ -6666,7 +6666,7 @@
                     </a:lnT>
                     <a:lnB w="7620" cap="flat" cmpd="sng" algn="ctr">
                       <a:solidFill>
-                        <a:srgbClr val="DCD3C3"/>
+                        <a:srgbClr val="DDD9E5"/>
                       </a:solidFill>
                       <a:prstDash val="solid"/>
                       <a:round/>
@@ -6710,7 +6710,7 @@
             <a:r>
               <a:rPr lang="en-US" sz="750" dirty="0">
                 <a:solidFill>
-                  <a:srgbClr val="7C766B"/>
+                  <a:srgbClr val="6C6873"/>
                 </a:solidFill>
                 <a:latin typeface="Calibri" pitchFamily="34" charset="0"/>
                 <a:ea typeface="Calibri" pitchFamily="34" charset="-122"/>
@@ -6752,7 +6752,7 @@
             <a:r>
               <a:rPr lang="en-US" sz="800" dirty="0">
                 <a:solidFill>
-                  <a:srgbClr val="7C766B"/>
+                  <a:srgbClr val="6C6873"/>
                 </a:solidFill>
                 <a:latin typeface="Calibri" pitchFamily="34" charset="0"/>
                 <a:ea typeface="Calibri" pitchFamily="34" charset="-122"/>
@@ -6778,7 +6778,7 @@
     <p:bg>
       <p:bgPr>
         <a:solidFill>
-          <a:srgbClr val="F1ECE3"/>
+          <a:srgbClr val="F6F4F9"/>
         </a:solidFill>
       </p:bgPr>
     </p:bg>
@@ -6811,7 +6811,7 @@
             <a:avLst/>
           </a:prstGeom>
           <a:solidFill>
-            <a:srgbClr val="D98324"/>
+            <a:srgbClr val="6D3FD1"/>
           </a:solidFill>
           <a:ln/>
         </p:spPr>
@@ -6846,7 +6846,7 @@
             <a:r>
               <a:rPr lang="en-US" sz="800" b="1" spc="130" kern="0" dirty="0">
                 <a:solidFill>
-                  <a:srgbClr val="7C766B"/>
+                  <a:srgbClr val="6C6873"/>
                 </a:solidFill>
                 <a:latin typeface="Arial" pitchFamily="34" charset="0"/>
                 <a:ea typeface="Arial" pitchFamily="34" charset="-122"/>
@@ -6888,7 +6888,7 @@
             <a:r>
               <a:rPr lang="en-US" sz="2200" b="1" spc="-30" kern="0" dirty="0">
                 <a:solidFill>
-                  <a:srgbClr val="0F1318"/>
+                  <a:srgbClr val="2A0F57"/>
                 </a:solidFill>
                 <a:latin typeface="Arial" pitchFamily="34" charset="0"/>
                 <a:ea typeface="Arial" pitchFamily="34" charset="-122"/>
@@ -6935,7 +6935,7 @@
             <a:r>
               <a:rPr lang="en-US" sz="1150" dirty="0">
                 <a:solidFill>
-                  <a:srgbClr val="4A453E"/>
+                  <a:srgbClr val="47444D"/>
                 </a:solidFill>
                 <a:latin typeface="Calibri" pitchFamily="34" charset="0"/>
                 <a:ea typeface="Calibri" pitchFamily="34" charset="-122"/>
@@ -6958,7 +6958,7 @@
             <a:r>
               <a:rPr lang="en-US" sz="1150" dirty="0">
                 <a:solidFill>
-                  <a:srgbClr val="4A453E"/>
+                  <a:srgbClr val="47444D"/>
                 </a:solidFill>
                 <a:latin typeface="Calibri" pitchFamily="34" charset="0"/>
                 <a:ea typeface="Calibri" pitchFamily="34" charset="-122"/>
@@ -6981,7 +6981,7 @@
             <a:r>
               <a:rPr lang="en-US" sz="1150" b="1" dirty="0">
                 <a:solidFill>
-                  <a:srgbClr val="4A453E"/>
+                  <a:srgbClr val="47444D"/>
                 </a:solidFill>
                 <a:latin typeface="Calibri" pitchFamily="34" charset="0"/>
                 <a:ea typeface="Calibri" pitchFamily="34" charset="-122"/>
@@ -7004,7 +7004,7 @@
             <a:r>
               <a:rPr lang="en-US" sz="1150" dirty="0">
                 <a:solidFill>
-                  <a:srgbClr val="4A453E"/>
+                  <a:srgbClr val="47444D"/>
                 </a:solidFill>
                 <a:latin typeface="Calibri" pitchFamily="34" charset="0"/>
                 <a:ea typeface="Calibri" pitchFamily="34" charset="-122"/>
@@ -7072,7 +7072,7 @@
                     </a:lnT>
                     <a:lnB w="12700" cap="flat" cmpd="sng" algn="ctr">
                       <a:solidFill>
-                        <a:srgbClr val="0F1318"/>
+                        <a:srgbClr val="2A0F57"/>
                       </a:solidFill>
                       <a:prstDash val="solid"/>
                       <a:round/>
@@ -7092,7 +7092,7 @@
                       <a:r>
                         <a:rPr lang="en-US" sz="750" b="1" spc="100" kern="0" dirty="0">
                           <a:solidFill>
-                            <a:srgbClr val="7C766B"/>
+                            <a:srgbClr val="6C6873"/>
                           </a:solidFill>
                           <a:latin typeface="Arial" pitchFamily="34" charset="0"/>
                           <a:ea typeface="Arial" pitchFamily="34" charset="-122"/>
@@ -7119,7 +7119,7 @@
                     </a:lnT>
                     <a:lnB w="12700" cap="flat" cmpd="sng" algn="ctr">
                       <a:solidFill>
-                        <a:srgbClr val="0F1318"/>
+                        <a:srgbClr val="2A0F57"/>
                       </a:solidFill>
                       <a:prstDash val="solid"/>
                       <a:round/>
@@ -7139,7 +7139,7 @@
                       <a:r>
                         <a:rPr lang="en-US" sz="750" b="1" spc="100" kern="0" dirty="0">
                           <a:solidFill>
-                            <a:srgbClr val="7C766B"/>
+                            <a:srgbClr val="6C6873"/>
                           </a:solidFill>
                           <a:latin typeface="Arial" pitchFamily="34" charset="0"/>
                           <a:ea typeface="Arial" pitchFamily="34" charset="-122"/>
@@ -7166,7 +7166,7 @@
                     </a:lnT>
                     <a:lnB w="12700" cap="flat" cmpd="sng" algn="ctr">
                       <a:solidFill>
-                        <a:srgbClr val="0F1318"/>
+                        <a:srgbClr val="2A0F57"/>
                       </a:solidFill>
                       <a:prstDash val="solid"/>
                       <a:round/>
@@ -7186,7 +7186,7 @@
                       <a:r>
                         <a:rPr lang="en-US" sz="750" b="1" spc="100" kern="0" dirty="0">
                           <a:solidFill>
-                            <a:srgbClr val="7C766B"/>
+                            <a:srgbClr val="6C6873"/>
                           </a:solidFill>
                           <a:latin typeface="Arial" pitchFamily="34" charset="0"/>
                           <a:ea typeface="Arial" pitchFamily="34" charset="-122"/>
@@ -7213,7 +7213,7 @@
                     </a:lnT>
                     <a:lnB w="12700" cap="flat" cmpd="sng" algn="ctr">
                       <a:solidFill>
-                        <a:srgbClr val="0F1318"/>
+                        <a:srgbClr val="2A0F57"/>
                       </a:solidFill>
                       <a:prstDash val="solid"/>
                       <a:round/>
@@ -7235,7 +7235,7 @@
                       <a:r>
                         <a:rPr lang="en-US" sz="1100" b="1" dirty="0">
                           <a:solidFill>
-                            <a:srgbClr val="0F1318"/>
+                            <a:srgbClr val="2A0F57"/>
                           </a:solidFill>
                           <a:latin typeface="Calibri" pitchFamily="34" charset="0"/>
                           <a:ea typeface="Calibri" pitchFamily="34" charset="-122"/>
@@ -7262,7 +7262,7 @@
                     </a:lnT>
                     <a:lnB w="7620" cap="flat" cmpd="sng" algn="ctr">
                       <a:solidFill>
-                        <a:srgbClr val="DCD3C3"/>
+                        <a:srgbClr val="DDD9E5"/>
                       </a:solidFill>
                       <a:prstDash val="solid"/>
                       <a:round/>
@@ -7282,7 +7282,7 @@
                       <a:r>
                         <a:rPr lang="en-US" sz="1100" dirty="0">
                           <a:solidFill>
-                            <a:srgbClr val="4A453E"/>
+                            <a:srgbClr val="47444D"/>
                           </a:solidFill>
                           <a:latin typeface="Calibri" pitchFamily="34" charset="0"/>
                           <a:ea typeface="Calibri" pitchFamily="34" charset="-122"/>
@@ -7309,7 +7309,7 @@
                     </a:lnT>
                     <a:lnB w="7620" cap="flat" cmpd="sng" algn="ctr">
                       <a:solidFill>
-                        <a:srgbClr val="DCD3C3"/>
+                        <a:srgbClr val="DDD9E5"/>
                       </a:solidFill>
                       <a:prstDash val="solid"/>
                       <a:round/>
@@ -7329,7 +7329,7 @@
                       <a:r>
                         <a:rPr lang="en-US" sz="1100" dirty="0">
                           <a:solidFill>
-                            <a:srgbClr val="4A453E"/>
+                            <a:srgbClr val="47444D"/>
                           </a:solidFill>
                           <a:latin typeface="Calibri" pitchFamily="34" charset="0"/>
                           <a:ea typeface="Calibri" pitchFamily="34" charset="-122"/>
@@ -7356,7 +7356,7 @@
                     </a:lnT>
                     <a:lnB w="7620" cap="flat" cmpd="sng" algn="ctr">
                       <a:solidFill>
-                        <a:srgbClr val="DCD3C3"/>
+                        <a:srgbClr val="DDD9E5"/>
                       </a:solidFill>
                       <a:prstDash val="solid"/>
                       <a:round/>
@@ -7376,7 +7376,7 @@
                       <a:r>
                         <a:rPr lang="en-US" sz="1100" dirty="0">
                           <a:solidFill>
-                            <a:srgbClr val="4A453E"/>
+                            <a:srgbClr val="47444D"/>
                           </a:solidFill>
                           <a:latin typeface="Calibri" pitchFamily="34" charset="0"/>
                           <a:ea typeface="Calibri" pitchFamily="34" charset="-122"/>
@@ -7403,7 +7403,7 @@
                     </a:lnT>
                     <a:lnB w="7620" cap="flat" cmpd="sng" algn="ctr">
                       <a:solidFill>
-                        <a:srgbClr val="DCD3C3"/>
+                        <a:srgbClr val="DDD9E5"/>
                       </a:solidFill>
                       <a:prstDash val="solid"/>
                       <a:round/>
@@ -7425,7 +7425,7 @@
                       <a:r>
                         <a:rPr lang="en-US" sz="1100" b="1" dirty="0">
                           <a:solidFill>
-                            <a:srgbClr val="0F1318"/>
+                            <a:srgbClr val="2A0F57"/>
                           </a:solidFill>
                           <a:latin typeface="Calibri" pitchFamily="34" charset="0"/>
                           <a:ea typeface="Calibri" pitchFamily="34" charset="-122"/>
@@ -7452,7 +7452,7 @@
                     </a:lnT>
                     <a:lnB w="7620" cap="flat" cmpd="sng" algn="ctr">
                       <a:solidFill>
-                        <a:srgbClr val="DCD3C3"/>
+                        <a:srgbClr val="DDD9E5"/>
                       </a:solidFill>
                       <a:prstDash val="solid"/>
                       <a:round/>
@@ -7472,7 +7472,7 @@
                       <a:r>
                         <a:rPr lang="en-US" sz="1100" dirty="0">
                           <a:solidFill>
-                            <a:srgbClr val="4A453E"/>
+                            <a:srgbClr val="47444D"/>
                           </a:solidFill>
                           <a:latin typeface="Calibri" pitchFamily="34" charset="0"/>
                           <a:ea typeface="Calibri" pitchFamily="34" charset="-122"/>
@@ -7499,7 +7499,7 @@
                     </a:lnT>
                     <a:lnB w="7620" cap="flat" cmpd="sng" algn="ctr">
                       <a:solidFill>
-                        <a:srgbClr val="DCD3C3"/>
+                        <a:srgbClr val="DDD9E5"/>
                       </a:solidFill>
                       <a:prstDash val="solid"/>
                       <a:round/>
@@ -7519,7 +7519,7 @@
                       <a:r>
                         <a:rPr lang="en-US" sz="1100" dirty="0">
                           <a:solidFill>
-                            <a:srgbClr val="4A453E"/>
+                            <a:srgbClr val="47444D"/>
                           </a:solidFill>
                           <a:latin typeface="Calibri" pitchFamily="34" charset="0"/>
                           <a:ea typeface="Calibri" pitchFamily="34" charset="-122"/>
@@ -7546,7 +7546,7 @@
                     </a:lnT>
                     <a:lnB w="7620" cap="flat" cmpd="sng" algn="ctr">
                       <a:solidFill>
-                        <a:srgbClr val="DCD3C3"/>
+                        <a:srgbClr val="DDD9E5"/>
                       </a:solidFill>
                       <a:prstDash val="solid"/>
                       <a:round/>
@@ -7566,7 +7566,7 @@
                       <a:r>
                         <a:rPr lang="en-US" sz="1100" dirty="0">
                           <a:solidFill>
-                            <a:srgbClr val="4A453E"/>
+                            <a:srgbClr val="47444D"/>
                           </a:solidFill>
                           <a:latin typeface="Calibri" pitchFamily="34" charset="0"/>
                           <a:ea typeface="Calibri" pitchFamily="34" charset="-122"/>
@@ -7593,7 +7593,7 @@
                     </a:lnT>
                     <a:lnB w="7620" cap="flat" cmpd="sng" algn="ctr">
                       <a:solidFill>
-                        <a:srgbClr val="DCD3C3"/>
+                        <a:srgbClr val="DDD9E5"/>
                       </a:solidFill>
                       <a:prstDash val="solid"/>
                       <a:round/>
@@ -7615,7 +7615,7 @@
                       <a:r>
                         <a:rPr lang="en-US" sz="1100" b="1" dirty="0">
                           <a:solidFill>
-                            <a:srgbClr val="0F1318"/>
+                            <a:srgbClr val="2A0F57"/>
                           </a:solidFill>
                           <a:latin typeface="Calibri" pitchFamily="34" charset="0"/>
                           <a:ea typeface="Calibri" pitchFamily="34" charset="-122"/>
@@ -7642,7 +7642,7 @@
                     </a:lnT>
                     <a:lnB w="7620" cap="flat" cmpd="sng" algn="ctr">
                       <a:solidFill>
-                        <a:srgbClr val="DCD3C3"/>
+                        <a:srgbClr val="DDD9E5"/>
                       </a:solidFill>
                       <a:prstDash val="solid"/>
                       <a:round/>
@@ -7662,7 +7662,7 @@
                       <a:r>
                         <a:rPr lang="en-US" sz="1100" dirty="0">
                           <a:solidFill>
-                            <a:srgbClr val="4A453E"/>
+                            <a:srgbClr val="47444D"/>
                           </a:solidFill>
                           <a:latin typeface="Calibri" pitchFamily="34" charset="0"/>
                           <a:ea typeface="Calibri" pitchFamily="34" charset="-122"/>
@@ -7689,7 +7689,7 @@
                     </a:lnT>
                     <a:lnB w="7620" cap="flat" cmpd="sng" algn="ctr">
                       <a:solidFill>
-                        <a:srgbClr val="DCD3C3"/>
+                        <a:srgbClr val="DDD9E5"/>
                       </a:solidFill>
                       <a:prstDash val="solid"/>
                       <a:round/>
@@ -7709,7 +7709,7 @@
                       <a:r>
                         <a:rPr lang="en-US" sz="1100" dirty="0">
                           <a:solidFill>
-                            <a:srgbClr val="4A453E"/>
+                            <a:srgbClr val="47444D"/>
                           </a:solidFill>
                           <a:latin typeface="Calibri" pitchFamily="34" charset="0"/>
                           <a:ea typeface="Calibri" pitchFamily="34" charset="-122"/>
@@ -7736,7 +7736,7 @@
                     </a:lnT>
                     <a:lnB w="7620" cap="flat" cmpd="sng" algn="ctr">
                       <a:solidFill>
-                        <a:srgbClr val="DCD3C3"/>
+                        <a:srgbClr val="DDD9E5"/>
                       </a:solidFill>
                       <a:prstDash val="solid"/>
                       <a:round/>
@@ -7756,7 +7756,7 @@
                       <a:r>
                         <a:rPr lang="en-US" sz="1100" dirty="0">
                           <a:solidFill>
-                            <a:srgbClr val="4A453E"/>
+                            <a:srgbClr val="47444D"/>
                           </a:solidFill>
                           <a:latin typeface="Calibri" pitchFamily="34" charset="0"/>
                           <a:ea typeface="Calibri" pitchFamily="34" charset="-122"/>
@@ -7783,7 +7783,7 @@
                     </a:lnT>
                     <a:lnB w="7620" cap="flat" cmpd="sng" algn="ctr">
                       <a:solidFill>
-                        <a:srgbClr val="DCD3C3"/>
+                        <a:srgbClr val="DDD9E5"/>
                       </a:solidFill>
                       <a:prstDash val="solid"/>
                       <a:round/>
@@ -7805,7 +7805,7 @@
                       <a:r>
                         <a:rPr lang="en-US" sz="1100" b="1" dirty="0">
                           <a:solidFill>
-                            <a:srgbClr val="0F1318"/>
+                            <a:srgbClr val="2A0F57"/>
                           </a:solidFill>
                           <a:latin typeface="Calibri" pitchFamily="34" charset="0"/>
                           <a:ea typeface="Calibri" pitchFamily="34" charset="-122"/>
@@ -7832,7 +7832,7 @@
                     </a:lnT>
                     <a:lnB w="7620" cap="flat" cmpd="sng" algn="ctr">
                       <a:solidFill>
-                        <a:srgbClr val="DCD3C3"/>
+                        <a:srgbClr val="DDD9E5"/>
                       </a:solidFill>
                       <a:prstDash val="solid"/>
                       <a:round/>
@@ -7852,7 +7852,7 @@
                       <a:r>
                         <a:rPr lang="en-US" sz="1100" dirty="0">
                           <a:solidFill>
-                            <a:srgbClr val="4A453E"/>
+                            <a:srgbClr val="47444D"/>
                           </a:solidFill>
                           <a:latin typeface="Calibri" pitchFamily="34" charset="0"/>
                           <a:ea typeface="Calibri" pitchFamily="34" charset="-122"/>
@@ -7879,7 +7879,7 @@
                     </a:lnT>
                     <a:lnB w="7620" cap="flat" cmpd="sng" algn="ctr">
                       <a:solidFill>
-                        <a:srgbClr val="DCD3C3"/>
+                        <a:srgbClr val="DDD9E5"/>
                       </a:solidFill>
                       <a:prstDash val="solid"/>
                       <a:round/>
@@ -7899,7 +7899,7 @@
                       <a:r>
                         <a:rPr lang="en-US" sz="1100" dirty="0">
                           <a:solidFill>
-                            <a:srgbClr val="4A453E"/>
+                            <a:srgbClr val="47444D"/>
                           </a:solidFill>
                           <a:latin typeface="Calibri" pitchFamily="34" charset="0"/>
                           <a:ea typeface="Calibri" pitchFamily="34" charset="-122"/>
@@ -7926,7 +7926,7 @@
                     </a:lnT>
                     <a:lnB w="7620" cap="flat" cmpd="sng" algn="ctr">
                       <a:solidFill>
-                        <a:srgbClr val="DCD3C3"/>
+                        <a:srgbClr val="DDD9E5"/>
                       </a:solidFill>
                       <a:prstDash val="solid"/>
                       <a:round/>
@@ -7946,7 +7946,7 @@
                       <a:r>
                         <a:rPr lang="en-US" sz="1100" dirty="0">
                           <a:solidFill>
-                            <a:srgbClr val="4A453E"/>
+                            <a:srgbClr val="47444D"/>
                           </a:solidFill>
                           <a:latin typeface="Calibri" pitchFamily="34" charset="0"/>
                           <a:ea typeface="Calibri" pitchFamily="34" charset="-122"/>
@@ -7973,7 +7973,7 @@
                     </a:lnT>
                     <a:lnB w="7620" cap="flat" cmpd="sng" algn="ctr">
                       <a:solidFill>
-                        <a:srgbClr val="DCD3C3"/>
+                        <a:srgbClr val="DDD9E5"/>
                       </a:solidFill>
                       <a:prstDash val="solid"/>
                       <a:round/>
@@ -8017,7 +8017,7 @@
             <a:r>
               <a:rPr lang="en-US" sz="750" dirty="0">
                 <a:solidFill>
-                  <a:srgbClr val="7C766B"/>
+                  <a:srgbClr val="6C6873"/>
                 </a:solidFill>
                 <a:latin typeface="Calibri" pitchFamily="34" charset="0"/>
                 <a:ea typeface="Calibri" pitchFamily="34" charset="-122"/>
@@ -8059,7 +8059,7 @@
             <a:r>
               <a:rPr lang="en-US" sz="800" dirty="0">
                 <a:solidFill>
-                  <a:srgbClr val="7C766B"/>
+                  <a:srgbClr val="6C6873"/>
                 </a:solidFill>
                 <a:latin typeface="Calibri" pitchFamily="34" charset="0"/>
                 <a:ea typeface="Calibri" pitchFamily="34" charset="-122"/>
@@ -8085,7 +8085,7 @@
     <p:bg>
       <p:bgPr>
         <a:solidFill>
-          <a:srgbClr val="F1ECE3"/>
+          <a:srgbClr val="F6F4F9"/>
         </a:solidFill>
       </p:bgPr>
     </p:bg>
@@ -8118,7 +8118,7 @@
             <a:avLst/>
           </a:prstGeom>
           <a:solidFill>
-            <a:srgbClr val="D98324"/>
+            <a:srgbClr val="6D3FD1"/>
           </a:solidFill>
           <a:ln/>
         </p:spPr>
@@ -8153,7 +8153,7 @@
             <a:r>
               <a:rPr lang="en-US" sz="800" b="1" spc="130" kern="0" dirty="0">
                 <a:solidFill>
-                  <a:srgbClr val="7C766B"/>
+                  <a:srgbClr val="6C6873"/>
                 </a:solidFill>
                 <a:latin typeface="Arial" pitchFamily="34" charset="0"/>
                 <a:ea typeface="Arial" pitchFamily="34" charset="-122"/>
@@ -8195,7 +8195,7 @@
             <a:r>
               <a:rPr lang="en-US" sz="2200" b="1" spc="-30" kern="0" dirty="0">
                 <a:solidFill>
-                  <a:srgbClr val="0F1318"/>
+                  <a:srgbClr val="2A0F57"/>
                 </a:solidFill>
                 <a:latin typeface="Arial" pitchFamily="34" charset="0"/>
                 <a:ea typeface="Arial" pitchFamily="34" charset="-122"/>
@@ -8242,7 +8242,7 @@
             <a:r>
               <a:rPr lang="en-US" sz="1150" dirty="0">
                 <a:solidFill>
-                  <a:srgbClr val="4A453E"/>
+                  <a:srgbClr val="47444D"/>
                 </a:solidFill>
                 <a:latin typeface="Calibri" pitchFamily="34" charset="0"/>
                 <a:ea typeface="Calibri" pitchFamily="34" charset="-122"/>
@@ -8265,7 +8265,7 @@
             <a:r>
               <a:rPr lang="en-US" sz="1150" dirty="0">
                 <a:solidFill>
-                  <a:srgbClr val="4A453E"/>
+                  <a:srgbClr val="47444D"/>
                 </a:solidFill>
                 <a:latin typeface="Calibri" pitchFamily="34" charset="0"/>
                 <a:ea typeface="Calibri" pitchFamily="34" charset="-122"/>
@@ -8288,7 +8288,7 @@
             <a:r>
               <a:rPr lang="en-US" sz="1150" dirty="0">
                 <a:solidFill>
-                  <a:srgbClr val="4A453E"/>
+                  <a:srgbClr val="47444D"/>
                 </a:solidFill>
                 <a:latin typeface="Calibri" pitchFamily="34" charset="0"/>
                 <a:ea typeface="Calibri" pitchFamily="34" charset="-122"/>
@@ -8311,7 +8311,7 @@
             <a:r>
               <a:rPr lang="en-US" sz="1150" dirty="0">
                 <a:solidFill>
-                  <a:srgbClr val="4A453E"/>
+                  <a:srgbClr val="47444D"/>
                 </a:solidFill>
                 <a:latin typeface="Calibri" pitchFamily="34" charset="0"/>
                 <a:ea typeface="Calibri" pitchFamily="34" charset="-122"/>
@@ -8379,7 +8379,7 @@
                     </a:lnT>
                     <a:lnB w="12700" cap="flat" cmpd="sng" algn="ctr">
                       <a:solidFill>
-                        <a:srgbClr val="0F1318"/>
+                        <a:srgbClr val="2A0F57"/>
                       </a:solidFill>
                       <a:prstDash val="solid"/>
                       <a:round/>
@@ -8399,7 +8399,7 @@
                       <a:r>
                         <a:rPr lang="en-US" sz="750" b="1" spc="100" kern="0" dirty="0">
                           <a:solidFill>
-                            <a:srgbClr val="7C766B"/>
+                            <a:srgbClr val="6C6873"/>
                           </a:solidFill>
                           <a:latin typeface="Arial" pitchFamily="34" charset="0"/>
                           <a:ea typeface="Arial" pitchFamily="34" charset="-122"/>
@@ -8426,7 +8426,7 @@
                     </a:lnT>
                     <a:lnB w="12700" cap="flat" cmpd="sng" algn="ctr">
                       <a:solidFill>
-                        <a:srgbClr val="0F1318"/>
+                        <a:srgbClr val="2A0F57"/>
                       </a:solidFill>
                       <a:prstDash val="solid"/>
                       <a:round/>
@@ -8446,7 +8446,7 @@
                       <a:r>
                         <a:rPr lang="en-US" sz="750" b="1" spc="100" kern="0" dirty="0">
                           <a:solidFill>
-                            <a:srgbClr val="7C766B"/>
+                            <a:srgbClr val="6C6873"/>
                           </a:solidFill>
                           <a:latin typeface="Arial" pitchFamily="34" charset="0"/>
                           <a:ea typeface="Arial" pitchFamily="34" charset="-122"/>
@@ -8473,7 +8473,7 @@
                     </a:lnT>
                     <a:lnB w="12700" cap="flat" cmpd="sng" algn="ctr">
                       <a:solidFill>
-                        <a:srgbClr val="0F1318"/>
+                        <a:srgbClr val="2A0F57"/>
                       </a:solidFill>
                       <a:prstDash val="solid"/>
                       <a:round/>
@@ -8493,7 +8493,7 @@
                       <a:r>
                         <a:rPr lang="en-US" sz="750" b="1" spc="100" kern="0" dirty="0">
                           <a:solidFill>
-                            <a:srgbClr val="7C766B"/>
+                            <a:srgbClr val="6C6873"/>
                           </a:solidFill>
                           <a:latin typeface="Arial" pitchFamily="34" charset="0"/>
                           <a:ea typeface="Arial" pitchFamily="34" charset="-122"/>
@@ -8520,7 +8520,7 @@
                     </a:lnT>
                     <a:lnB w="12700" cap="flat" cmpd="sng" algn="ctr">
                       <a:solidFill>
-                        <a:srgbClr val="0F1318"/>
+                        <a:srgbClr val="2A0F57"/>
                       </a:solidFill>
                       <a:prstDash val="solid"/>
                       <a:round/>
@@ -8542,7 +8542,7 @@
                       <a:r>
                         <a:rPr lang="en-US" sz="1100" b="1" dirty="0">
                           <a:solidFill>
-                            <a:srgbClr val="0F1318"/>
+                            <a:srgbClr val="2A0F57"/>
                           </a:solidFill>
                           <a:latin typeface="Calibri" pitchFamily="34" charset="0"/>
                           <a:ea typeface="Calibri" pitchFamily="34" charset="-122"/>
@@ -8569,7 +8569,7 @@
                     </a:lnT>
                     <a:lnB w="7620" cap="flat" cmpd="sng" algn="ctr">
                       <a:solidFill>
-                        <a:srgbClr val="DCD3C3"/>
+                        <a:srgbClr val="DDD9E5"/>
                       </a:solidFill>
                       <a:prstDash val="solid"/>
                       <a:round/>
@@ -8589,7 +8589,7 @@
                       <a:r>
                         <a:rPr lang="en-US" sz="1100" dirty="0">
                           <a:solidFill>
-                            <a:srgbClr val="4A453E"/>
+                            <a:srgbClr val="47444D"/>
                           </a:solidFill>
                           <a:latin typeface="Calibri" pitchFamily="34" charset="0"/>
                           <a:ea typeface="Calibri" pitchFamily="34" charset="-122"/>
@@ -8616,7 +8616,7 @@
                     </a:lnT>
                     <a:lnB w="7620" cap="flat" cmpd="sng" algn="ctr">
                       <a:solidFill>
-                        <a:srgbClr val="DCD3C3"/>
+                        <a:srgbClr val="DDD9E5"/>
                       </a:solidFill>
                       <a:prstDash val="solid"/>
                       <a:round/>
@@ -8636,7 +8636,7 @@
                       <a:r>
                         <a:rPr lang="en-US" sz="1100" dirty="0">
                           <a:solidFill>
-                            <a:srgbClr val="4A453E"/>
+                            <a:srgbClr val="47444D"/>
                           </a:solidFill>
                           <a:latin typeface="Calibri" pitchFamily="34" charset="0"/>
                           <a:ea typeface="Calibri" pitchFamily="34" charset="-122"/>
@@ -8663,7 +8663,7 @@
                     </a:lnT>
                     <a:lnB w="7620" cap="flat" cmpd="sng" algn="ctr">
                       <a:solidFill>
-                        <a:srgbClr val="DCD3C3"/>
+                        <a:srgbClr val="DDD9E5"/>
                       </a:solidFill>
                       <a:prstDash val="solid"/>
                       <a:round/>
@@ -8683,7 +8683,7 @@
                       <a:r>
                         <a:rPr lang="en-US" sz="1100" dirty="0">
                           <a:solidFill>
-                            <a:srgbClr val="4A453E"/>
+                            <a:srgbClr val="47444D"/>
                           </a:solidFill>
                           <a:latin typeface="Calibri" pitchFamily="34" charset="0"/>
                           <a:ea typeface="Calibri" pitchFamily="34" charset="-122"/>
@@ -8710,7 +8710,7 @@
                     </a:lnT>
                     <a:lnB w="7620" cap="flat" cmpd="sng" algn="ctr">
                       <a:solidFill>
-                        <a:srgbClr val="DCD3C3"/>
+                        <a:srgbClr val="DDD9E5"/>
                       </a:solidFill>
                       <a:prstDash val="solid"/>
                       <a:round/>
@@ -8732,7 +8732,7 @@
                       <a:r>
                         <a:rPr lang="en-US" sz="1100" b="1" dirty="0">
                           <a:solidFill>
-                            <a:srgbClr val="0F1318"/>
+                            <a:srgbClr val="2A0F57"/>
                           </a:solidFill>
                           <a:latin typeface="Calibri" pitchFamily="34" charset="0"/>
                           <a:ea typeface="Calibri" pitchFamily="34" charset="-122"/>
@@ -8759,7 +8759,7 @@
                     </a:lnT>
                     <a:lnB w="7620" cap="flat" cmpd="sng" algn="ctr">
                       <a:solidFill>
-                        <a:srgbClr val="DCD3C3"/>
+                        <a:srgbClr val="DDD9E5"/>
                       </a:solidFill>
                       <a:prstDash val="solid"/>
                       <a:round/>
@@ -8779,7 +8779,7 @@
                       <a:r>
                         <a:rPr lang="en-US" sz="1100" dirty="0">
                           <a:solidFill>
-                            <a:srgbClr val="4A453E"/>
+                            <a:srgbClr val="47444D"/>
                           </a:solidFill>
                           <a:latin typeface="Calibri" pitchFamily="34" charset="0"/>
                           <a:ea typeface="Calibri" pitchFamily="34" charset="-122"/>
@@ -8806,7 +8806,7 @@
                     </a:lnT>
                     <a:lnB w="7620" cap="flat" cmpd="sng" algn="ctr">
                       <a:solidFill>
-                        <a:srgbClr val="DCD3C3"/>
+                        <a:srgbClr val="DDD9E5"/>
                       </a:solidFill>
                       <a:prstDash val="solid"/>
                       <a:round/>
@@ -8826,7 +8826,7 @@
                       <a:r>
                         <a:rPr lang="en-US" sz="1100" dirty="0">
                           <a:solidFill>
-                            <a:srgbClr val="4A453E"/>
+                            <a:srgbClr val="47444D"/>
                           </a:solidFill>
                           <a:latin typeface="Calibri" pitchFamily="34" charset="0"/>
                           <a:ea typeface="Calibri" pitchFamily="34" charset="-122"/>
@@ -8853,7 +8853,7 @@
                     </a:lnT>
                     <a:lnB w="7620" cap="flat" cmpd="sng" algn="ctr">
                       <a:solidFill>
-                        <a:srgbClr val="DCD3C3"/>
+                        <a:srgbClr val="DDD9E5"/>
                       </a:solidFill>
                       <a:prstDash val="solid"/>
                       <a:round/>
@@ -8873,7 +8873,7 @@
                       <a:r>
                         <a:rPr lang="en-US" sz="1100" dirty="0">
                           <a:solidFill>
-                            <a:srgbClr val="4A453E"/>
+                            <a:srgbClr val="47444D"/>
                           </a:solidFill>
                           <a:latin typeface="Calibri" pitchFamily="34" charset="0"/>
                           <a:ea typeface="Calibri" pitchFamily="34" charset="-122"/>
@@ -8900,7 +8900,7 @@
                     </a:lnT>
                     <a:lnB w="7620" cap="flat" cmpd="sng" algn="ctr">
                       <a:solidFill>
-                        <a:srgbClr val="DCD3C3"/>
+                        <a:srgbClr val="DDD9E5"/>
                       </a:solidFill>
                       <a:prstDash val="solid"/>
                       <a:round/>
@@ -8922,7 +8922,7 @@
                       <a:r>
                         <a:rPr lang="en-US" sz="1100" b="1" dirty="0">
                           <a:solidFill>
-                            <a:srgbClr val="0F1318"/>
+                            <a:srgbClr val="2A0F57"/>
                           </a:solidFill>
                           <a:latin typeface="Calibri" pitchFamily="34" charset="0"/>
                           <a:ea typeface="Calibri" pitchFamily="34" charset="-122"/>
@@ -8949,7 +8949,7 @@
                     </a:lnT>
                     <a:lnB w="7620" cap="flat" cmpd="sng" algn="ctr">
                       <a:solidFill>
-                        <a:srgbClr val="DCD3C3"/>
+                        <a:srgbClr val="DDD9E5"/>
                       </a:solidFill>
                       <a:prstDash val="solid"/>
                       <a:round/>
@@ -8969,7 +8969,7 @@
                       <a:r>
                         <a:rPr lang="en-US" sz="1100" dirty="0">
                           <a:solidFill>
-                            <a:srgbClr val="4A453E"/>
+                            <a:srgbClr val="47444D"/>
                           </a:solidFill>
                           <a:latin typeface="Calibri" pitchFamily="34" charset="0"/>
                           <a:ea typeface="Calibri" pitchFamily="34" charset="-122"/>
@@ -8996,7 +8996,7 @@
                     </a:lnT>
                     <a:lnB w="7620" cap="flat" cmpd="sng" algn="ctr">
                       <a:solidFill>
-                        <a:srgbClr val="DCD3C3"/>
+                        <a:srgbClr val="DDD9E5"/>
                       </a:solidFill>
                       <a:prstDash val="solid"/>
                       <a:round/>
@@ -9016,7 +9016,7 @@
                       <a:r>
                         <a:rPr lang="en-US" sz="1100" dirty="0">
                           <a:solidFill>
-                            <a:srgbClr val="4A453E"/>
+                            <a:srgbClr val="47444D"/>
                           </a:solidFill>
                           <a:latin typeface="Calibri" pitchFamily="34" charset="0"/>
                           <a:ea typeface="Calibri" pitchFamily="34" charset="-122"/>
@@ -9043,7 +9043,7 @@
                     </a:lnT>
                     <a:lnB w="7620" cap="flat" cmpd="sng" algn="ctr">
                       <a:solidFill>
-                        <a:srgbClr val="DCD3C3"/>
+                        <a:srgbClr val="DDD9E5"/>
                       </a:solidFill>
                       <a:prstDash val="solid"/>
                       <a:round/>
@@ -9063,7 +9063,7 @@
                       <a:r>
                         <a:rPr lang="en-US" sz="1100" dirty="0">
                           <a:solidFill>
-                            <a:srgbClr val="4A453E"/>
+                            <a:srgbClr val="47444D"/>
                           </a:solidFill>
                           <a:latin typeface="Calibri" pitchFamily="34" charset="0"/>
                           <a:ea typeface="Calibri" pitchFamily="34" charset="-122"/>
@@ -9090,7 +9090,7 @@
                     </a:lnT>
                     <a:lnB w="7620" cap="flat" cmpd="sng" algn="ctr">
                       <a:solidFill>
-                        <a:srgbClr val="DCD3C3"/>
+                        <a:srgbClr val="DDD9E5"/>
                       </a:solidFill>
                       <a:prstDash val="solid"/>
                       <a:round/>
@@ -9134,7 +9134,7 @@
             <a:r>
               <a:rPr lang="en-US" sz="750" dirty="0">
                 <a:solidFill>
-                  <a:srgbClr val="7C766B"/>
+                  <a:srgbClr val="6C6873"/>
                 </a:solidFill>
                 <a:latin typeface="Calibri" pitchFamily="34" charset="0"/>
                 <a:ea typeface="Calibri" pitchFamily="34" charset="-122"/>
@@ -9176,7 +9176,7 @@
             <a:r>
               <a:rPr lang="en-US" sz="800" dirty="0">
                 <a:solidFill>
-                  <a:srgbClr val="7C766B"/>
+                  <a:srgbClr val="6C6873"/>
                 </a:solidFill>
                 <a:latin typeface="Calibri" pitchFamily="34" charset="0"/>
                 <a:ea typeface="Calibri" pitchFamily="34" charset="-122"/>
@@ -9202,7 +9202,7 @@
     <p:bg>
       <p:bgPr>
         <a:solidFill>
-          <a:srgbClr val="0F1318"/>
+          <a:srgbClr val="2A0F57"/>
         </a:solidFill>
       </p:bgPr>
     </p:bg>
@@ -9235,7 +9235,7 @@
             <a:avLst/>
           </a:prstGeom>
           <a:solidFill>
-            <a:srgbClr val="D98324"/>
+            <a:srgbClr val="6D3FD1"/>
           </a:solidFill>
           <a:ln/>
         </p:spPr>
@@ -9270,7 +9270,7 @@
             <a:r>
               <a:rPr lang="en-US" sz="800" b="1" spc="130" kern="0" dirty="0">
                 <a:solidFill>
-                  <a:srgbClr val="8C8478"/>
+                  <a:srgbClr val="6C6873"/>
                 </a:solidFill>
                 <a:latin typeface="Arial" pitchFamily="34" charset="0"/>
                 <a:ea typeface="Arial" pitchFamily="34" charset="-122"/>
@@ -9312,7 +9312,7 @@
             <a:r>
               <a:rPr lang="en-US" sz="2400" b="1" dirty="0">
                 <a:solidFill>
-                  <a:srgbClr val="F1ECE3"/>
+                  <a:srgbClr val="F6F4F9"/>
                 </a:solidFill>
                 <a:latin typeface="Arial" pitchFamily="34" charset="0"/>
                 <a:ea typeface="Arial" pitchFamily="34" charset="-122"/>
@@ -9354,7 +9354,7 @@
             <a:r>
               <a:rPr lang="en-US" sz="800" b="1" spc="130" kern="0" dirty="0">
                 <a:solidFill>
-                  <a:srgbClr val="D98324"/>
+                  <a:srgbClr val="6D3FD1"/>
                 </a:solidFill>
                 <a:latin typeface="Arial" pitchFamily="34" charset="0"/>
                 <a:ea typeface="Arial" pitchFamily="34" charset="-122"/>
@@ -9402,7 +9402,7 @@
             <a:r>
               <a:rPr lang="en-US" sz="1000" dirty="0">
                 <a:solidFill>
-                  <a:srgbClr val="C6BFB3"/>
+                  <a:srgbClr val="D9CCF5"/>
                 </a:solidFill>
                 <a:latin typeface="Calibri" pitchFamily="34" charset="0"/>
                 <a:ea typeface="Calibri" pitchFamily="34" charset="-122"/>
@@ -9426,7 +9426,7 @@
             <a:r>
               <a:rPr lang="en-US" sz="1000" dirty="0">
                 <a:solidFill>
-                  <a:srgbClr val="C6BFB3"/>
+                  <a:srgbClr val="D9CCF5"/>
                 </a:solidFill>
                 <a:latin typeface="Calibri" pitchFamily="34" charset="0"/>
                 <a:ea typeface="Calibri" pitchFamily="34" charset="-122"/>
@@ -9450,7 +9450,7 @@
             <a:r>
               <a:rPr lang="en-US" sz="1000" dirty="0">
                 <a:solidFill>
-                  <a:srgbClr val="C6BFB3"/>
+                  <a:srgbClr val="D9CCF5"/>
                 </a:solidFill>
                 <a:latin typeface="Calibri" pitchFamily="34" charset="0"/>
                 <a:ea typeface="Calibri" pitchFamily="34" charset="-122"/>
@@ -9474,7 +9474,7 @@
             <a:r>
               <a:rPr lang="en-US" sz="1000" dirty="0">
                 <a:solidFill>
-                  <a:srgbClr val="C6BFB3"/>
+                  <a:srgbClr val="D9CCF5"/>
                 </a:solidFill>
                 <a:latin typeface="Calibri" pitchFamily="34" charset="0"/>
                 <a:ea typeface="Calibri" pitchFamily="34" charset="-122"/>
@@ -9498,7 +9498,7 @@
             <a:r>
               <a:rPr lang="en-US" sz="1000" dirty="0">
                 <a:solidFill>
-                  <a:srgbClr val="C6BFB3"/>
+                  <a:srgbClr val="D9CCF5"/>
                 </a:solidFill>
                 <a:latin typeface="Calibri" pitchFamily="34" charset="0"/>
                 <a:ea typeface="Calibri" pitchFamily="34" charset="-122"/>
@@ -9540,7 +9540,7 @@
             <a:r>
               <a:rPr lang="en-US" sz="800" dirty="0">
                 <a:solidFill>
-                  <a:srgbClr val="8C8478"/>
+                  <a:srgbClr val="6C6873"/>
                 </a:solidFill>
                 <a:latin typeface="Calibri" pitchFamily="34" charset="0"/>
                 <a:ea typeface="Calibri" pitchFamily="34" charset="-122"/>
@@ -9566,7 +9566,7 @@
     <p:bg>
       <p:bgPr>
         <a:solidFill>
-          <a:srgbClr val="F1ECE3"/>
+          <a:srgbClr val="F6F4F9"/>
         </a:solidFill>
       </p:bgPr>
     </p:bg>
@@ -9599,7 +9599,7 @@
             <a:avLst/>
           </a:prstGeom>
           <a:solidFill>
-            <a:srgbClr val="D98324"/>
+            <a:srgbClr val="6D3FD1"/>
           </a:solidFill>
           <a:ln/>
         </p:spPr>
@@ -9634,7 +9634,7 @@
             <a:r>
               <a:rPr lang="en-US" sz="800" b="1" spc="130" kern="0" dirty="0">
                 <a:solidFill>
-                  <a:srgbClr val="7C766B"/>
+                  <a:srgbClr val="6C6873"/>
                 </a:solidFill>
                 <a:latin typeface="Arial" pitchFamily="34" charset="0"/>
                 <a:ea typeface="Arial" pitchFamily="34" charset="-122"/>
@@ -9676,7 +9676,7 @@
             <a:r>
               <a:rPr lang="en-US" sz="2400" b="1" spc="-30" kern="0" dirty="0">
                 <a:solidFill>
-                  <a:srgbClr val="0F1318"/>
+                  <a:srgbClr val="2A0F57"/>
                 </a:solidFill>
                 <a:latin typeface="Arial" pitchFamily="34" charset="0"/>
                 <a:ea typeface="Arial" pitchFamily="34" charset="-122"/>
@@ -9718,7 +9718,7 @@
             <a:r>
               <a:rPr lang="en-US" sz="750" dirty="0">
                 <a:solidFill>
-                  <a:srgbClr val="7C766B"/>
+                  <a:srgbClr val="6C6873"/>
                 </a:solidFill>
                 <a:latin typeface="Calibri" pitchFamily="34" charset="0"/>
                 <a:ea typeface="Calibri" pitchFamily="34" charset="-122"/>
@@ -9760,7 +9760,7 @@
             <a:r>
               <a:rPr lang="en-US" sz="800" dirty="0">
                 <a:solidFill>
-                  <a:srgbClr val="7C766B"/>
+                  <a:srgbClr val="6C6873"/>
                 </a:solidFill>
                 <a:latin typeface="Calibri" pitchFamily="34" charset="0"/>
                 <a:ea typeface="Calibri" pitchFamily="34" charset="-122"/>
@@ -9786,7 +9786,7 @@
     <p:bg>
       <p:bgPr>
         <a:solidFill>
-          <a:srgbClr val="F1ECE3"/>
+          <a:srgbClr val="F6F4F9"/>
         </a:solidFill>
       </p:bgPr>
     </p:bg>
@@ -9819,7 +9819,7 @@
             <a:avLst/>
           </a:prstGeom>
           <a:solidFill>
-            <a:srgbClr val="D98324"/>
+            <a:srgbClr val="6D3FD1"/>
           </a:solidFill>
           <a:ln/>
         </p:spPr>
@@ -9854,7 +9854,7 @@
             <a:r>
               <a:rPr lang="en-US" sz="800" b="1" spc="130" kern="0" dirty="0">
                 <a:solidFill>
-                  <a:srgbClr val="7C766B"/>
+                  <a:srgbClr val="6C6873"/>
                 </a:solidFill>
                 <a:latin typeface="Arial" pitchFamily="34" charset="0"/>
                 <a:ea typeface="Arial" pitchFamily="34" charset="-122"/>
@@ -9896,7 +9896,7 @@
             <a:r>
               <a:rPr lang="en-US" sz="2200" b="1" spc="-30" kern="0" dirty="0">
                 <a:solidFill>
-                  <a:srgbClr val="0F1318"/>
+                  <a:srgbClr val="2A0F57"/>
                 </a:solidFill>
                 <a:latin typeface="Arial" pitchFamily="34" charset="0"/>
                 <a:ea typeface="Arial" pitchFamily="34" charset="-122"/>
@@ -9943,7 +9943,7 @@
             <a:r>
               <a:rPr lang="en-US" sz="1150" dirty="0">
                 <a:solidFill>
-                  <a:srgbClr val="4A453E"/>
+                  <a:srgbClr val="47444D"/>
                 </a:solidFill>
                 <a:latin typeface="Calibri" pitchFamily="34" charset="0"/>
                 <a:ea typeface="Calibri" pitchFamily="34" charset="-122"/>
@@ -9966,7 +9966,7 @@
             <a:r>
               <a:rPr lang="en-US" sz="1150" dirty="0">
                 <a:solidFill>
-                  <a:srgbClr val="4A453E"/>
+                  <a:srgbClr val="47444D"/>
                 </a:solidFill>
                 <a:latin typeface="Calibri" pitchFamily="34" charset="0"/>
                 <a:ea typeface="Calibri" pitchFamily="34" charset="-122"/>
@@ -10033,7 +10033,7 @@
                     </a:lnT>
                     <a:lnB w="12700" cap="flat" cmpd="sng" algn="ctr">
                       <a:solidFill>
-                        <a:srgbClr val="0F1318"/>
+                        <a:srgbClr val="2A0F57"/>
                       </a:solidFill>
                       <a:prstDash val="solid"/>
                       <a:round/>
@@ -10053,7 +10053,7 @@
                       <a:r>
                         <a:rPr lang="en-US" sz="750" b="1" spc="100" kern="0" dirty="0">
                           <a:solidFill>
-                            <a:srgbClr val="7C766B"/>
+                            <a:srgbClr val="6C6873"/>
                           </a:solidFill>
                           <a:latin typeface="Arial" pitchFamily="34" charset="0"/>
                           <a:ea typeface="Arial" pitchFamily="34" charset="-122"/>
@@ -10080,7 +10080,7 @@
                     </a:lnT>
                     <a:lnB w="12700" cap="flat" cmpd="sng" algn="ctr">
                       <a:solidFill>
-                        <a:srgbClr val="0F1318"/>
+                        <a:srgbClr val="2A0F57"/>
                       </a:solidFill>
                       <a:prstDash val="solid"/>
                       <a:round/>
@@ -10100,7 +10100,7 @@
                       <a:r>
                         <a:rPr lang="en-US" sz="750" b="1" spc="100" kern="0" dirty="0">
                           <a:solidFill>
-                            <a:srgbClr val="7C766B"/>
+                            <a:srgbClr val="6C6873"/>
                           </a:solidFill>
                           <a:latin typeface="Arial" pitchFamily="34" charset="0"/>
                           <a:ea typeface="Arial" pitchFamily="34" charset="-122"/>
@@ -10127,7 +10127,7 @@
                     </a:lnT>
                     <a:lnB w="12700" cap="flat" cmpd="sng" algn="ctr">
                       <a:solidFill>
-                        <a:srgbClr val="0F1318"/>
+                        <a:srgbClr val="2A0F57"/>
                       </a:solidFill>
                       <a:prstDash val="solid"/>
                       <a:round/>
@@ -10149,7 +10149,7 @@
                       <a:r>
                         <a:rPr lang="en-US" sz="900" b="1" dirty="0">
                           <a:solidFill>
-                            <a:srgbClr val="0F1318"/>
+                            <a:srgbClr val="2A0F57"/>
                           </a:solidFill>
                           <a:latin typeface="Calibri" pitchFamily="34" charset="0"/>
                           <a:ea typeface="Calibri" pitchFamily="34" charset="-122"/>
@@ -10176,7 +10176,7 @@
                     </a:lnT>
                     <a:lnB w="7620" cap="flat" cmpd="sng" algn="ctr">
                       <a:solidFill>
-                        <a:srgbClr val="DCD3C3"/>
+                        <a:srgbClr val="DDD9E5"/>
                       </a:solidFill>
                       <a:prstDash val="solid"/>
                       <a:round/>
@@ -10196,7 +10196,7 @@
                       <a:r>
                         <a:rPr lang="en-US" sz="900" dirty="0">
                           <a:solidFill>
-                            <a:srgbClr val="4A453E"/>
+                            <a:srgbClr val="47444D"/>
                           </a:solidFill>
                           <a:latin typeface="Calibri" pitchFamily="34" charset="0"/>
                           <a:ea typeface="Calibri" pitchFamily="34" charset="-122"/>
@@ -10223,7 +10223,7 @@
                     </a:lnT>
                     <a:lnB w="7620" cap="flat" cmpd="sng" algn="ctr">
                       <a:solidFill>
-                        <a:srgbClr val="DCD3C3"/>
+                        <a:srgbClr val="DDD9E5"/>
                       </a:solidFill>
                       <a:prstDash val="solid"/>
                       <a:round/>
@@ -10243,7 +10243,7 @@
                       <a:r>
                         <a:rPr lang="en-US" sz="900" dirty="0">
                           <a:solidFill>
-                            <a:srgbClr val="4A453E"/>
+                            <a:srgbClr val="47444D"/>
                           </a:solidFill>
                           <a:latin typeface="Calibri" pitchFamily="34" charset="0"/>
                           <a:ea typeface="Calibri" pitchFamily="34" charset="-122"/>
@@ -10270,7 +10270,7 @@
                     </a:lnT>
                     <a:lnB w="7620" cap="flat" cmpd="sng" algn="ctr">
                       <a:solidFill>
-                        <a:srgbClr val="DCD3C3"/>
+                        <a:srgbClr val="DDD9E5"/>
                       </a:solidFill>
                       <a:prstDash val="solid"/>
                       <a:round/>
@@ -10292,7 +10292,7 @@
                       <a:r>
                         <a:rPr lang="en-US" sz="900" b="1" dirty="0">
                           <a:solidFill>
-                            <a:srgbClr val="0F1318"/>
+                            <a:srgbClr val="2A0F57"/>
                           </a:solidFill>
                           <a:latin typeface="Calibri" pitchFamily="34" charset="0"/>
                           <a:ea typeface="Calibri" pitchFamily="34" charset="-122"/>
@@ -10319,7 +10319,7 @@
                     </a:lnT>
                     <a:lnB w="7620" cap="flat" cmpd="sng" algn="ctr">
                       <a:solidFill>
-                        <a:srgbClr val="DCD3C3"/>
+                        <a:srgbClr val="DDD9E5"/>
                       </a:solidFill>
                       <a:prstDash val="solid"/>
                       <a:round/>
@@ -10339,7 +10339,7 @@
                       <a:r>
                         <a:rPr lang="en-US" sz="900" dirty="0">
                           <a:solidFill>
-                            <a:srgbClr val="4A453E"/>
+                            <a:srgbClr val="47444D"/>
                           </a:solidFill>
                           <a:latin typeface="Calibri" pitchFamily="34" charset="0"/>
                           <a:ea typeface="Calibri" pitchFamily="34" charset="-122"/>
@@ -10366,7 +10366,7 @@
                     </a:lnT>
                     <a:lnB w="7620" cap="flat" cmpd="sng" algn="ctr">
                       <a:solidFill>
-                        <a:srgbClr val="DCD3C3"/>
+                        <a:srgbClr val="DDD9E5"/>
                       </a:solidFill>
                       <a:prstDash val="solid"/>
                       <a:round/>
@@ -10386,7 +10386,7 @@
                       <a:r>
                         <a:rPr lang="en-US" sz="900" dirty="0">
                           <a:solidFill>
-                            <a:srgbClr val="4A453E"/>
+                            <a:srgbClr val="47444D"/>
                           </a:solidFill>
                           <a:latin typeface="Calibri" pitchFamily="34" charset="0"/>
                           <a:ea typeface="Calibri" pitchFamily="34" charset="-122"/>
@@ -10413,7 +10413,7 @@
                     </a:lnT>
                     <a:lnB w="7620" cap="flat" cmpd="sng" algn="ctr">
                       <a:solidFill>
-                        <a:srgbClr val="DCD3C3"/>
+                        <a:srgbClr val="DDD9E5"/>
                       </a:solidFill>
                       <a:prstDash val="solid"/>
                       <a:round/>
@@ -10435,7 +10435,7 @@
                       <a:r>
                         <a:rPr lang="en-US" sz="900" b="1" dirty="0">
                           <a:solidFill>
-                            <a:srgbClr val="0F1318"/>
+                            <a:srgbClr val="2A0F57"/>
                           </a:solidFill>
                           <a:latin typeface="Calibri" pitchFamily="34" charset="0"/>
                           <a:ea typeface="Calibri" pitchFamily="34" charset="-122"/>
@@ -10462,7 +10462,7 @@
                     </a:lnT>
                     <a:lnB w="7620" cap="flat" cmpd="sng" algn="ctr">
                       <a:solidFill>
-                        <a:srgbClr val="DCD3C3"/>
+                        <a:srgbClr val="DDD9E5"/>
                       </a:solidFill>
                       <a:prstDash val="solid"/>
                       <a:round/>
@@ -10482,7 +10482,7 @@
                       <a:r>
                         <a:rPr lang="en-US" sz="900" dirty="0">
                           <a:solidFill>
-                            <a:srgbClr val="4A453E"/>
+                            <a:srgbClr val="47444D"/>
                           </a:solidFill>
                           <a:latin typeface="Calibri" pitchFamily="34" charset="0"/>
                           <a:ea typeface="Calibri" pitchFamily="34" charset="-122"/>
@@ -10509,7 +10509,7 @@
                     </a:lnT>
                     <a:lnB w="7620" cap="flat" cmpd="sng" algn="ctr">
                       <a:solidFill>
-                        <a:srgbClr val="DCD3C3"/>
+                        <a:srgbClr val="DDD9E5"/>
                       </a:solidFill>
                       <a:prstDash val="solid"/>
                       <a:round/>
@@ -10529,7 +10529,7 @@
                       <a:r>
                         <a:rPr lang="en-US" sz="900" dirty="0">
                           <a:solidFill>
-                            <a:srgbClr val="4A453E"/>
+                            <a:srgbClr val="47444D"/>
                           </a:solidFill>
                           <a:latin typeface="Calibri" pitchFamily="34" charset="0"/>
                           <a:ea typeface="Calibri" pitchFamily="34" charset="-122"/>
@@ -10556,7 +10556,7 @@
                     </a:lnT>
                     <a:lnB w="7620" cap="flat" cmpd="sng" algn="ctr">
                       <a:solidFill>
-                        <a:srgbClr val="DCD3C3"/>
+                        <a:srgbClr val="DDD9E5"/>
                       </a:solidFill>
                       <a:prstDash val="solid"/>
                       <a:round/>
@@ -10578,7 +10578,7 @@
                       <a:r>
                         <a:rPr lang="en-US" sz="900" b="1" dirty="0">
                           <a:solidFill>
-                            <a:srgbClr val="0F1318"/>
+                            <a:srgbClr val="2A0F57"/>
                           </a:solidFill>
                           <a:latin typeface="Calibri" pitchFamily="34" charset="0"/>
                           <a:ea typeface="Calibri" pitchFamily="34" charset="-122"/>
@@ -10605,7 +10605,7 @@
                     </a:lnT>
                     <a:lnB w="7620" cap="flat" cmpd="sng" algn="ctr">
                       <a:solidFill>
-                        <a:srgbClr val="DCD3C3"/>
+                        <a:srgbClr val="DDD9E5"/>
                       </a:solidFill>
                       <a:prstDash val="solid"/>
                       <a:round/>
@@ -10625,7 +10625,7 @@
                       <a:r>
                         <a:rPr lang="en-US" sz="900" dirty="0">
                           <a:solidFill>
-                            <a:srgbClr val="4A453E"/>
+                            <a:srgbClr val="47444D"/>
                           </a:solidFill>
                           <a:latin typeface="Calibri" pitchFamily="34" charset="0"/>
                           <a:ea typeface="Calibri" pitchFamily="34" charset="-122"/>
@@ -10652,7 +10652,7 @@
                     </a:lnT>
                     <a:lnB w="7620" cap="flat" cmpd="sng" algn="ctr">
                       <a:solidFill>
-                        <a:srgbClr val="DCD3C3"/>
+                        <a:srgbClr val="DDD9E5"/>
                       </a:solidFill>
                       <a:prstDash val="solid"/>
                       <a:round/>
@@ -10672,7 +10672,7 @@
                       <a:r>
                         <a:rPr lang="en-US" sz="900" dirty="0">
                           <a:solidFill>
-                            <a:srgbClr val="4A453E"/>
+                            <a:srgbClr val="47444D"/>
                           </a:solidFill>
                           <a:latin typeface="Calibri" pitchFamily="34" charset="0"/>
                           <a:ea typeface="Calibri" pitchFamily="34" charset="-122"/>
@@ -10699,7 +10699,7 @@
                     </a:lnT>
                     <a:lnB w="7620" cap="flat" cmpd="sng" algn="ctr">
                       <a:solidFill>
-                        <a:srgbClr val="DCD3C3"/>
+                        <a:srgbClr val="DDD9E5"/>
                       </a:solidFill>
                       <a:prstDash val="solid"/>
                       <a:round/>
@@ -10721,7 +10721,7 @@
                       <a:r>
                         <a:rPr lang="en-US" sz="900" b="1" dirty="0">
                           <a:solidFill>
-                            <a:srgbClr val="0F1318"/>
+                            <a:srgbClr val="2A0F57"/>
                           </a:solidFill>
                           <a:latin typeface="Calibri" pitchFamily="34" charset="0"/>
                           <a:ea typeface="Calibri" pitchFamily="34" charset="-122"/>
@@ -10748,7 +10748,7 @@
                     </a:lnT>
                     <a:lnB w="7620" cap="flat" cmpd="sng" algn="ctr">
                       <a:solidFill>
-                        <a:srgbClr val="DCD3C3"/>
+                        <a:srgbClr val="DDD9E5"/>
                       </a:solidFill>
                       <a:prstDash val="solid"/>
                       <a:round/>
@@ -10768,7 +10768,7 @@
                       <a:r>
                         <a:rPr lang="en-US" sz="900" dirty="0">
                           <a:solidFill>
-                            <a:srgbClr val="4A453E"/>
+                            <a:srgbClr val="47444D"/>
                           </a:solidFill>
                           <a:latin typeface="Calibri" pitchFamily="34" charset="0"/>
                           <a:ea typeface="Calibri" pitchFamily="34" charset="-122"/>
@@ -10795,7 +10795,7 @@
                     </a:lnT>
                     <a:lnB w="7620" cap="flat" cmpd="sng" algn="ctr">
                       <a:solidFill>
-                        <a:srgbClr val="DCD3C3"/>
+                        <a:srgbClr val="DDD9E5"/>
                       </a:solidFill>
                       <a:prstDash val="solid"/>
                       <a:round/>
@@ -10815,7 +10815,7 @@
                       <a:r>
                         <a:rPr lang="en-US" sz="900" dirty="0">
                           <a:solidFill>
-                            <a:srgbClr val="4A453E"/>
+                            <a:srgbClr val="47444D"/>
                           </a:solidFill>
                           <a:latin typeface="Calibri" pitchFamily="34" charset="0"/>
                           <a:ea typeface="Calibri" pitchFamily="34" charset="-122"/>
@@ -10842,7 +10842,7 @@
                     </a:lnT>
                     <a:lnB w="7620" cap="flat" cmpd="sng" algn="ctr">
                       <a:solidFill>
-                        <a:srgbClr val="DCD3C3"/>
+                        <a:srgbClr val="DDD9E5"/>
                       </a:solidFill>
                       <a:prstDash val="solid"/>
                       <a:round/>
@@ -10864,7 +10864,7 @@
                       <a:r>
                         <a:rPr lang="en-US" sz="900" b="1" dirty="0">
                           <a:solidFill>
-                            <a:srgbClr val="0F1318"/>
+                            <a:srgbClr val="2A0F57"/>
                           </a:solidFill>
                           <a:latin typeface="Calibri" pitchFamily="34" charset="0"/>
                           <a:ea typeface="Calibri" pitchFamily="34" charset="-122"/>
@@ -10891,7 +10891,7 @@
                     </a:lnT>
                     <a:lnB w="7620" cap="flat" cmpd="sng" algn="ctr">
                       <a:solidFill>
-                        <a:srgbClr val="DCD3C3"/>
+                        <a:srgbClr val="DDD9E5"/>
                       </a:solidFill>
                       <a:prstDash val="solid"/>
                       <a:round/>
@@ -10911,7 +10911,7 @@
                       <a:r>
                         <a:rPr lang="en-US" sz="900" dirty="0">
                           <a:solidFill>
-                            <a:srgbClr val="4A453E"/>
+                            <a:srgbClr val="47444D"/>
                           </a:solidFill>
                           <a:latin typeface="Calibri" pitchFamily="34" charset="0"/>
                           <a:ea typeface="Calibri" pitchFamily="34" charset="-122"/>
@@ -10938,7 +10938,7 @@
                     </a:lnT>
                     <a:lnB w="7620" cap="flat" cmpd="sng" algn="ctr">
                       <a:solidFill>
-                        <a:srgbClr val="DCD3C3"/>
+                        <a:srgbClr val="DDD9E5"/>
                       </a:solidFill>
                       <a:prstDash val="solid"/>
                       <a:round/>
@@ -10958,7 +10958,7 @@
                       <a:r>
                         <a:rPr lang="en-US" sz="900" dirty="0">
                           <a:solidFill>
-                            <a:srgbClr val="4A453E"/>
+                            <a:srgbClr val="47444D"/>
                           </a:solidFill>
                           <a:latin typeface="Calibri" pitchFamily="34" charset="0"/>
                           <a:ea typeface="Calibri" pitchFamily="34" charset="-122"/>
@@ -10985,7 +10985,7 @@
                     </a:lnT>
                     <a:lnB w="7620" cap="flat" cmpd="sng" algn="ctr">
                       <a:solidFill>
-                        <a:srgbClr val="DCD3C3"/>
+                        <a:srgbClr val="DDD9E5"/>
                       </a:solidFill>
                       <a:prstDash val="solid"/>
                       <a:round/>
@@ -11007,7 +11007,7 @@
                       <a:r>
                         <a:rPr lang="en-US" sz="900" b="1" dirty="0">
                           <a:solidFill>
-                            <a:srgbClr val="0F1318"/>
+                            <a:srgbClr val="2A0F57"/>
                           </a:solidFill>
                           <a:latin typeface="Calibri" pitchFamily="34" charset="0"/>
                           <a:ea typeface="Calibri" pitchFamily="34" charset="-122"/>
@@ -11034,7 +11034,7 @@
                     </a:lnT>
                     <a:lnB w="7620" cap="flat" cmpd="sng" algn="ctr">
                       <a:solidFill>
-                        <a:srgbClr val="DCD3C3"/>
+                        <a:srgbClr val="DDD9E5"/>
                       </a:solidFill>
                       <a:prstDash val="solid"/>
                       <a:round/>
@@ -11054,7 +11054,7 @@
                       <a:r>
                         <a:rPr lang="en-US" sz="900" dirty="0">
                           <a:solidFill>
-                            <a:srgbClr val="4A453E"/>
+                            <a:srgbClr val="47444D"/>
                           </a:solidFill>
                           <a:latin typeface="Calibri" pitchFamily="34" charset="0"/>
                           <a:ea typeface="Calibri" pitchFamily="34" charset="-122"/>
@@ -11081,7 +11081,7 @@
                     </a:lnT>
                     <a:lnB w="7620" cap="flat" cmpd="sng" algn="ctr">
                       <a:solidFill>
-                        <a:srgbClr val="DCD3C3"/>
+                        <a:srgbClr val="DDD9E5"/>
                       </a:solidFill>
                       <a:prstDash val="solid"/>
                       <a:round/>
@@ -11101,7 +11101,7 @@
                       <a:r>
                         <a:rPr lang="en-US" sz="900" dirty="0">
                           <a:solidFill>
-                            <a:srgbClr val="4A453E"/>
+                            <a:srgbClr val="47444D"/>
                           </a:solidFill>
                           <a:latin typeface="Calibri" pitchFamily="34" charset="0"/>
                           <a:ea typeface="Calibri" pitchFamily="34" charset="-122"/>
@@ -11128,7 +11128,7 @@
                     </a:lnT>
                     <a:lnB w="7620" cap="flat" cmpd="sng" algn="ctr">
                       <a:solidFill>
-                        <a:srgbClr val="DCD3C3"/>
+                        <a:srgbClr val="DDD9E5"/>
                       </a:solidFill>
                       <a:prstDash val="solid"/>
                       <a:round/>
@@ -11150,7 +11150,7 @@
                       <a:r>
                         <a:rPr lang="en-US" sz="900" b="1" dirty="0">
                           <a:solidFill>
-                            <a:srgbClr val="0F1318"/>
+                            <a:srgbClr val="2A0F57"/>
                           </a:solidFill>
                           <a:latin typeface="Calibri" pitchFamily="34" charset="0"/>
                           <a:ea typeface="Calibri" pitchFamily="34" charset="-122"/>
@@ -11177,7 +11177,7 @@
                     </a:lnT>
                     <a:lnB w="7620" cap="flat" cmpd="sng" algn="ctr">
                       <a:solidFill>
-                        <a:srgbClr val="DCD3C3"/>
+                        <a:srgbClr val="DDD9E5"/>
                       </a:solidFill>
                       <a:prstDash val="solid"/>
                       <a:round/>
@@ -11197,7 +11197,7 @@
                       <a:r>
                         <a:rPr lang="en-US" sz="900" dirty="0">
                           <a:solidFill>
-                            <a:srgbClr val="4A453E"/>
+                            <a:srgbClr val="47444D"/>
                           </a:solidFill>
                           <a:latin typeface="Calibri" pitchFamily="34" charset="0"/>
                           <a:ea typeface="Calibri" pitchFamily="34" charset="-122"/>
@@ -11224,7 +11224,7 @@
                     </a:lnT>
                     <a:lnB w="7620" cap="flat" cmpd="sng" algn="ctr">
                       <a:solidFill>
-                        <a:srgbClr val="DCD3C3"/>
+                        <a:srgbClr val="DDD9E5"/>
                       </a:solidFill>
                       <a:prstDash val="solid"/>
                       <a:round/>
@@ -11244,7 +11244,7 @@
                       <a:r>
                         <a:rPr lang="en-US" sz="900" dirty="0">
                           <a:solidFill>
-                            <a:srgbClr val="4A453E"/>
+                            <a:srgbClr val="47444D"/>
                           </a:solidFill>
                           <a:latin typeface="Calibri" pitchFamily="34" charset="0"/>
                           <a:ea typeface="Calibri" pitchFamily="34" charset="-122"/>
@@ -11271,7 +11271,7 @@
                     </a:lnT>
                     <a:lnB w="7620" cap="flat" cmpd="sng" algn="ctr">
                       <a:solidFill>
-                        <a:srgbClr val="DCD3C3"/>
+                        <a:srgbClr val="DDD9E5"/>
                       </a:solidFill>
                       <a:prstDash val="solid"/>
                       <a:round/>
@@ -11315,7 +11315,7 @@
             <a:r>
               <a:rPr lang="en-US" sz="750" dirty="0">
                 <a:solidFill>
-                  <a:srgbClr val="7C766B"/>
+                  <a:srgbClr val="6C6873"/>
                 </a:solidFill>
                 <a:latin typeface="Calibri" pitchFamily="34" charset="0"/>
                 <a:ea typeface="Calibri" pitchFamily="34" charset="-122"/>
@@ -11357,7 +11357,7 @@
             <a:r>
               <a:rPr lang="en-US" sz="800" dirty="0">
                 <a:solidFill>
-                  <a:srgbClr val="7C766B"/>
+                  <a:srgbClr val="6C6873"/>
                 </a:solidFill>
                 <a:latin typeface="Calibri" pitchFamily="34" charset="0"/>
                 <a:ea typeface="Calibri" pitchFamily="34" charset="-122"/>
@@ -11383,7 +11383,7 @@
     <p:bg>
       <p:bgPr>
         <a:solidFill>
-          <a:srgbClr val="F1ECE3"/>
+          <a:srgbClr val="F6F4F9"/>
         </a:solidFill>
       </p:bgPr>
     </p:bg>
@@ -11416,7 +11416,7 @@
             <a:avLst/>
           </a:prstGeom>
           <a:solidFill>
-            <a:srgbClr val="D98324"/>
+            <a:srgbClr val="6D3FD1"/>
           </a:solidFill>
           <a:ln/>
         </p:spPr>
@@ -11451,7 +11451,7 @@
             <a:r>
               <a:rPr lang="en-US" sz="800" b="1" spc="130" kern="0" dirty="0">
                 <a:solidFill>
-                  <a:srgbClr val="7C766B"/>
+                  <a:srgbClr val="6C6873"/>
                 </a:solidFill>
                 <a:latin typeface="Arial" pitchFamily="34" charset="0"/>
                 <a:ea typeface="Arial" pitchFamily="34" charset="-122"/>
@@ -11493,7 +11493,7 @@
             <a:r>
               <a:rPr lang="en-US" sz="2200" b="1" spc="-30" kern="0" dirty="0">
                 <a:solidFill>
-                  <a:srgbClr val="0F1318"/>
+                  <a:srgbClr val="2A0F57"/>
                 </a:solidFill>
                 <a:latin typeface="Arial" pitchFamily="34" charset="0"/>
                 <a:ea typeface="Arial" pitchFamily="34" charset="-122"/>
@@ -11560,7 +11560,7 @@
                     </a:lnT>
                     <a:lnB w="12700" cap="flat" cmpd="sng" algn="ctr">
                       <a:solidFill>
-                        <a:srgbClr val="0F1318"/>
+                        <a:srgbClr val="2A0F57"/>
                       </a:solidFill>
                       <a:prstDash val="solid"/>
                       <a:round/>
@@ -11580,7 +11580,7 @@
                       <a:r>
                         <a:rPr lang="en-US" sz="750" b="1" spc="100" kern="0" dirty="0">
                           <a:solidFill>
-                            <a:srgbClr val="7C766B"/>
+                            <a:srgbClr val="6C6873"/>
                           </a:solidFill>
                           <a:latin typeface="Arial" pitchFamily="34" charset="0"/>
                           <a:ea typeface="Arial" pitchFamily="34" charset="-122"/>
@@ -11607,7 +11607,7 @@
                     </a:lnT>
                     <a:lnB w="12700" cap="flat" cmpd="sng" algn="ctr">
                       <a:solidFill>
-                        <a:srgbClr val="0F1318"/>
+                        <a:srgbClr val="2A0F57"/>
                       </a:solidFill>
                       <a:prstDash val="solid"/>
                       <a:round/>
@@ -11627,7 +11627,7 @@
                       <a:r>
                         <a:rPr lang="en-US" sz="750" b="1" spc="100" kern="0" dirty="0">
                           <a:solidFill>
-                            <a:srgbClr val="7C766B"/>
+                            <a:srgbClr val="6C6873"/>
                           </a:solidFill>
                           <a:latin typeface="Arial" pitchFamily="34" charset="0"/>
                           <a:ea typeface="Arial" pitchFamily="34" charset="-122"/>
@@ -11654,7 +11654,7 @@
                     </a:lnT>
                     <a:lnB w="12700" cap="flat" cmpd="sng" algn="ctr">
                       <a:solidFill>
-                        <a:srgbClr val="0F1318"/>
+                        <a:srgbClr val="2A0F57"/>
                       </a:solidFill>
                       <a:prstDash val="solid"/>
                       <a:round/>
@@ -11676,7 +11676,7 @@
                       <a:r>
                         <a:rPr lang="en-US" sz="1100" b="1" dirty="0">
                           <a:solidFill>
-                            <a:srgbClr val="0F1318"/>
+                            <a:srgbClr val="2A0F57"/>
                           </a:solidFill>
                           <a:latin typeface="Calibri" pitchFamily="34" charset="0"/>
                           <a:ea typeface="Calibri" pitchFamily="34" charset="-122"/>
@@ -11703,7 +11703,7 @@
                     </a:lnT>
                     <a:lnB w="7620" cap="flat" cmpd="sng" algn="ctr">
                       <a:solidFill>
-                        <a:srgbClr val="DCD3C3"/>
+                        <a:srgbClr val="DDD9E5"/>
                       </a:solidFill>
                       <a:prstDash val="solid"/>
                       <a:round/>
@@ -11723,7 +11723,7 @@
                       <a:r>
                         <a:rPr lang="en-US" sz="1100" dirty="0">
                           <a:solidFill>
-                            <a:srgbClr val="4A453E"/>
+                            <a:srgbClr val="47444D"/>
                           </a:solidFill>
                           <a:latin typeface="Calibri" pitchFamily="34" charset="0"/>
                           <a:ea typeface="Calibri" pitchFamily="34" charset="-122"/>
@@ -11750,7 +11750,7 @@
                     </a:lnT>
                     <a:lnB w="7620" cap="flat" cmpd="sng" algn="ctr">
                       <a:solidFill>
-                        <a:srgbClr val="DCD3C3"/>
+                        <a:srgbClr val="DDD9E5"/>
                       </a:solidFill>
                       <a:prstDash val="solid"/>
                       <a:round/>
@@ -11770,7 +11770,7 @@
                       <a:r>
                         <a:rPr lang="en-US" sz="1100" dirty="0">
                           <a:solidFill>
-                            <a:srgbClr val="4A453E"/>
+                            <a:srgbClr val="47444D"/>
                           </a:solidFill>
                           <a:latin typeface="Calibri" pitchFamily="34" charset="0"/>
                           <a:ea typeface="Calibri" pitchFamily="34" charset="-122"/>
@@ -11797,7 +11797,7 @@
                     </a:lnT>
                     <a:lnB w="7620" cap="flat" cmpd="sng" algn="ctr">
                       <a:solidFill>
-                        <a:srgbClr val="DCD3C3"/>
+                        <a:srgbClr val="DDD9E5"/>
                       </a:solidFill>
                       <a:prstDash val="solid"/>
                       <a:round/>
@@ -11819,7 +11819,7 @@
                       <a:r>
                         <a:rPr lang="en-US" sz="1100" b="1" dirty="0">
                           <a:solidFill>
-                            <a:srgbClr val="0F1318"/>
+                            <a:srgbClr val="2A0F57"/>
                           </a:solidFill>
                           <a:latin typeface="Calibri" pitchFamily="34" charset="0"/>
                           <a:ea typeface="Calibri" pitchFamily="34" charset="-122"/>
@@ -11846,7 +11846,7 @@
                     </a:lnT>
                     <a:lnB w="7620" cap="flat" cmpd="sng" algn="ctr">
                       <a:solidFill>
-                        <a:srgbClr val="DCD3C3"/>
+                        <a:srgbClr val="DDD9E5"/>
                       </a:solidFill>
                       <a:prstDash val="solid"/>
                       <a:round/>
@@ -11866,7 +11866,7 @@
                       <a:r>
                         <a:rPr lang="en-US" sz="1100" dirty="0">
                           <a:solidFill>
-                            <a:srgbClr val="4A453E"/>
+                            <a:srgbClr val="47444D"/>
                           </a:solidFill>
                           <a:latin typeface="Calibri" pitchFamily="34" charset="0"/>
                           <a:ea typeface="Calibri" pitchFamily="34" charset="-122"/>
@@ -11893,7 +11893,7 @@
                     </a:lnT>
                     <a:lnB w="7620" cap="flat" cmpd="sng" algn="ctr">
                       <a:solidFill>
-                        <a:srgbClr val="DCD3C3"/>
+                        <a:srgbClr val="DDD9E5"/>
                       </a:solidFill>
                       <a:prstDash val="solid"/>
                       <a:round/>
@@ -11913,7 +11913,7 @@
                       <a:r>
                         <a:rPr lang="en-US" sz="1100" dirty="0">
                           <a:solidFill>
-                            <a:srgbClr val="4A453E"/>
+                            <a:srgbClr val="47444D"/>
                           </a:solidFill>
                           <a:latin typeface="Calibri" pitchFamily="34" charset="0"/>
                           <a:ea typeface="Calibri" pitchFamily="34" charset="-122"/>
@@ -11940,7 +11940,7 @@
                     </a:lnT>
                     <a:lnB w="7620" cap="flat" cmpd="sng" algn="ctr">
                       <a:solidFill>
-                        <a:srgbClr val="DCD3C3"/>
+                        <a:srgbClr val="DDD9E5"/>
                       </a:solidFill>
                       <a:prstDash val="solid"/>
                       <a:round/>
@@ -11984,7 +11984,7 @@
             <a:r>
               <a:rPr lang="en-US" sz="750" dirty="0">
                 <a:solidFill>
-                  <a:srgbClr val="7C766B"/>
+                  <a:srgbClr val="6C6873"/>
                 </a:solidFill>
                 <a:latin typeface="Calibri" pitchFamily="34" charset="0"/>
                 <a:ea typeface="Calibri" pitchFamily="34" charset="-122"/>
@@ -12026,7 +12026,7 @@
             <a:r>
               <a:rPr lang="en-US" sz="800" dirty="0">
                 <a:solidFill>
-                  <a:srgbClr val="7C766B"/>
+                  <a:srgbClr val="6C6873"/>
                 </a:solidFill>
                 <a:latin typeface="Calibri" pitchFamily="34" charset="0"/>
                 <a:ea typeface="Calibri" pitchFamily="34" charset="-122"/>
@@ -12052,7 +12052,7 @@
     <p:bg>
       <p:bgPr>
         <a:solidFill>
-          <a:srgbClr val="F1ECE3"/>
+          <a:srgbClr val="F6F4F9"/>
         </a:solidFill>
       </p:bgPr>
     </p:bg>
@@ -12085,7 +12085,7 @@
             <a:avLst/>
           </a:prstGeom>
           <a:solidFill>
-            <a:srgbClr val="D98324"/>
+            <a:srgbClr val="6D3FD1"/>
           </a:solidFill>
           <a:ln/>
         </p:spPr>
@@ -12120,7 +12120,7 @@
             <a:r>
               <a:rPr lang="en-US" sz="800" b="1" spc="130" kern="0" dirty="0">
                 <a:solidFill>
-                  <a:srgbClr val="7C766B"/>
+                  <a:srgbClr val="6C6873"/>
                 </a:solidFill>
                 <a:latin typeface="Arial" pitchFamily="34" charset="0"/>
                 <a:ea typeface="Arial" pitchFamily="34" charset="-122"/>
@@ -12162,7 +12162,7 @@
             <a:r>
               <a:rPr lang="en-US" sz="2400" b="1" spc="-30" kern="0" dirty="0">
                 <a:solidFill>
-                  <a:srgbClr val="0F1318"/>
+                  <a:srgbClr val="2A0F57"/>
                 </a:solidFill>
                 <a:latin typeface="Arial" pitchFamily="34" charset="0"/>
                 <a:ea typeface="Arial" pitchFamily="34" charset="-122"/>
@@ -12204,7 +12204,7 @@
             <a:r>
               <a:rPr lang="en-US" sz="750" dirty="0">
                 <a:solidFill>
-                  <a:srgbClr val="7C766B"/>
+                  <a:srgbClr val="6C6873"/>
                 </a:solidFill>
                 <a:latin typeface="Calibri" pitchFamily="34" charset="0"/>
                 <a:ea typeface="Calibri" pitchFamily="34" charset="-122"/>
@@ -12246,7 +12246,7 @@
             <a:r>
               <a:rPr lang="en-US" sz="800" dirty="0">
                 <a:solidFill>
-                  <a:srgbClr val="7C766B"/>
+                  <a:srgbClr val="6C6873"/>
                 </a:solidFill>
                 <a:latin typeface="Calibri" pitchFamily="34" charset="0"/>
                 <a:ea typeface="Calibri" pitchFamily="34" charset="-122"/>
@@ -12272,7 +12272,7 @@
     <p:bg>
       <p:bgPr>
         <a:solidFill>
-          <a:srgbClr val="F1ECE3"/>
+          <a:srgbClr val="F6F4F9"/>
         </a:solidFill>
       </p:bgPr>
     </p:bg>
@@ -12305,7 +12305,7 @@
             <a:avLst/>
           </a:prstGeom>
           <a:solidFill>
-            <a:srgbClr val="D98324"/>
+            <a:srgbClr val="6D3FD1"/>
           </a:solidFill>
           <a:ln/>
         </p:spPr>
@@ -12340,7 +12340,7 @@
             <a:r>
               <a:rPr lang="en-US" sz="800" b="1" spc="130" kern="0" dirty="0">
                 <a:solidFill>
-                  <a:srgbClr val="7C766B"/>
+                  <a:srgbClr val="6C6873"/>
                 </a:solidFill>
                 <a:latin typeface="Arial" pitchFamily="34" charset="0"/>
                 <a:ea typeface="Arial" pitchFamily="34" charset="-122"/>
@@ -12382,7 +12382,7 @@
             <a:r>
               <a:rPr lang="en-US" sz="2200" b="1" spc="-30" kern="0" dirty="0">
                 <a:solidFill>
-                  <a:srgbClr val="0F1318"/>
+                  <a:srgbClr val="2A0F57"/>
                 </a:solidFill>
                 <a:latin typeface="Arial" pitchFamily="34" charset="0"/>
                 <a:ea typeface="Arial" pitchFamily="34" charset="-122"/>
@@ -12429,7 +12429,7 @@
             <a:r>
               <a:rPr lang="en-US" sz="1150" dirty="0">
                 <a:solidFill>
-                  <a:srgbClr val="4A453E"/>
+                  <a:srgbClr val="47444D"/>
                 </a:solidFill>
                 <a:latin typeface="Calibri" pitchFamily="34" charset="0"/>
                 <a:ea typeface="Calibri" pitchFamily="34" charset="-122"/>
@@ -12496,7 +12496,7 @@
                     </a:lnT>
                     <a:lnB w="12700" cap="flat" cmpd="sng" algn="ctr">
                       <a:solidFill>
-                        <a:srgbClr val="0F1318"/>
+                        <a:srgbClr val="2A0F57"/>
                       </a:solidFill>
                       <a:prstDash val="solid"/>
                       <a:round/>
@@ -12516,7 +12516,7 @@
                       <a:r>
                         <a:rPr lang="en-US" sz="750" b="1" spc="100" kern="0" dirty="0">
                           <a:solidFill>
-                            <a:srgbClr val="7C766B"/>
+                            <a:srgbClr val="6C6873"/>
                           </a:solidFill>
                           <a:latin typeface="Arial" pitchFamily="34" charset="0"/>
                           <a:ea typeface="Arial" pitchFamily="34" charset="-122"/>
@@ -12543,7 +12543,7 @@
                     </a:lnT>
                     <a:lnB w="12700" cap="flat" cmpd="sng" algn="ctr">
                       <a:solidFill>
-                        <a:srgbClr val="0F1318"/>
+                        <a:srgbClr val="2A0F57"/>
                       </a:solidFill>
                       <a:prstDash val="solid"/>
                       <a:round/>
@@ -12563,7 +12563,7 @@
                       <a:r>
                         <a:rPr lang="en-US" sz="750" b="1" spc="100" kern="0" dirty="0">
                           <a:solidFill>
-                            <a:srgbClr val="7C766B"/>
+                            <a:srgbClr val="6C6873"/>
                           </a:solidFill>
                           <a:latin typeface="Arial" pitchFamily="34" charset="0"/>
                           <a:ea typeface="Arial" pitchFamily="34" charset="-122"/>
@@ -12590,7 +12590,7 @@
                     </a:lnT>
                     <a:lnB w="12700" cap="flat" cmpd="sng" algn="ctr">
                       <a:solidFill>
-                        <a:srgbClr val="0F1318"/>
+                        <a:srgbClr val="2A0F57"/>
                       </a:solidFill>
                       <a:prstDash val="solid"/>
                       <a:round/>
@@ -12612,7 +12612,7 @@
                       <a:r>
                         <a:rPr lang="en-US" sz="900" b="1" dirty="0">
                           <a:solidFill>
-                            <a:srgbClr val="0F1318"/>
+                            <a:srgbClr val="2A0F57"/>
                           </a:solidFill>
                           <a:latin typeface="Calibri" pitchFamily="34" charset="0"/>
                           <a:ea typeface="Calibri" pitchFamily="34" charset="-122"/>
@@ -12639,7 +12639,7 @@
                     </a:lnT>
                     <a:lnB w="7620" cap="flat" cmpd="sng" algn="ctr">
                       <a:solidFill>
-                        <a:srgbClr val="DCD3C3"/>
+                        <a:srgbClr val="DDD9E5"/>
                       </a:solidFill>
                       <a:prstDash val="solid"/>
                       <a:round/>
@@ -12659,7 +12659,7 @@
                       <a:r>
                         <a:rPr lang="en-US" sz="900" dirty="0">
                           <a:solidFill>
-                            <a:srgbClr val="4A453E"/>
+                            <a:srgbClr val="47444D"/>
                           </a:solidFill>
                           <a:latin typeface="Calibri" pitchFamily="34" charset="0"/>
                           <a:ea typeface="Calibri" pitchFamily="34" charset="-122"/>
@@ -12686,7 +12686,7 @@
                     </a:lnT>
                     <a:lnB w="7620" cap="flat" cmpd="sng" algn="ctr">
                       <a:solidFill>
-                        <a:srgbClr val="DCD3C3"/>
+                        <a:srgbClr val="DDD9E5"/>
                       </a:solidFill>
                       <a:prstDash val="solid"/>
                       <a:round/>
@@ -12706,7 +12706,7 @@
                       <a:r>
                         <a:rPr lang="en-US" sz="900" dirty="0">
                           <a:solidFill>
-                            <a:srgbClr val="4A453E"/>
+                            <a:srgbClr val="47444D"/>
                           </a:solidFill>
                           <a:latin typeface="Calibri" pitchFamily="34" charset="0"/>
                           <a:ea typeface="Calibri" pitchFamily="34" charset="-122"/>
@@ -12733,7 +12733,7 @@
                     </a:lnT>
                     <a:lnB w="7620" cap="flat" cmpd="sng" algn="ctr">
                       <a:solidFill>
-                        <a:srgbClr val="DCD3C3"/>
+                        <a:srgbClr val="DDD9E5"/>
                       </a:solidFill>
                       <a:prstDash val="solid"/>
                       <a:round/>
@@ -12755,7 +12755,7 @@
                       <a:r>
                         <a:rPr lang="en-US" sz="900" b="1" dirty="0">
                           <a:solidFill>
-                            <a:srgbClr val="0F1318"/>
+                            <a:srgbClr val="2A0F57"/>
                           </a:solidFill>
                           <a:latin typeface="Calibri" pitchFamily="34" charset="0"/>
                           <a:ea typeface="Calibri" pitchFamily="34" charset="-122"/>
@@ -12782,7 +12782,7 @@
                     </a:lnT>
                     <a:lnB w="7620" cap="flat" cmpd="sng" algn="ctr">
                       <a:solidFill>
-                        <a:srgbClr val="DCD3C3"/>
+                        <a:srgbClr val="DDD9E5"/>
                       </a:solidFill>
                       <a:prstDash val="solid"/>
                       <a:round/>
@@ -12802,7 +12802,7 @@
                       <a:r>
                         <a:rPr lang="en-US" sz="900" dirty="0">
                           <a:solidFill>
-                            <a:srgbClr val="4A453E"/>
+                            <a:srgbClr val="47444D"/>
                           </a:solidFill>
                           <a:latin typeface="Calibri" pitchFamily="34" charset="0"/>
                           <a:ea typeface="Calibri" pitchFamily="34" charset="-122"/>
@@ -12829,7 +12829,7 @@
                     </a:lnT>
                     <a:lnB w="7620" cap="flat" cmpd="sng" algn="ctr">
                       <a:solidFill>
-                        <a:srgbClr val="DCD3C3"/>
+                        <a:srgbClr val="DDD9E5"/>
                       </a:solidFill>
                       <a:prstDash val="solid"/>
                       <a:round/>
@@ -12849,7 +12849,7 @@
                       <a:r>
                         <a:rPr lang="en-US" sz="900" dirty="0">
                           <a:solidFill>
-                            <a:srgbClr val="4A453E"/>
+                            <a:srgbClr val="47444D"/>
                           </a:solidFill>
                           <a:latin typeface="Calibri" pitchFamily="34" charset="0"/>
                           <a:ea typeface="Calibri" pitchFamily="34" charset="-122"/>
@@ -12876,7 +12876,7 @@
                     </a:lnT>
                     <a:lnB w="7620" cap="flat" cmpd="sng" algn="ctr">
                       <a:solidFill>
-                        <a:srgbClr val="DCD3C3"/>
+                        <a:srgbClr val="DDD9E5"/>
                       </a:solidFill>
                       <a:prstDash val="solid"/>
                       <a:round/>
@@ -12898,7 +12898,7 @@
                       <a:r>
                         <a:rPr lang="en-US" sz="900" b="1" dirty="0">
                           <a:solidFill>
-                            <a:srgbClr val="0F1318"/>
+                            <a:srgbClr val="2A0F57"/>
                           </a:solidFill>
                           <a:latin typeface="Calibri" pitchFamily="34" charset="0"/>
                           <a:ea typeface="Calibri" pitchFamily="34" charset="-122"/>
@@ -12925,7 +12925,7 @@
                     </a:lnT>
                     <a:lnB w="7620" cap="flat" cmpd="sng" algn="ctr">
                       <a:solidFill>
-                        <a:srgbClr val="DCD3C3"/>
+                        <a:srgbClr val="DDD9E5"/>
                       </a:solidFill>
                       <a:prstDash val="solid"/>
                       <a:round/>
@@ -12945,7 +12945,7 @@
                       <a:r>
                         <a:rPr lang="en-US" sz="900" dirty="0">
                           <a:solidFill>
-                            <a:srgbClr val="4A453E"/>
+                            <a:srgbClr val="47444D"/>
                           </a:solidFill>
                           <a:latin typeface="Calibri" pitchFamily="34" charset="0"/>
                           <a:ea typeface="Calibri" pitchFamily="34" charset="-122"/>
@@ -12972,7 +12972,7 @@
                     </a:lnT>
                     <a:lnB w="7620" cap="flat" cmpd="sng" algn="ctr">
                       <a:solidFill>
-                        <a:srgbClr val="DCD3C3"/>
+                        <a:srgbClr val="DDD9E5"/>
                       </a:solidFill>
                       <a:prstDash val="solid"/>
                       <a:round/>
@@ -12992,7 +12992,7 @@
                       <a:r>
                         <a:rPr lang="en-US" sz="900" dirty="0">
                           <a:solidFill>
-                            <a:srgbClr val="4A453E"/>
+                            <a:srgbClr val="47444D"/>
                           </a:solidFill>
                           <a:latin typeface="Calibri" pitchFamily="34" charset="0"/>
                           <a:ea typeface="Calibri" pitchFamily="34" charset="-122"/>
@@ -13019,7 +13019,7 @@
                     </a:lnT>
                     <a:lnB w="7620" cap="flat" cmpd="sng" algn="ctr">
                       <a:solidFill>
-                        <a:srgbClr val="DCD3C3"/>
+                        <a:srgbClr val="DDD9E5"/>
                       </a:solidFill>
                       <a:prstDash val="solid"/>
                       <a:round/>
@@ -13041,7 +13041,7 @@
                       <a:r>
                         <a:rPr lang="en-US" sz="900" b="1" dirty="0">
                           <a:solidFill>
-                            <a:srgbClr val="0F1318"/>
+                            <a:srgbClr val="2A0F57"/>
                           </a:solidFill>
                           <a:latin typeface="Calibri" pitchFamily="34" charset="0"/>
                           <a:ea typeface="Calibri" pitchFamily="34" charset="-122"/>
@@ -13068,7 +13068,7 @@
                     </a:lnT>
                     <a:lnB w="7620" cap="flat" cmpd="sng" algn="ctr">
                       <a:solidFill>
-                        <a:srgbClr val="DCD3C3"/>
+                        <a:srgbClr val="DDD9E5"/>
                       </a:solidFill>
                       <a:prstDash val="solid"/>
                       <a:round/>
@@ -13088,7 +13088,7 @@
                       <a:r>
                         <a:rPr lang="en-US" sz="900" dirty="0">
                           <a:solidFill>
-                            <a:srgbClr val="4A453E"/>
+                            <a:srgbClr val="47444D"/>
                           </a:solidFill>
                           <a:latin typeface="Calibri" pitchFamily="34" charset="0"/>
                           <a:ea typeface="Calibri" pitchFamily="34" charset="-122"/>
@@ -13115,7 +13115,7 @@
                     </a:lnT>
                     <a:lnB w="7620" cap="flat" cmpd="sng" algn="ctr">
                       <a:solidFill>
-                        <a:srgbClr val="DCD3C3"/>
+                        <a:srgbClr val="DDD9E5"/>
                       </a:solidFill>
                       <a:prstDash val="solid"/>
                       <a:round/>
@@ -13135,7 +13135,7 @@
                       <a:r>
                         <a:rPr lang="en-US" sz="900" dirty="0">
                           <a:solidFill>
-                            <a:srgbClr val="4A453E"/>
+                            <a:srgbClr val="47444D"/>
                           </a:solidFill>
                           <a:latin typeface="Calibri" pitchFamily="34" charset="0"/>
                           <a:ea typeface="Calibri" pitchFamily="34" charset="-122"/>
@@ -13162,7 +13162,7 @@
                     </a:lnT>
                     <a:lnB w="7620" cap="flat" cmpd="sng" algn="ctr">
                       <a:solidFill>
-                        <a:srgbClr val="DCD3C3"/>
+                        <a:srgbClr val="DDD9E5"/>
                       </a:solidFill>
                       <a:prstDash val="solid"/>
                       <a:round/>
@@ -13184,7 +13184,7 @@
                       <a:r>
                         <a:rPr lang="en-US" sz="900" b="1" dirty="0">
                           <a:solidFill>
-                            <a:srgbClr val="0F1318"/>
+                            <a:srgbClr val="2A0F57"/>
                           </a:solidFill>
                           <a:latin typeface="Calibri" pitchFamily="34" charset="0"/>
                           <a:ea typeface="Calibri" pitchFamily="34" charset="-122"/>
@@ -13211,7 +13211,7 @@
                     </a:lnT>
                     <a:lnB w="7620" cap="flat" cmpd="sng" algn="ctr">
                       <a:solidFill>
-                        <a:srgbClr val="DCD3C3"/>
+                        <a:srgbClr val="DDD9E5"/>
                       </a:solidFill>
                       <a:prstDash val="solid"/>
                       <a:round/>
@@ -13231,7 +13231,7 @@
                       <a:r>
                         <a:rPr lang="en-US" sz="900" dirty="0">
                           <a:solidFill>
-                            <a:srgbClr val="4A453E"/>
+                            <a:srgbClr val="47444D"/>
                           </a:solidFill>
                           <a:latin typeface="Calibri" pitchFamily="34" charset="0"/>
                           <a:ea typeface="Calibri" pitchFamily="34" charset="-122"/>
@@ -13258,7 +13258,7 @@
                     </a:lnT>
                     <a:lnB w="7620" cap="flat" cmpd="sng" algn="ctr">
                       <a:solidFill>
-                        <a:srgbClr val="DCD3C3"/>
+                        <a:srgbClr val="DDD9E5"/>
                       </a:solidFill>
                       <a:prstDash val="solid"/>
                       <a:round/>
@@ -13278,7 +13278,7 @@
                       <a:r>
                         <a:rPr lang="en-US" sz="900" dirty="0">
                           <a:solidFill>
-                            <a:srgbClr val="4A453E"/>
+                            <a:srgbClr val="47444D"/>
                           </a:solidFill>
                           <a:latin typeface="Calibri" pitchFamily="34" charset="0"/>
                           <a:ea typeface="Calibri" pitchFamily="34" charset="-122"/>
@@ -13305,7 +13305,7 @@
                     </a:lnT>
                     <a:lnB w="7620" cap="flat" cmpd="sng" algn="ctr">
                       <a:solidFill>
-                        <a:srgbClr val="DCD3C3"/>
+                        <a:srgbClr val="DDD9E5"/>
                       </a:solidFill>
                       <a:prstDash val="solid"/>
                       <a:round/>
@@ -13327,7 +13327,7 @@
                       <a:r>
                         <a:rPr lang="en-US" sz="900" b="1" dirty="0">
                           <a:solidFill>
-                            <a:srgbClr val="0F1318"/>
+                            <a:srgbClr val="2A0F57"/>
                           </a:solidFill>
                           <a:latin typeface="Calibri" pitchFamily="34" charset="0"/>
                           <a:ea typeface="Calibri" pitchFamily="34" charset="-122"/>
@@ -13354,7 +13354,7 @@
                     </a:lnT>
                     <a:lnB w="7620" cap="flat" cmpd="sng" algn="ctr">
                       <a:solidFill>
-                        <a:srgbClr val="DCD3C3"/>
+                        <a:srgbClr val="DDD9E5"/>
                       </a:solidFill>
                       <a:prstDash val="solid"/>
                       <a:round/>
@@ -13374,7 +13374,7 @@
                       <a:r>
                         <a:rPr lang="en-US" sz="900" dirty="0">
                           <a:solidFill>
-                            <a:srgbClr val="4A453E"/>
+                            <a:srgbClr val="47444D"/>
                           </a:solidFill>
                           <a:latin typeface="Calibri" pitchFamily="34" charset="0"/>
                           <a:ea typeface="Calibri" pitchFamily="34" charset="-122"/>
@@ -13401,7 +13401,7 @@
                     </a:lnT>
                     <a:lnB w="7620" cap="flat" cmpd="sng" algn="ctr">
                       <a:solidFill>
-                        <a:srgbClr val="DCD3C3"/>
+                        <a:srgbClr val="DDD9E5"/>
                       </a:solidFill>
                       <a:prstDash val="solid"/>
                       <a:round/>
@@ -13421,7 +13421,7 @@
                       <a:r>
                         <a:rPr lang="en-US" sz="900" dirty="0">
                           <a:solidFill>
-                            <a:srgbClr val="4A453E"/>
+                            <a:srgbClr val="47444D"/>
                           </a:solidFill>
                           <a:latin typeface="Calibri" pitchFamily="34" charset="0"/>
                           <a:ea typeface="Calibri" pitchFamily="34" charset="-122"/>
@@ -13448,7 +13448,7 @@
                     </a:lnT>
                     <a:lnB w="7620" cap="flat" cmpd="sng" algn="ctr">
                       <a:solidFill>
-                        <a:srgbClr val="DCD3C3"/>
+                        <a:srgbClr val="DDD9E5"/>
                       </a:solidFill>
                       <a:prstDash val="solid"/>
                       <a:round/>
@@ -13470,7 +13470,7 @@
                       <a:r>
                         <a:rPr lang="en-US" sz="900" b="1" dirty="0">
                           <a:solidFill>
-                            <a:srgbClr val="0F1318"/>
+                            <a:srgbClr val="2A0F57"/>
                           </a:solidFill>
                           <a:latin typeface="Calibri" pitchFamily="34" charset="0"/>
                           <a:ea typeface="Calibri" pitchFamily="34" charset="-122"/>
@@ -13497,7 +13497,7 @@
                     </a:lnT>
                     <a:lnB w="7620" cap="flat" cmpd="sng" algn="ctr">
                       <a:solidFill>
-                        <a:srgbClr val="DCD3C3"/>
+                        <a:srgbClr val="DDD9E5"/>
                       </a:solidFill>
                       <a:prstDash val="solid"/>
                       <a:round/>
@@ -13517,7 +13517,7 @@
                       <a:r>
                         <a:rPr lang="en-US" sz="900" dirty="0">
                           <a:solidFill>
-                            <a:srgbClr val="4A453E"/>
+                            <a:srgbClr val="47444D"/>
                           </a:solidFill>
                           <a:latin typeface="Calibri" pitchFamily="34" charset="0"/>
                           <a:ea typeface="Calibri" pitchFamily="34" charset="-122"/>
@@ -13544,7 +13544,7 @@
                     </a:lnT>
                     <a:lnB w="7620" cap="flat" cmpd="sng" algn="ctr">
                       <a:solidFill>
-                        <a:srgbClr val="DCD3C3"/>
+                        <a:srgbClr val="DDD9E5"/>
                       </a:solidFill>
                       <a:prstDash val="solid"/>
                       <a:round/>
@@ -13564,7 +13564,7 @@
                       <a:r>
                         <a:rPr lang="en-US" sz="900" dirty="0">
                           <a:solidFill>
-                            <a:srgbClr val="4A453E"/>
+                            <a:srgbClr val="47444D"/>
                           </a:solidFill>
                           <a:latin typeface="Calibri" pitchFamily="34" charset="0"/>
                           <a:ea typeface="Calibri" pitchFamily="34" charset="-122"/>
@@ -13591,7 +13591,7 @@
                     </a:lnT>
                     <a:lnB w="7620" cap="flat" cmpd="sng" algn="ctr">
                       <a:solidFill>
-                        <a:srgbClr val="DCD3C3"/>
+                        <a:srgbClr val="DDD9E5"/>
                       </a:solidFill>
                       <a:prstDash val="solid"/>
                       <a:round/>
@@ -13613,7 +13613,7 @@
                       <a:r>
                         <a:rPr lang="en-US" sz="900" b="1" dirty="0">
                           <a:solidFill>
-                            <a:srgbClr val="0F1318"/>
+                            <a:srgbClr val="2A0F57"/>
                           </a:solidFill>
                           <a:latin typeface="Calibri" pitchFamily="34" charset="0"/>
                           <a:ea typeface="Calibri" pitchFamily="34" charset="-122"/>
@@ -13640,7 +13640,7 @@
                     </a:lnT>
                     <a:lnB w="7620" cap="flat" cmpd="sng" algn="ctr">
                       <a:solidFill>
-                        <a:srgbClr val="DCD3C3"/>
+                        <a:srgbClr val="DDD9E5"/>
                       </a:solidFill>
                       <a:prstDash val="solid"/>
                       <a:round/>
@@ -13660,7 +13660,7 @@
                       <a:r>
                         <a:rPr lang="en-US" sz="900" dirty="0">
                           <a:solidFill>
-                            <a:srgbClr val="4A453E"/>
+                            <a:srgbClr val="47444D"/>
                           </a:solidFill>
                           <a:latin typeface="Calibri" pitchFamily="34" charset="0"/>
                           <a:ea typeface="Calibri" pitchFamily="34" charset="-122"/>
@@ -13687,7 +13687,7 @@
                     </a:lnT>
                     <a:lnB w="7620" cap="flat" cmpd="sng" algn="ctr">
                       <a:solidFill>
-                        <a:srgbClr val="DCD3C3"/>
+                        <a:srgbClr val="DDD9E5"/>
                       </a:solidFill>
                       <a:prstDash val="solid"/>
                       <a:round/>
@@ -13707,7 +13707,7 @@
                       <a:r>
                         <a:rPr lang="en-US" sz="900" dirty="0">
                           <a:solidFill>
-                            <a:srgbClr val="4A453E"/>
+                            <a:srgbClr val="47444D"/>
                           </a:solidFill>
                           <a:latin typeface="Calibri" pitchFamily="34" charset="0"/>
                           <a:ea typeface="Calibri" pitchFamily="34" charset="-122"/>
@@ -13734,7 +13734,7 @@
                     </a:lnT>
                     <a:lnB w="7620" cap="flat" cmpd="sng" algn="ctr">
                       <a:solidFill>
-                        <a:srgbClr val="DCD3C3"/>
+                        <a:srgbClr val="DDD9E5"/>
                       </a:solidFill>
                       <a:prstDash val="solid"/>
                       <a:round/>
@@ -13778,7 +13778,7 @@
             <a:r>
               <a:rPr lang="en-US" sz="750" dirty="0">
                 <a:solidFill>
-                  <a:srgbClr val="7C766B"/>
+                  <a:srgbClr val="6C6873"/>
                 </a:solidFill>
                 <a:latin typeface="Calibri" pitchFamily="34" charset="0"/>
                 <a:ea typeface="Calibri" pitchFamily="34" charset="-122"/>
@@ -13820,7 +13820,7 @@
             <a:r>
               <a:rPr lang="en-US" sz="800" dirty="0">
                 <a:solidFill>
-                  <a:srgbClr val="7C766B"/>
+                  <a:srgbClr val="6C6873"/>
                 </a:solidFill>
                 <a:latin typeface="Calibri" pitchFamily="34" charset="0"/>
                 <a:ea typeface="Calibri" pitchFamily="34" charset="-122"/>
@@ -13846,7 +13846,7 @@
     <p:bg>
       <p:bgPr>
         <a:solidFill>
-          <a:srgbClr val="F1ECE3"/>
+          <a:srgbClr val="F6F4F9"/>
         </a:solidFill>
       </p:bgPr>
     </p:bg>
@@ -13879,7 +13879,7 @@
             <a:avLst/>
           </a:prstGeom>
           <a:solidFill>
-            <a:srgbClr val="D98324"/>
+            <a:srgbClr val="6D3FD1"/>
           </a:solidFill>
           <a:ln/>
         </p:spPr>
@@ -13914,7 +13914,7 @@
             <a:r>
               <a:rPr lang="en-US" sz="800" b="1" spc="130" kern="0" dirty="0">
                 <a:solidFill>
-                  <a:srgbClr val="7C766B"/>
+                  <a:srgbClr val="6C6873"/>
                 </a:solidFill>
                 <a:latin typeface="Arial" pitchFamily="34" charset="0"/>
                 <a:ea typeface="Arial" pitchFamily="34" charset="-122"/>
@@ -13956,7 +13956,7 @@
             <a:r>
               <a:rPr lang="en-US" sz="2200" b="1" spc="-30" kern="0" dirty="0">
                 <a:solidFill>
-                  <a:srgbClr val="0F1318"/>
+                  <a:srgbClr val="2A0F57"/>
                 </a:solidFill>
                 <a:latin typeface="Arial" pitchFamily="34" charset="0"/>
                 <a:ea typeface="Arial" pitchFamily="34" charset="-122"/>
@@ -14023,7 +14023,7 @@
                     </a:lnT>
                     <a:lnB w="12700" cap="flat" cmpd="sng" algn="ctr">
                       <a:solidFill>
-                        <a:srgbClr val="0F1318"/>
+                        <a:srgbClr val="2A0F57"/>
                       </a:solidFill>
                       <a:prstDash val="solid"/>
                       <a:round/>
@@ -14043,7 +14043,7 @@
                       <a:r>
                         <a:rPr lang="en-US" sz="750" b="1" spc="100" kern="0" dirty="0">
                           <a:solidFill>
-                            <a:srgbClr val="7C766B"/>
+                            <a:srgbClr val="6C6873"/>
                           </a:solidFill>
                           <a:latin typeface="Arial" pitchFamily="34" charset="0"/>
                           <a:ea typeface="Arial" pitchFamily="34" charset="-122"/>
@@ -14070,7 +14070,7 @@
                     </a:lnT>
                     <a:lnB w="12700" cap="flat" cmpd="sng" algn="ctr">
                       <a:solidFill>
-                        <a:srgbClr val="0F1318"/>
+                        <a:srgbClr val="2A0F57"/>
                       </a:solidFill>
                       <a:prstDash val="solid"/>
                       <a:round/>
@@ -14090,7 +14090,7 @@
                       <a:r>
                         <a:rPr lang="en-US" sz="750" b="1" spc="100" kern="0" dirty="0">
                           <a:solidFill>
-                            <a:srgbClr val="7C766B"/>
+                            <a:srgbClr val="6C6873"/>
                           </a:solidFill>
                           <a:latin typeface="Arial" pitchFamily="34" charset="0"/>
                           <a:ea typeface="Arial" pitchFamily="34" charset="-122"/>
@@ -14117,7 +14117,7 @@
                     </a:lnT>
                     <a:lnB w="12700" cap="flat" cmpd="sng" algn="ctr">
                       <a:solidFill>
-                        <a:srgbClr val="0F1318"/>
+                        <a:srgbClr val="2A0F57"/>
                       </a:solidFill>
                       <a:prstDash val="solid"/>
                       <a:round/>
@@ -14139,7 +14139,7 @@
                       <a:r>
                         <a:rPr lang="en-US" sz="1100" b="1" dirty="0">
                           <a:solidFill>
-                            <a:srgbClr val="0F1318"/>
+                            <a:srgbClr val="2A0F57"/>
                           </a:solidFill>
                           <a:latin typeface="Calibri" pitchFamily="34" charset="0"/>
                           <a:ea typeface="Calibri" pitchFamily="34" charset="-122"/>
@@ -14166,7 +14166,7 @@
                     </a:lnT>
                     <a:lnB w="7620" cap="flat" cmpd="sng" algn="ctr">
                       <a:solidFill>
-                        <a:srgbClr val="DCD3C3"/>
+                        <a:srgbClr val="DDD9E5"/>
                       </a:solidFill>
                       <a:prstDash val="solid"/>
                       <a:round/>
@@ -14186,7 +14186,7 @@
                       <a:r>
                         <a:rPr lang="en-US" sz="1100" dirty="0">
                           <a:solidFill>
-                            <a:srgbClr val="4A453E"/>
+                            <a:srgbClr val="47444D"/>
                           </a:solidFill>
                           <a:latin typeface="Calibri" pitchFamily="34" charset="0"/>
                           <a:ea typeface="Calibri" pitchFamily="34" charset="-122"/>
@@ -14213,7 +14213,7 @@
                     </a:lnT>
                     <a:lnB w="7620" cap="flat" cmpd="sng" algn="ctr">
                       <a:solidFill>
-                        <a:srgbClr val="DCD3C3"/>
+                        <a:srgbClr val="DDD9E5"/>
                       </a:solidFill>
                       <a:prstDash val="solid"/>
                       <a:round/>
@@ -14233,7 +14233,7 @@
                       <a:r>
                         <a:rPr lang="en-US" sz="1100" dirty="0">
                           <a:solidFill>
-                            <a:srgbClr val="4A453E"/>
+                            <a:srgbClr val="47444D"/>
                           </a:solidFill>
                           <a:latin typeface="Calibri" pitchFamily="34" charset="0"/>
                           <a:ea typeface="Calibri" pitchFamily="34" charset="-122"/>
@@ -14260,7 +14260,7 @@
                     </a:lnT>
                     <a:lnB w="7620" cap="flat" cmpd="sng" algn="ctr">
                       <a:solidFill>
-                        <a:srgbClr val="DCD3C3"/>
+                        <a:srgbClr val="DDD9E5"/>
                       </a:solidFill>
                       <a:prstDash val="solid"/>
                       <a:round/>
@@ -14282,7 +14282,7 @@
                       <a:r>
                         <a:rPr lang="en-US" sz="1100" b="1" dirty="0">
                           <a:solidFill>
-                            <a:srgbClr val="0F1318"/>
+                            <a:srgbClr val="2A0F57"/>
                           </a:solidFill>
                           <a:latin typeface="Calibri" pitchFamily="34" charset="0"/>
                           <a:ea typeface="Calibri" pitchFamily="34" charset="-122"/>
@@ -14309,7 +14309,7 @@
                     </a:lnT>
                     <a:lnB w="7620" cap="flat" cmpd="sng" algn="ctr">
                       <a:solidFill>
-                        <a:srgbClr val="DCD3C3"/>
+                        <a:srgbClr val="DDD9E5"/>
                       </a:solidFill>
                       <a:prstDash val="solid"/>
                       <a:round/>
@@ -14329,7 +14329,7 @@
                       <a:r>
                         <a:rPr lang="en-US" sz="1100" dirty="0">
                           <a:solidFill>
-                            <a:srgbClr val="4A453E"/>
+                            <a:srgbClr val="47444D"/>
                           </a:solidFill>
                           <a:latin typeface="Calibri" pitchFamily="34" charset="0"/>
                           <a:ea typeface="Calibri" pitchFamily="34" charset="-122"/>
@@ -14356,7 +14356,7 @@
                     </a:lnT>
                     <a:lnB w="7620" cap="flat" cmpd="sng" algn="ctr">
                       <a:solidFill>
-                        <a:srgbClr val="DCD3C3"/>
+                        <a:srgbClr val="DDD9E5"/>
                       </a:solidFill>
                       <a:prstDash val="solid"/>
                       <a:round/>
@@ -14376,7 +14376,7 @@
                       <a:r>
                         <a:rPr lang="en-US" sz="1100" dirty="0">
                           <a:solidFill>
-                            <a:srgbClr val="4A453E"/>
+                            <a:srgbClr val="47444D"/>
                           </a:solidFill>
                           <a:latin typeface="Calibri" pitchFamily="34" charset="0"/>
                           <a:ea typeface="Calibri" pitchFamily="34" charset="-122"/>
@@ -14403,7 +14403,7 @@
                     </a:lnT>
                     <a:lnB w="7620" cap="flat" cmpd="sng" algn="ctr">
                       <a:solidFill>
-                        <a:srgbClr val="DCD3C3"/>
+                        <a:srgbClr val="DDD9E5"/>
                       </a:solidFill>
                       <a:prstDash val="solid"/>
                       <a:round/>
@@ -14425,7 +14425,7 @@
                       <a:r>
                         <a:rPr lang="en-US" sz="1100" b="1" dirty="0">
                           <a:solidFill>
-                            <a:srgbClr val="0F1318"/>
+                            <a:srgbClr val="2A0F57"/>
                           </a:solidFill>
                           <a:latin typeface="Calibri" pitchFamily="34" charset="0"/>
                           <a:ea typeface="Calibri" pitchFamily="34" charset="-122"/>
@@ -14452,7 +14452,7 @@
                     </a:lnT>
                     <a:lnB w="7620" cap="flat" cmpd="sng" algn="ctr">
                       <a:solidFill>
-                        <a:srgbClr val="DCD3C3"/>
+                        <a:srgbClr val="DDD9E5"/>
                       </a:solidFill>
                       <a:prstDash val="solid"/>
                       <a:round/>
@@ -14472,7 +14472,7 @@
                       <a:r>
                         <a:rPr lang="en-US" sz="1100" dirty="0">
                           <a:solidFill>
-                            <a:srgbClr val="4A453E"/>
+                            <a:srgbClr val="47444D"/>
                           </a:solidFill>
                           <a:latin typeface="Calibri" pitchFamily="34" charset="0"/>
                           <a:ea typeface="Calibri" pitchFamily="34" charset="-122"/>
@@ -14499,7 +14499,7 @@
                     </a:lnT>
                     <a:lnB w="7620" cap="flat" cmpd="sng" algn="ctr">
                       <a:solidFill>
-                        <a:srgbClr val="DCD3C3"/>
+                        <a:srgbClr val="DDD9E5"/>
                       </a:solidFill>
                       <a:prstDash val="solid"/>
                       <a:round/>
@@ -14519,7 +14519,7 @@
                       <a:r>
                         <a:rPr lang="en-US" sz="1100" dirty="0">
                           <a:solidFill>
-                            <a:srgbClr val="4A453E"/>
+                            <a:srgbClr val="47444D"/>
                           </a:solidFill>
                           <a:latin typeface="Calibri" pitchFamily="34" charset="0"/>
                           <a:ea typeface="Calibri" pitchFamily="34" charset="-122"/>
@@ -14546,7 +14546,7 @@
                     </a:lnT>
                     <a:lnB w="7620" cap="flat" cmpd="sng" algn="ctr">
                       <a:solidFill>
-                        <a:srgbClr val="DCD3C3"/>
+                        <a:srgbClr val="DDD9E5"/>
                       </a:solidFill>
                       <a:prstDash val="solid"/>
                       <a:round/>
@@ -14590,7 +14590,7 @@
             <a:r>
               <a:rPr lang="en-US" sz="750" dirty="0">
                 <a:solidFill>
-                  <a:srgbClr val="7C766B"/>
+                  <a:srgbClr val="6C6873"/>
                 </a:solidFill>
                 <a:latin typeface="Calibri" pitchFamily="34" charset="0"/>
                 <a:ea typeface="Calibri" pitchFamily="34" charset="-122"/>
@@ -14632,7 +14632,7 @@
             <a:r>
               <a:rPr lang="en-US" sz="800" dirty="0">
                 <a:solidFill>
-                  <a:srgbClr val="7C766B"/>
+                  <a:srgbClr val="6C6873"/>
                 </a:solidFill>
                 <a:latin typeface="Calibri" pitchFamily="34" charset="0"/>
                 <a:ea typeface="Calibri" pitchFamily="34" charset="-122"/>
@@ -14658,7 +14658,7 @@
     <p:bg>
       <p:bgPr>
         <a:solidFill>
-          <a:srgbClr val="F1ECE3"/>
+          <a:srgbClr val="F6F4F9"/>
         </a:solidFill>
       </p:bgPr>
     </p:bg>
@@ -14691,7 +14691,7 @@
             <a:avLst/>
           </a:prstGeom>
           <a:solidFill>
-            <a:srgbClr val="D98324"/>
+            <a:srgbClr val="6D3FD1"/>
           </a:solidFill>
           <a:ln/>
         </p:spPr>
@@ -14726,7 +14726,7 @@
             <a:r>
               <a:rPr lang="en-US" sz="800" b="1" spc="130" kern="0" dirty="0">
                 <a:solidFill>
-                  <a:srgbClr val="7C766B"/>
+                  <a:srgbClr val="6C6873"/>
                 </a:solidFill>
                 <a:latin typeface="Arial" pitchFamily="34" charset="0"/>
                 <a:ea typeface="Arial" pitchFamily="34" charset="-122"/>
@@ -14768,7 +14768,7 @@
             <a:r>
               <a:rPr lang="en-US" sz="2200" b="1" spc="-30" kern="0" dirty="0">
                 <a:solidFill>
-                  <a:srgbClr val="0F1318"/>
+                  <a:srgbClr val="2A0F57"/>
                 </a:solidFill>
                 <a:latin typeface="Arial" pitchFamily="34" charset="0"/>
                 <a:ea typeface="Arial" pitchFamily="34" charset="-122"/>
@@ -14815,7 +14815,7 @@
             <a:r>
               <a:rPr lang="en-US" sz="1150" dirty="0">
                 <a:solidFill>
-                  <a:srgbClr val="4A453E"/>
+                  <a:srgbClr val="47444D"/>
                 </a:solidFill>
                 <a:latin typeface="Calibri" pitchFamily="34" charset="0"/>
                 <a:ea typeface="Calibri" pitchFamily="34" charset="-122"/>
@@ -14838,7 +14838,7 @@
             <a:r>
               <a:rPr lang="en-US" sz="1150" dirty="0">
                 <a:solidFill>
-                  <a:srgbClr val="4A453E"/>
+                  <a:srgbClr val="47444D"/>
                 </a:solidFill>
                 <a:latin typeface="Calibri" pitchFamily="34" charset="0"/>
                 <a:ea typeface="Calibri" pitchFamily="34" charset="-122"/>
@@ -14861,7 +14861,7 @@
             <a:r>
               <a:rPr lang="en-US" sz="1150" dirty="0">
                 <a:solidFill>
-                  <a:srgbClr val="4A453E"/>
+                  <a:srgbClr val="47444D"/>
                 </a:solidFill>
                 <a:latin typeface="Calibri" pitchFamily="34" charset="0"/>
                 <a:ea typeface="Calibri" pitchFamily="34" charset="-122"/>
@@ -14927,7 +14927,7 @@
                     </a:lnT>
                     <a:lnB w="12700" cap="flat" cmpd="sng" algn="ctr">
                       <a:solidFill>
-                        <a:srgbClr val="0F1318"/>
+                        <a:srgbClr val="2A0F57"/>
                       </a:solidFill>
                       <a:prstDash val="solid"/>
                       <a:round/>
@@ -14947,7 +14947,7 @@
                       <a:r>
                         <a:rPr lang="en-US" sz="750" b="1" spc="100" kern="0" dirty="0">
                           <a:solidFill>
-                            <a:srgbClr val="7C766B"/>
+                            <a:srgbClr val="6C6873"/>
                           </a:solidFill>
                           <a:latin typeface="Arial" pitchFamily="34" charset="0"/>
                           <a:ea typeface="Arial" pitchFamily="34" charset="-122"/>
@@ -14974,7 +14974,7 @@
                     </a:lnT>
                     <a:lnB w="12700" cap="flat" cmpd="sng" algn="ctr">
                       <a:solidFill>
-                        <a:srgbClr val="0F1318"/>
+                        <a:srgbClr val="2A0F57"/>
                       </a:solidFill>
                       <a:prstDash val="solid"/>
                       <a:round/>
@@ -14996,7 +14996,7 @@
                       <a:r>
                         <a:rPr lang="en-US" sz="900" b="1" dirty="0">
                           <a:solidFill>
-                            <a:srgbClr val="0F1318"/>
+                            <a:srgbClr val="2A0F57"/>
                           </a:solidFill>
                           <a:latin typeface="Calibri" pitchFamily="34" charset="0"/>
                           <a:ea typeface="Calibri" pitchFamily="34" charset="-122"/>
@@ -15023,7 +15023,7 @@
                     </a:lnT>
                     <a:lnB w="7620" cap="flat" cmpd="sng" algn="ctr">
                       <a:solidFill>
-                        <a:srgbClr val="DCD3C3"/>
+                        <a:srgbClr val="DDD9E5"/>
                       </a:solidFill>
                       <a:prstDash val="solid"/>
                       <a:round/>
@@ -15043,7 +15043,7 @@
                       <a:r>
                         <a:rPr lang="en-US" sz="900" dirty="0">
                           <a:solidFill>
-                            <a:srgbClr val="4A453E"/>
+                            <a:srgbClr val="47444D"/>
                           </a:solidFill>
                           <a:latin typeface="Calibri" pitchFamily="34" charset="0"/>
                           <a:ea typeface="Calibri" pitchFamily="34" charset="-122"/>
@@ -15070,7 +15070,7 @@
                     </a:lnT>
                     <a:lnB w="7620" cap="flat" cmpd="sng" algn="ctr">
                       <a:solidFill>
-                        <a:srgbClr val="DCD3C3"/>
+                        <a:srgbClr val="DDD9E5"/>
                       </a:solidFill>
                       <a:prstDash val="solid"/>
                       <a:round/>
@@ -15092,7 +15092,7 @@
                       <a:r>
                         <a:rPr lang="en-US" sz="900" b="1" dirty="0">
                           <a:solidFill>
-                            <a:srgbClr val="0F1318"/>
+                            <a:srgbClr val="2A0F57"/>
                           </a:solidFill>
                           <a:latin typeface="Calibri" pitchFamily="34" charset="0"/>
                           <a:ea typeface="Calibri" pitchFamily="34" charset="-122"/>
@@ -15119,7 +15119,7 @@
                     </a:lnT>
                     <a:lnB w="7620" cap="flat" cmpd="sng" algn="ctr">
                       <a:solidFill>
-                        <a:srgbClr val="DCD3C3"/>
+                        <a:srgbClr val="DDD9E5"/>
                       </a:solidFill>
                       <a:prstDash val="solid"/>
                       <a:round/>
@@ -15139,7 +15139,7 @@
                       <a:r>
                         <a:rPr lang="en-US" sz="900" dirty="0">
                           <a:solidFill>
-                            <a:srgbClr val="4A453E"/>
+                            <a:srgbClr val="47444D"/>
                           </a:solidFill>
                           <a:latin typeface="Calibri" pitchFamily="34" charset="0"/>
                           <a:ea typeface="Calibri" pitchFamily="34" charset="-122"/>
@@ -15166,7 +15166,7 @@
                     </a:lnT>
                     <a:lnB w="7620" cap="flat" cmpd="sng" algn="ctr">
                       <a:solidFill>
-                        <a:srgbClr val="DCD3C3"/>
+                        <a:srgbClr val="DDD9E5"/>
                       </a:solidFill>
                       <a:prstDash val="solid"/>
                       <a:round/>
@@ -15188,7 +15188,7 @@
                       <a:r>
                         <a:rPr lang="en-US" sz="900" b="1" dirty="0">
                           <a:solidFill>
-                            <a:srgbClr val="0F1318"/>
+                            <a:srgbClr val="2A0F57"/>
                           </a:solidFill>
                           <a:latin typeface="Calibri" pitchFamily="34" charset="0"/>
                           <a:ea typeface="Calibri" pitchFamily="34" charset="-122"/>
@@ -15215,7 +15215,7 @@
                     </a:lnT>
                     <a:lnB w="7620" cap="flat" cmpd="sng" algn="ctr">
                       <a:solidFill>
-                        <a:srgbClr val="DCD3C3"/>
+                        <a:srgbClr val="DDD9E5"/>
                       </a:solidFill>
                       <a:prstDash val="solid"/>
                       <a:round/>
@@ -15235,7 +15235,7 @@
                       <a:r>
                         <a:rPr lang="en-US" sz="900" dirty="0">
                           <a:solidFill>
-                            <a:srgbClr val="4A453E"/>
+                            <a:srgbClr val="47444D"/>
                           </a:solidFill>
                           <a:latin typeface="Calibri" pitchFamily="34" charset="0"/>
                           <a:ea typeface="Calibri" pitchFamily="34" charset="-122"/>
@@ -15262,7 +15262,7 @@
                     </a:lnT>
                     <a:lnB w="7620" cap="flat" cmpd="sng" algn="ctr">
                       <a:solidFill>
-                        <a:srgbClr val="DCD3C3"/>
+                        <a:srgbClr val="DDD9E5"/>
                       </a:solidFill>
                       <a:prstDash val="solid"/>
                       <a:round/>
@@ -15284,7 +15284,7 @@
                       <a:r>
                         <a:rPr lang="en-US" sz="900" b="1" dirty="0">
                           <a:solidFill>
-                            <a:srgbClr val="0F1318"/>
+                            <a:srgbClr val="2A0F57"/>
                           </a:solidFill>
                           <a:latin typeface="Calibri" pitchFamily="34" charset="0"/>
                           <a:ea typeface="Calibri" pitchFamily="34" charset="-122"/>
@@ -15311,7 +15311,7 @@
                     </a:lnT>
                     <a:lnB w="7620" cap="flat" cmpd="sng" algn="ctr">
                       <a:solidFill>
-                        <a:srgbClr val="DCD3C3"/>
+                        <a:srgbClr val="DDD9E5"/>
                       </a:solidFill>
                       <a:prstDash val="solid"/>
                       <a:round/>
@@ -15331,7 +15331,7 @@
                       <a:r>
                         <a:rPr lang="en-US" sz="900" dirty="0">
                           <a:solidFill>
-                            <a:srgbClr val="4A453E"/>
+                            <a:srgbClr val="47444D"/>
                           </a:solidFill>
                           <a:latin typeface="Calibri" pitchFamily="34" charset="0"/>
                           <a:ea typeface="Calibri" pitchFamily="34" charset="-122"/>
@@ -15358,7 +15358,7 @@
                     </a:lnT>
                     <a:lnB w="7620" cap="flat" cmpd="sng" algn="ctr">
                       <a:solidFill>
-                        <a:srgbClr val="DCD3C3"/>
+                        <a:srgbClr val="DDD9E5"/>
                       </a:solidFill>
                       <a:prstDash val="solid"/>
                       <a:round/>
@@ -15380,7 +15380,7 @@
                       <a:r>
                         <a:rPr lang="en-US" sz="900" b="1" dirty="0">
                           <a:solidFill>
-                            <a:srgbClr val="0F1318"/>
+                            <a:srgbClr val="2A0F57"/>
                           </a:solidFill>
                           <a:latin typeface="Calibri" pitchFamily="34" charset="0"/>
                           <a:ea typeface="Calibri" pitchFamily="34" charset="-122"/>
@@ -15407,7 +15407,7 @@
                     </a:lnT>
                     <a:lnB w="7620" cap="flat" cmpd="sng" algn="ctr">
                       <a:solidFill>
-                        <a:srgbClr val="DCD3C3"/>
+                        <a:srgbClr val="DDD9E5"/>
                       </a:solidFill>
                       <a:prstDash val="solid"/>
                       <a:round/>
@@ -15427,7 +15427,7 @@
                       <a:r>
                         <a:rPr lang="en-US" sz="900" dirty="0">
                           <a:solidFill>
-                            <a:srgbClr val="4A453E"/>
+                            <a:srgbClr val="47444D"/>
                           </a:solidFill>
                           <a:latin typeface="Calibri" pitchFamily="34" charset="0"/>
                           <a:ea typeface="Calibri" pitchFamily="34" charset="-122"/>
@@ -15454,7 +15454,7 @@
                     </a:lnT>
                     <a:lnB w="7620" cap="flat" cmpd="sng" algn="ctr">
                       <a:solidFill>
-                        <a:srgbClr val="DCD3C3"/>
+                        <a:srgbClr val="DDD9E5"/>
                       </a:solidFill>
                       <a:prstDash val="solid"/>
                       <a:round/>
@@ -15476,7 +15476,7 @@
                       <a:r>
                         <a:rPr lang="en-US" sz="900" b="1" dirty="0">
                           <a:solidFill>
-                            <a:srgbClr val="0F1318"/>
+                            <a:srgbClr val="2A0F57"/>
                           </a:solidFill>
                           <a:latin typeface="Calibri" pitchFamily="34" charset="0"/>
                           <a:ea typeface="Calibri" pitchFamily="34" charset="-122"/>
@@ -15503,7 +15503,7 @@
                     </a:lnT>
                     <a:lnB w="7620" cap="flat" cmpd="sng" algn="ctr">
                       <a:solidFill>
-                        <a:srgbClr val="DCD3C3"/>
+                        <a:srgbClr val="DDD9E5"/>
                       </a:solidFill>
                       <a:prstDash val="solid"/>
                       <a:round/>
@@ -15523,7 +15523,7 @@
                       <a:r>
                         <a:rPr lang="en-US" sz="900" dirty="0">
                           <a:solidFill>
-                            <a:srgbClr val="4A453E"/>
+                            <a:srgbClr val="47444D"/>
                           </a:solidFill>
                           <a:latin typeface="Calibri" pitchFamily="34" charset="0"/>
                           <a:ea typeface="Calibri" pitchFamily="34" charset="-122"/>
@@ -15550,7 +15550,7 @@
                     </a:lnT>
                     <a:lnB w="7620" cap="flat" cmpd="sng" algn="ctr">
                       <a:solidFill>
-                        <a:srgbClr val="DCD3C3"/>
+                        <a:srgbClr val="DDD9E5"/>
                       </a:solidFill>
                       <a:prstDash val="solid"/>
                       <a:round/>
@@ -15572,7 +15572,7 @@
                       <a:r>
                         <a:rPr lang="en-US" sz="900" b="1" dirty="0">
                           <a:solidFill>
-                            <a:srgbClr val="0F1318"/>
+                            <a:srgbClr val="2A0F57"/>
                           </a:solidFill>
                           <a:latin typeface="Calibri" pitchFamily="34" charset="0"/>
                           <a:ea typeface="Calibri" pitchFamily="34" charset="-122"/>
@@ -15599,7 +15599,7 @@
                     </a:lnT>
                     <a:lnB w="7620" cap="flat" cmpd="sng" algn="ctr">
                       <a:solidFill>
-                        <a:srgbClr val="DCD3C3"/>
+                        <a:srgbClr val="DDD9E5"/>
                       </a:solidFill>
                       <a:prstDash val="solid"/>
                       <a:round/>
@@ -15619,7 +15619,7 @@
                       <a:r>
                         <a:rPr lang="en-US" sz="900" dirty="0">
                           <a:solidFill>
-                            <a:srgbClr val="4A453E"/>
+                            <a:srgbClr val="47444D"/>
                           </a:solidFill>
                           <a:latin typeface="Calibri" pitchFamily="34" charset="0"/>
                           <a:ea typeface="Calibri" pitchFamily="34" charset="-122"/>
@@ -15646,7 +15646,7 @@
                     </a:lnT>
                     <a:lnB w="7620" cap="flat" cmpd="sng" algn="ctr">
                       <a:solidFill>
-                        <a:srgbClr val="DCD3C3"/>
+                        <a:srgbClr val="DDD9E5"/>
                       </a:solidFill>
                       <a:prstDash val="solid"/>
                       <a:round/>
@@ -15668,7 +15668,7 @@
                       <a:r>
                         <a:rPr lang="en-US" sz="900" b="1" dirty="0">
                           <a:solidFill>
-                            <a:srgbClr val="0F1318"/>
+                            <a:srgbClr val="2A0F57"/>
                           </a:solidFill>
                           <a:latin typeface="Calibri" pitchFamily="34" charset="0"/>
                           <a:ea typeface="Calibri" pitchFamily="34" charset="-122"/>
@@ -15695,7 +15695,7 @@
                     </a:lnT>
                     <a:lnB w="7620" cap="flat" cmpd="sng" algn="ctr">
                       <a:solidFill>
-                        <a:srgbClr val="DCD3C3"/>
+                        <a:srgbClr val="DDD9E5"/>
                       </a:solidFill>
                       <a:prstDash val="solid"/>
                       <a:round/>
@@ -15715,7 +15715,7 @@
                       <a:r>
                         <a:rPr lang="en-US" sz="900" dirty="0">
                           <a:solidFill>
-                            <a:srgbClr val="4A453E"/>
+                            <a:srgbClr val="47444D"/>
                           </a:solidFill>
                           <a:latin typeface="Calibri" pitchFamily="34" charset="0"/>
                           <a:ea typeface="Calibri" pitchFamily="34" charset="-122"/>
@@ -15742,7 +15742,7 @@
                     </a:lnT>
                     <a:lnB w="7620" cap="flat" cmpd="sng" algn="ctr">
                       <a:solidFill>
-                        <a:srgbClr val="DCD3C3"/>
+                        <a:srgbClr val="DDD9E5"/>
                       </a:solidFill>
                       <a:prstDash val="solid"/>
                       <a:round/>
@@ -15786,7 +15786,7 @@
             <a:r>
               <a:rPr lang="en-US" sz="750" dirty="0">
                 <a:solidFill>
-                  <a:srgbClr val="7C766B"/>
+                  <a:srgbClr val="6C6873"/>
                 </a:solidFill>
                 <a:latin typeface="Calibri" pitchFamily="34" charset="0"/>
                 <a:ea typeface="Calibri" pitchFamily="34" charset="-122"/>
@@ -15828,7 +15828,7 @@
             <a:r>
               <a:rPr lang="en-US" sz="800" dirty="0">
                 <a:solidFill>
-                  <a:srgbClr val="7C766B"/>
+                  <a:srgbClr val="6C6873"/>
                 </a:solidFill>
                 <a:latin typeface="Calibri" pitchFamily="34" charset="0"/>
                 <a:ea typeface="Calibri" pitchFamily="34" charset="-122"/>
@@ -15854,7 +15854,7 @@
     <p:bg>
       <p:bgPr>
         <a:solidFill>
-          <a:srgbClr val="F1ECE3"/>
+          <a:srgbClr val="F6F4F9"/>
         </a:solidFill>
       </p:bgPr>
     </p:bg>
@@ -15887,7 +15887,7 @@
             <a:avLst/>
           </a:prstGeom>
           <a:solidFill>
-            <a:srgbClr val="D98324"/>
+            <a:srgbClr val="6D3FD1"/>
           </a:solidFill>
           <a:ln/>
         </p:spPr>
@@ -15922,7 +15922,7 @@
             <a:r>
               <a:rPr lang="en-US" sz="800" b="1" spc="130" kern="0" dirty="0">
                 <a:solidFill>
-                  <a:srgbClr val="7C766B"/>
+                  <a:srgbClr val="6C6873"/>
                 </a:solidFill>
                 <a:latin typeface="Arial" pitchFamily="34" charset="0"/>
                 <a:ea typeface="Arial" pitchFamily="34" charset="-122"/>
@@ -15964,7 +15964,7 @@
             <a:r>
               <a:rPr lang="en-US" sz="2200" b="1" spc="-30" kern="0" dirty="0">
                 <a:solidFill>
-                  <a:srgbClr val="0F1318"/>
+                  <a:srgbClr val="2A0F57"/>
                 </a:solidFill>
                 <a:latin typeface="Arial" pitchFamily="34" charset="0"/>
                 <a:ea typeface="Arial" pitchFamily="34" charset="-122"/>
@@ -16030,7 +16030,7 @@
                     </a:lnT>
                     <a:lnB w="12700" cap="flat" cmpd="sng" algn="ctr">
                       <a:solidFill>
-                        <a:srgbClr val="0F1318"/>
+                        <a:srgbClr val="2A0F57"/>
                       </a:solidFill>
                       <a:prstDash val="solid"/>
                       <a:round/>
@@ -16050,7 +16050,7 @@
                       <a:r>
                         <a:rPr lang="en-US" sz="750" b="1" spc="100" kern="0" dirty="0">
                           <a:solidFill>
-                            <a:srgbClr val="7C766B"/>
+                            <a:srgbClr val="6C6873"/>
                           </a:solidFill>
                           <a:latin typeface="Arial" pitchFamily="34" charset="0"/>
                           <a:ea typeface="Arial" pitchFamily="34" charset="-122"/>
@@ -16077,7 +16077,7 @@
                     </a:lnT>
                     <a:lnB w="12700" cap="flat" cmpd="sng" algn="ctr">
                       <a:solidFill>
-                        <a:srgbClr val="0F1318"/>
+                        <a:srgbClr val="2A0F57"/>
                       </a:solidFill>
                       <a:prstDash val="solid"/>
                       <a:round/>
@@ -16099,7 +16099,7 @@
                       <a:r>
                         <a:rPr lang="en-US" sz="1100" b="1" dirty="0">
                           <a:solidFill>
-                            <a:srgbClr val="0F1318"/>
+                            <a:srgbClr val="2A0F57"/>
                           </a:solidFill>
                           <a:latin typeface="Calibri" pitchFamily="34" charset="0"/>
                           <a:ea typeface="Calibri" pitchFamily="34" charset="-122"/>
@@ -16126,7 +16126,7 @@
                     </a:lnT>
                     <a:lnB w="7620" cap="flat" cmpd="sng" algn="ctr">
                       <a:solidFill>
-                        <a:srgbClr val="DCD3C3"/>
+                        <a:srgbClr val="DDD9E5"/>
                       </a:solidFill>
                       <a:prstDash val="solid"/>
                       <a:round/>
@@ -16146,7 +16146,7 @@
                       <a:r>
                         <a:rPr lang="en-US" sz="1100" dirty="0">
                           <a:solidFill>
-                            <a:srgbClr val="4A453E"/>
+                            <a:srgbClr val="47444D"/>
                           </a:solidFill>
                           <a:latin typeface="Calibri" pitchFamily="34" charset="0"/>
                           <a:ea typeface="Calibri" pitchFamily="34" charset="-122"/>
@@ -16173,7 +16173,7 @@
                     </a:lnT>
                     <a:lnB w="7620" cap="flat" cmpd="sng" algn="ctr">
                       <a:solidFill>
-                        <a:srgbClr val="DCD3C3"/>
+                        <a:srgbClr val="DDD9E5"/>
                       </a:solidFill>
                       <a:prstDash val="solid"/>
                       <a:round/>
@@ -16195,7 +16195,7 @@
                       <a:r>
                         <a:rPr lang="en-US" sz="1100" b="1" dirty="0">
                           <a:solidFill>
-                            <a:srgbClr val="0F1318"/>
+                            <a:srgbClr val="2A0F57"/>
                           </a:solidFill>
                           <a:latin typeface="Calibri" pitchFamily="34" charset="0"/>
                           <a:ea typeface="Calibri" pitchFamily="34" charset="-122"/>
@@ -16222,7 +16222,7 @@
                     </a:lnT>
                     <a:lnB w="7620" cap="flat" cmpd="sng" algn="ctr">
                       <a:solidFill>
-                        <a:srgbClr val="DCD3C3"/>
+                        <a:srgbClr val="DDD9E5"/>
                       </a:solidFill>
                       <a:prstDash val="solid"/>
                       <a:round/>
@@ -16242,7 +16242,7 @@
                       <a:r>
                         <a:rPr lang="en-US" sz="1100" dirty="0">
                           <a:solidFill>
-                            <a:srgbClr val="4A453E"/>
+                            <a:srgbClr val="47444D"/>
                           </a:solidFill>
                           <a:latin typeface="Calibri" pitchFamily="34" charset="0"/>
                           <a:ea typeface="Calibri" pitchFamily="34" charset="-122"/>
@@ -16269,7 +16269,7 @@
                     </a:lnT>
                     <a:lnB w="7620" cap="flat" cmpd="sng" algn="ctr">
                       <a:solidFill>
-                        <a:srgbClr val="DCD3C3"/>
+                        <a:srgbClr val="DDD9E5"/>
                       </a:solidFill>
                       <a:prstDash val="solid"/>
                       <a:round/>
@@ -16313,7 +16313,7 @@
             <a:r>
               <a:rPr lang="en-US" sz="750" dirty="0">
                 <a:solidFill>
-                  <a:srgbClr val="7C766B"/>
+                  <a:srgbClr val="6C6873"/>
                 </a:solidFill>
                 <a:latin typeface="Calibri" pitchFamily="34" charset="0"/>
                 <a:ea typeface="Calibri" pitchFamily="34" charset="-122"/>
@@ -16355,7 +16355,7 @@
             <a:r>
               <a:rPr lang="en-US" sz="800" dirty="0">
                 <a:solidFill>
-                  <a:srgbClr val="7C766B"/>
+                  <a:srgbClr val="6C6873"/>
                 </a:solidFill>
                 <a:latin typeface="Calibri" pitchFamily="34" charset="0"/>
                 <a:ea typeface="Calibri" pitchFamily="34" charset="-122"/>
@@ -16381,7 +16381,7 @@
     <p:bg>
       <p:bgPr>
         <a:solidFill>
-          <a:srgbClr val="F1ECE3"/>
+          <a:srgbClr val="F6F4F9"/>
         </a:solidFill>
       </p:bgPr>
     </p:bg>
@@ -16414,7 +16414,7 @@
             <a:avLst/>
           </a:prstGeom>
           <a:solidFill>
-            <a:srgbClr val="D98324"/>
+            <a:srgbClr val="6D3FD1"/>
           </a:solidFill>
           <a:ln/>
         </p:spPr>
@@ -16449,7 +16449,7 @@
             <a:r>
               <a:rPr lang="en-US" sz="800" b="1" spc="130" kern="0" dirty="0">
                 <a:solidFill>
-                  <a:srgbClr val="7C766B"/>
+                  <a:srgbClr val="6C6873"/>
                 </a:solidFill>
                 <a:latin typeface="Arial" pitchFamily="34" charset="0"/>
                 <a:ea typeface="Arial" pitchFamily="34" charset="-122"/>
@@ -16491,7 +16491,7 @@
             <a:r>
               <a:rPr lang="en-US" sz="2200" b="1" spc="-30" kern="0" dirty="0">
                 <a:solidFill>
-                  <a:srgbClr val="0F1318"/>
+                  <a:srgbClr val="2A0F57"/>
                 </a:solidFill>
                 <a:latin typeface="Arial" pitchFamily="34" charset="0"/>
                 <a:ea typeface="Arial" pitchFamily="34" charset="-122"/>
@@ -16538,7 +16538,7 @@
             <a:r>
               <a:rPr lang="en-US" sz="1350" dirty="0">
                 <a:solidFill>
-                  <a:srgbClr val="4A453E"/>
+                  <a:srgbClr val="47444D"/>
                 </a:solidFill>
                 <a:latin typeface="Calibri" pitchFamily="34" charset="0"/>
                 <a:ea typeface="Calibri" pitchFamily="34" charset="-122"/>
@@ -16561,7 +16561,7 @@
             <a:r>
               <a:rPr lang="en-US" sz="1350" dirty="0">
                 <a:solidFill>
-                  <a:srgbClr val="4A453E"/>
+                  <a:srgbClr val="47444D"/>
                 </a:solidFill>
                 <a:latin typeface="Calibri" pitchFamily="34" charset="0"/>
                 <a:ea typeface="Calibri" pitchFamily="34" charset="-122"/>
@@ -16584,7 +16584,7 @@
             <a:r>
               <a:rPr lang="en-US" sz="1350" dirty="0">
                 <a:solidFill>
-                  <a:srgbClr val="4A453E"/>
+                  <a:srgbClr val="47444D"/>
                 </a:solidFill>
                 <a:latin typeface="Calibri" pitchFamily="34" charset="0"/>
                 <a:ea typeface="Calibri" pitchFamily="34" charset="-122"/>
@@ -16607,7 +16607,7 @@
             <a:r>
               <a:rPr lang="en-US" sz="1350" dirty="0">
                 <a:solidFill>
-                  <a:srgbClr val="4A453E"/>
+                  <a:srgbClr val="47444D"/>
                 </a:solidFill>
                 <a:latin typeface="Calibri" pitchFamily="34" charset="0"/>
                 <a:ea typeface="Calibri" pitchFamily="34" charset="-122"/>
@@ -16649,7 +16649,7 @@
             <a:r>
               <a:rPr lang="en-US" sz="750" dirty="0">
                 <a:solidFill>
-                  <a:srgbClr val="7C766B"/>
+                  <a:srgbClr val="6C6873"/>
                 </a:solidFill>
                 <a:latin typeface="Calibri" pitchFamily="34" charset="0"/>
                 <a:ea typeface="Calibri" pitchFamily="34" charset="-122"/>
@@ -16691,7 +16691,7 @@
             <a:r>
               <a:rPr lang="en-US" sz="800" dirty="0">
                 <a:solidFill>
-                  <a:srgbClr val="7C766B"/>
+                  <a:srgbClr val="6C6873"/>
                 </a:solidFill>
                 <a:latin typeface="Calibri" pitchFamily="34" charset="0"/>
                 <a:ea typeface="Calibri" pitchFamily="34" charset="-122"/>
@@ -16717,7 +16717,7 @@
     <p:bg>
       <p:bgPr>
         <a:solidFill>
-          <a:srgbClr val="F1ECE3"/>
+          <a:srgbClr val="F6F4F9"/>
         </a:solidFill>
       </p:bgPr>
     </p:bg>
@@ -16750,7 +16750,7 @@
             <a:avLst/>
           </a:prstGeom>
           <a:solidFill>
-            <a:srgbClr val="D98324"/>
+            <a:srgbClr val="6D3FD1"/>
           </a:solidFill>
           <a:ln/>
         </p:spPr>
@@ -16785,7 +16785,7 @@
             <a:r>
               <a:rPr lang="en-US" sz="800" b="1" spc="130" kern="0" dirty="0">
                 <a:solidFill>
-                  <a:srgbClr val="7C766B"/>
+                  <a:srgbClr val="6C6873"/>
                 </a:solidFill>
                 <a:latin typeface="Arial" pitchFamily="34" charset="0"/>
                 <a:ea typeface="Arial" pitchFamily="34" charset="-122"/>
@@ -16827,7 +16827,7 @@
             <a:r>
               <a:rPr lang="en-US" sz="2200" b="1" spc="-30" kern="0" dirty="0">
                 <a:solidFill>
-                  <a:srgbClr val="0F1318"/>
+                  <a:srgbClr val="2A0F57"/>
                 </a:solidFill>
                 <a:latin typeface="Arial" pitchFamily="34" charset="0"/>
                 <a:ea typeface="Arial" pitchFamily="34" charset="-122"/>
@@ -16874,7 +16874,7 @@
             <a:r>
               <a:rPr lang="en-US" sz="1150" dirty="0">
                 <a:solidFill>
-                  <a:srgbClr val="4A453E"/>
+                  <a:srgbClr val="47444D"/>
                 </a:solidFill>
                 <a:latin typeface="Calibri" pitchFamily="34" charset="0"/>
                 <a:ea typeface="Calibri" pitchFamily="34" charset="-122"/>
@@ -16897,7 +16897,7 @@
             <a:r>
               <a:rPr lang="en-US" sz="1150" b="1" dirty="0">
                 <a:solidFill>
-                  <a:srgbClr val="4A453E"/>
+                  <a:srgbClr val="47444D"/>
                 </a:solidFill>
                 <a:latin typeface="Calibri" pitchFamily="34" charset="0"/>
                 <a:ea typeface="Calibri" pitchFamily="34" charset="-122"/>
@@ -16920,7 +16920,7 @@
             <a:r>
               <a:rPr lang="en-US" sz="1150" dirty="0">
                 <a:solidFill>
-                  <a:srgbClr val="4A453E"/>
+                  <a:srgbClr val="47444D"/>
                 </a:solidFill>
                 <a:latin typeface="Calibri" pitchFamily="34" charset="0"/>
                 <a:ea typeface="Calibri" pitchFamily="34" charset="-122"/>
@@ -16988,7 +16988,7 @@
                     </a:lnT>
                     <a:lnB w="12700" cap="flat" cmpd="sng" algn="ctr">
                       <a:solidFill>
-                        <a:srgbClr val="0F1318"/>
+                        <a:srgbClr val="2A0F57"/>
                       </a:solidFill>
                       <a:prstDash val="solid"/>
                       <a:round/>
@@ -17008,7 +17008,7 @@
                       <a:r>
                         <a:rPr lang="en-US" sz="750" b="1" spc="100" kern="0" dirty="0">
                           <a:solidFill>
-                            <a:srgbClr val="7C766B"/>
+                            <a:srgbClr val="6C6873"/>
                           </a:solidFill>
                           <a:latin typeface="Arial" pitchFamily="34" charset="0"/>
                           <a:ea typeface="Arial" pitchFamily="34" charset="-122"/>
@@ -17035,7 +17035,7 @@
                     </a:lnT>
                     <a:lnB w="12700" cap="flat" cmpd="sng" algn="ctr">
                       <a:solidFill>
-                        <a:srgbClr val="0F1318"/>
+                        <a:srgbClr val="2A0F57"/>
                       </a:solidFill>
                       <a:prstDash val="solid"/>
                       <a:round/>
@@ -17055,7 +17055,7 @@
                       <a:r>
                         <a:rPr lang="en-US" sz="750" b="1" spc="100" kern="0" dirty="0">
                           <a:solidFill>
-                            <a:srgbClr val="7C766B"/>
+                            <a:srgbClr val="6C6873"/>
                           </a:solidFill>
                           <a:latin typeface="Arial" pitchFamily="34" charset="0"/>
                           <a:ea typeface="Arial" pitchFamily="34" charset="-122"/>
@@ -17082,7 +17082,7 @@
                     </a:lnT>
                     <a:lnB w="12700" cap="flat" cmpd="sng" algn="ctr">
                       <a:solidFill>
-                        <a:srgbClr val="0F1318"/>
+                        <a:srgbClr val="2A0F57"/>
                       </a:solidFill>
                       <a:prstDash val="solid"/>
                       <a:round/>
@@ -17102,7 +17102,7 @@
                       <a:r>
                         <a:rPr lang="en-US" sz="750" b="1" spc="100" kern="0" dirty="0">
                           <a:solidFill>
-                            <a:srgbClr val="7C766B"/>
+                            <a:srgbClr val="6C6873"/>
                           </a:solidFill>
                           <a:latin typeface="Arial" pitchFamily="34" charset="0"/>
                           <a:ea typeface="Arial" pitchFamily="34" charset="-122"/>
@@ -17129,7 +17129,7 @@
                     </a:lnT>
                     <a:lnB w="12700" cap="flat" cmpd="sng" algn="ctr">
                       <a:solidFill>
-                        <a:srgbClr val="0F1318"/>
+                        <a:srgbClr val="2A0F57"/>
                       </a:solidFill>
                       <a:prstDash val="solid"/>
                       <a:round/>
@@ -17151,7 +17151,7 @@
                       <a:r>
                         <a:rPr lang="en-US" sz="900" b="1" dirty="0">
                           <a:solidFill>
-                            <a:srgbClr val="0F1318"/>
+                            <a:srgbClr val="2A0F57"/>
                           </a:solidFill>
                           <a:latin typeface="Calibri" pitchFamily="34" charset="0"/>
                           <a:ea typeface="Calibri" pitchFamily="34" charset="-122"/>
@@ -17178,7 +17178,7 @@
                     </a:lnT>
                     <a:lnB w="7620" cap="flat" cmpd="sng" algn="ctr">
                       <a:solidFill>
-                        <a:srgbClr val="DCD3C3"/>
+                        <a:srgbClr val="DDD9E5"/>
                       </a:solidFill>
                       <a:prstDash val="solid"/>
                       <a:round/>
@@ -17198,7 +17198,7 @@
                       <a:r>
                         <a:rPr lang="en-US" sz="900" dirty="0">
                           <a:solidFill>
-                            <a:srgbClr val="4A453E"/>
+                            <a:srgbClr val="47444D"/>
                           </a:solidFill>
                           <a:latin typeface="Calibri" pitchFamily="34" charset="0"/>
                           <a:ea typeface="Calibri" pitchFamily="34" charset="-122"/>
@@ -17225,7 +17225,7 @@
                     </a:lnT>
                     <a:lnB w="7620" cap="flat" cmpd="sng" algn="ctr">
                       <a:solidFill>
-                        <a:srgbClr val="DCD3C3"/>
+                        <a:srgbClr val="DDD9E5"/>
                       </a:solidFill>
                       <a:prstDash val="solid"/>
                       <a:round/>
@@ -17245,7 +17245,7 @@
                       <a:r>
                         <a:rPr lang="en-US" sz="900" dirty="0">
                           <a:solidFill>
-                            <a:srgbClr val="4A453E"/>
+                            <a:srgbClr val="47444D"/>
                           </a:solidFill>
                           <a:latin typeface="Calibri" pitchFamily="34" charset="0"/>
                           <a:ea typeface="Calibri" pitchFamily="34" charset="-122"/>
@@ -17272,7 +17272,7 @@
                     </a:lnT>
                     <a:lnB w="7620" cap="flat" cmpd="sng" algn="ctr">
                       <a:solidFill>
-                        <a:srgbClr val="DCD3C3"/>
+                        <a:srgbClr val="DDD9E5"/>
                       </a:solidFill>
                       <a:prstDash val="solid"/>
                       <a:round/>
@@ -17292,7 +17292,7 @@
                       <a:r>
                         <a:rPr lang="en-US" sz="900" dirty="0">
                           <a:solidFill>
-                            <a:srgbClr val="4A453E"/>
+                            <a:srgbClr val="47444D"/>
                           </a:solidFill>
                           <a:latin typeface="Calibri" pitchFamily="34" charset="0"/>
                           <a:ea typeface="Calibri" pitchFamily="34" charset="-122"/>
@@ -17319,7 +17319,7 @@
                     </a:lnT>
                     <a:lnB w="7620" cap="flat" cmpd="sng" algn="ctr">
                       <a:solidFill>
-                        <a:srgbClr val="DCD3C3"/>
+                        <a:srgbClr val="DDD9E5"/>
                       </a:solidFill>
                       <a:prstDash val="solid"/>
                       <a:round/>
@@ -17341,7 +17341,7 @@
                       <a:r>
                         <a:rPr lang="en-US" sz="900" b="1" dirty="0">
                           <a:solidFill>
-                            <a:srgbClr val="0F1318"/>
+                            <a:srgbClr val="2A0F57"/>
                           </a:solidFill>
                           <a:latin typeface="Calibri" pitchFamily="34" charset="0"/>
                           <a:ea typeface="Calibri" pitchFamily="34" charset="-122"/>
@@ -17368,7 +17368,7 @@
                     </a:lnT>
                     <a:lnB w="7620" cap="flat" cmpd="sng" algn="ctr">
                       <a:solidFill>
-                        <a:srgbClr val="DCD3C3"/>
+                        <a:srgbClr val="DDD9E5"/>
                       </a:solidFill>
                       <a:prstDash val="solid"/>
                       <a:round/>
@@ -17388,7 +17388,7 @@
                       <a:r>
                         <a:rPr lang="en-US" sz="900" dirty="0">
                           <a:solidFill>
-                            <a:srgbClr val="4A453E"/>
+                            <a:srgbClr val="47444D"/>
                           </a:solidFill>
                           <a:latin typeface="Calibri" pitchFamily="34" charset="0"/>
                           <a:ea typeface="Calibri" pitchFamily="34" charset="-122"/>
@@ -17415,7 +17415,7 @@
                     </a:lnT>
                     <a:lnB w="7620" cap="flat" cmpd="sng" algn="ctr">
                       <a:solidFill>
-                        <a:srgbClr val="DCD3C3"/>
+                        <a:srgbClr val="DDD9E5"/>
                       </a:solidFill>
                       <a:prstDash val="solid"/>
                       <a:round/>
@@ -17435,7 +17435,7 @@
                       <a:r>
                         <a:rPr lang="en-US" sz="900" dirty="0">
                           <a:solidFill>
-                            <a:srgbClr val="4A453E"/>
+                            <a:srgbClr val="47444D"/>
                           </a:solidFill>
                           <a:latin typeface="Calibri" pitchFamily="34" charset="0"/>
                           <a:ea typeface="Calibri" pitchFamily="34" charset="-122"/>
@@ -17462,7 +17462,7 @@
                     </a:lnT>
                     <a:lnB w="7620" cap="flat" cmpd="sng" algn="ctr">
                       <a:solidFill>
-                        <a:srgbClr val="DCD3C3"/>
+                        <a:srgbClr val="DDD9E5"/>
                       </a:solidFill>
                       <a:prstDash val="solid"/>
                       <a:round/>
@@ -17482,7 +17482,7 @@
                       <a:r>
                         <a:rPr lang="en-US" sz="900" dirty="0">
                           <a:solidFill>
-                            <a:srgbClr val="4A453E"/>
+                            <a:srgbClr val="47444D"/>
                           </a:solidFill>
                           <a:latin typeface="Calibri" pitchFamily="34" charset="0"/>
                           <a:ea typeface="Calibri" pitchFamily="34" charset="-122"/>
@@ -17509,7 +17509,7 @@
                     </a:lnT>
                     <a:lnB w="7620" cap="flat" cmpd="sng" algn="ctr">
                       <a:solidFill>
-                        <a:srgbClr val="DCD3C3"/>
+                        <a:srgbClr val="DDD9E5"/>
                       </a:solidFill>
                       <a:prstDash val="solid"/>
                       <a:round/>
@@ -17531,7 +17531,7 @@
                       <a:r>
                         <a:rPr lang="en-US" sz="900" b="1" dirty="0">
                           <a:solidFill>
-                            <a:srgbClr val="0F1318"/>
+                            <a:srgbClr val="2A0F57"/>
                           </a:solidFill>
                           <a:latin typeface="Calibri" pitchFamily="34" charset="0"/>
                           <a:ea typeface="Calibri" pitchFamily="34" charset="-122"/>
@@ -17558,7 +17558,7 @@
                     </a:lnT>
                     <a:lnB w="7620" cap="flat" cmpd="sng" algn="ctr">
                       <a:solidFill>
-                        <a:srgbClr val="DCD3C3"/>
+                        <a:srgbClr val="DDD9E5"/>
                       </a:solidFill>
                       <a:prstDash val="solid"/>
                       <a:round/>
@@ -17578,7 +17578,7 @@
                       <a:r>
                         <a:rPr lang="en-US" sz="900" dirty="0">
                           <a:solidFill>
-                            <a:srgbClr val="4A453E"/>
+                            <a:srgbClr val="47444D"/>
                           </a:solidFill>
                           <a:latin typeface="Calibri" pitchFamily="34" charset="0"/>
                           <a:ea typeface="Calibri" pitchFamily="34" charset="-122"/>
@@ -17605,7 +17605,7 @@
                     </a:lnT>
                     <a:lnB w="7620" cap="flat" cmpd="sng" algn="ctr">
                       <a:solidFill>
-                        <a:srgbClr val="DCD3C3"/>
+                        <a:srgbClr val="DDD9E5"/>
                       </a:solidFill>
                       <a:prstDash val="solid"/>
                       <a:round/>
@@ -17625,7 +17625,7 @@
                       <a:r>
                         <a:rPr lang="en-US" sz="900" dirty="0">
                           <a:solidFill>
-                            <a:srgbClr val="4A453E"/>
+                            <a:srgbClr val="47444D"/>
                           </a:solidFill>
                           <a:latin typeface="Calibri" pitchFamily="34" charset="0"/>
                           <a:ea typeface="Calibri" pitchFamily="34" charset="-122"/>
@@ -17652,7 +17652,7 @@
                     </a:lnT>
                     <a:lnB w="7620" cap="flat" cmpd="sng" algn="ctr">
                       <a:solidFill>
-                        <a:srgbClr val="DCD3C3"/>
+                        <a:srgbClr val="DDD9E5"/>
                       </a:solidFill>
                       <a:prstDash val="solid"/>
                       <a:round/>
@@ -17672,7 +17672,7 @@
                       <a:r>
                         <a:rPr lang="en-US" sz="900" dirty="0">
                           <a:solidFill>
-                            <a:srgbClr val="4A453E"/>
+                            <a:srgbClr val="47444D"/>
                           </a:solidFill>
                           <a:latin typeface="Calibri" pitchFamily="34" charset="0"/>
                           <a:ea typeface="Calibri" pitchFamily="34" charset="-122"/>
@@ -17699,7 +17699,7 @@
                     </a:lnT>
                     <a:lnB w="7620" cap="flat" cmpd="sng" algn="ctr">
                       <a:solidFill>
-                        <a:srgbClr val="DCD3C3"/>
+                        <a:srgbClr val="DDD9E5"/>
                       </a:solidFill>
                       <a:prstDash val="solid"/>
                       <a:round/>
@@ -17721,7 +17721,7 @@
                       <a:r>
                         <a:rPr lang="en-US" sz="900" b="1" dirty="0">
                           <a:solidFill>
-                            <a:srgbClr val="0F1318"/>
+                            <a:srgbClr val="2A0F57"/>
                           </a:solidFill>
                           <a:latin typeface="Calibri" pitchFamily="34" charset="0"/>
                           <a:ea typeface="Calibri" pitchFamily="34" charset="-122"/>
@@ -17748,7 +17748,7 @@
                     </a:lnT>
                     <a:lnB w="7620" cap="flat" cmpd="sng" algn="ctr">
                       <a:solidFill>
-                        <a:srgbClr val="DCD3C3"/>
+                        <a:srgbClr val="DDD9E5"/>
                       </a:solidFill>
                       <a:prstDash val="solid"/>
                       <a:round/>
@@ -17768,7 +17768,7 @@
                       <a:r>
                         <a:rPr lang="en-US" sz="900" dirty="0">
                           <a:solidFill>
-                            <a:srgbClr val="4A453E"/>
+                            <a:srgbClr val="47444D"/>
                           </a:solidFill>
                           <a:latin typeface="Calibri" pitchFamily="34" charset="0"/>
                           <a:ea typeface="Calibri" pitchFamily="34" charset="-122"/>
@@ -17795,7 +17795,7 @@
                     </a:lnT>
                     <a:lnB w="7620" cap="flat" cmpd="sng" algn="ctr">
                       <a:solidFill>
-                        <a:srgbClr val="DCD3C3"/>
+                        <a:srgbClr val="DDD9E5"/>
                       </a:solidFill>
                       <a:prstDash val="solid"/>
                       <a:round/>
@@ -17815,7 +17815,7 @@
                       <a:r>
                         <a:rPr lang="en-US" sz="900" dirty="0">
                           <a:solidFill>
-                            <a:srgbClr val="4A453E"/>
+                            <a:srgbClr val="47444D"/>
                           </a:solidFill>
                           <a:latin typeface="Calibri" pitchFamily="34" charset="0"/>
                           <a:ea typeface="Calibri" pitchFamily="34" charset="-122"/>
@@ -17842,7 +17842,7 @@
                     </a:lnT>
                     <a:lnB w="7620" cap="flat" cmpd="sng" algn="ctr">
                       <a:solidFill>
-                        <a:srgbClr val="DCD3C3"/>
+                        <a:srgbClr val="DDD9E5"/>
                       </a:solidFill>
                       <a:prstDash val="solid"/>
                       <a:round/>
@@ -17862,7 +17862,7 @@
                       <a:r>
                         <a:rPr lang="en-US" sz="900" dirty="0">
                           <a:solidFill>
-                            <a:srgbClr val="4A453E"/>
+                            <a:srgbClr val="47444D"/>
                           </a:solidFill>
                           <a:latin typeface="Calibri" pitchFamily="34" charset="0"/>
                           <a:ea typeface="Calibri" pitchFamily="34" charset="-122"/>
@@ -17889,7 +17889,7 @@
                     </a:lnT>
                     <a:lnB w="7620" cap="flat" cmpd="sng" algn="ctr">
                       <a:solidFill>
-                        <a:srgbClr val="DCD3C3"/>
+                        <a:srgbClr val="DDD9E5"/>
                       </a:solidFill>
                       <a:prstDash val="solid"/>
                       <a:round/>
@@ -17911,7 +17911,7 @@
                       <a:r>
                         <a:rPr lang="en-US" sz="900" b="1" dirty="0">
                           <a:solidFill>
-                            <a:srgbClr val="0F1318"/>
+                            <a:srgbClr val="2A0F57"/>
                           </a:solidFill>
                           <a:latin typeface="Calibri" pitchFamily="34" charset="0"/>
                           <a:ea typeface="Calibri" pitchFamily="34" charset="-122"/>
@@ -17938,7 +17938,7 @@
                     </a:lnT>
                     <a:lnB w="7620" cap="flat" cmpd="sng" algn="ctr">
                       <a:solidFill>
-                        <a:srgbClr val="DCD3C3"/>
+                        <a:srgbClr val="DDD9E5"/>
                       </a:solidFill>
                       <a:prstDash val="solid"/>
                       <a:round/>
@@ -17958,7 +17958,7 @@
                       <a:r>
                         <a:rPr lang="en-US" sz="900" dirty="0">
                           <a:solidFill>
-                            <a:srgbClr val="4A453E"/>
+                            <a:srgbClr val="47444D"/>
                           </a:solidFill>
                           <a:latin typeface="Calibri" pitchFamily="34" charset="0"/>
                           <a:ea typeface="Calibri" pitchFamily="34" charset="-122"/>
@@ -17985,7 +17985,7 @@
                     </a:lnT>
                     <a:lnB w="7620" cap="flat" cmpd="sng" algn="ctr">
                       <a:solidFill>
-                        <a:srgbClr val="DCD3C3"/>
+                        <a:srgbClr val="DDD9E5"/>
                       </a:solidFill>
                       <a:prstDash val="solid"/>
                       <a:round/>
@@ -18005,7 +18005,7 @@
                       <a:r>
                         <a:rPr lang="en-US" sz="900" dirty="0">
                           <a:solidFill>
-                            <a:srgbClr val="4A453E"/>
+                            <a:srgbClr val="47444D"/>
                           </a:solidFill>
                           <a:latin typeface="Calibri" pitchFamily="34" charset="0"/>
                           <a:ea typeface="Calibri" pitchFamily="34" charset="-122"/>
@@ -18032,7 +18032,7 @@
                     </a:lnT>
                     <a:lnB w="7620" cap="flat" cmpd="sng" algn="ctr">
                       <a:solidFill>
-                        <a:srgbClr val="DCD3C3"/>
+                        <a:srgbClr val="DDD9E5"/>
                       </a:solidFill>
                       <a:prstDash val="solid"/>
                       <a:round/>
@@ -18052,7 +18052,7 @@
                       <a:r>
                         <a:rPr lang="en-US" sz="900" dirty="0">
                           <a:solidFill>
-                            <a:srgbClr val="4A453E"/>
+                            <a:srgbClr val="47444D"/>
                           </a:solidFill>
                           <a:latin typeface="Calibri" pitchFamily="34" charset="0"/>
                           <a:ea typeface="Calibri" pitchFamily="34" charset="-122"/>
@@ -18079,7 +18079,7 @@
                     </a:lnT>
                     <a:lnB w="7620" cap="flat" cmpd="sng" algn="ctr">
                       <a:solidFill>
-                        <a:srgbClr val="DCD3C3"/>
+                        <a:srgbClr val="DDD9E5"/>
                       </a:solidFill>
                       <a:prstDash val="solid"/>
                       <a:round/>
@@ -18101,7 +18101,7 @@
                       <a:r>
                         <a:rPr lang="en-US" sz="900" b="1" dirty="0">
                           <a:solidFill>
-                            <a:srgbClr val="0F1318"/>
+                            <a:srgbClr val="2A0F57"/>
                           </a:solidFill>
                           <a:latin typeface="Calibri" pitchFamily="34" charset="0"/>
                           <a:ea typeface="Calibri" pitchFamily="34" charset="-122"/>
@@ -18128,7 +18128,7 @@
                     </a:lnT>
                     <a:lnB w="7620" cap="flat" cmpd="sng" algn="ctr">
                       <a:solidFill>
-                        <a:srgbClr val="DCD3C3"/>
+                        <a:srgbClr val="DDD9E5"/>
                       </a:solidFill>
                       <a:prstDash val="solid"/>
                       <a:round/>
@@ -18148,7 +18148,7 @@
                       <a:r>
                         <a:rPr lang="en-US" sz="900" dirty="0">
                           <a:solidFill>
-                            <a:srgbClr val="4A453E"/>
+                            <a:srgbClr val="47444D"/>
                           </a:solidFill>
                           <a:latin typeface="Calibri" pitchFamily="34" charset="0"/>
                           <a:ea typeface="Calibri" pitchFamily="34" charset="-122"/>
@@ -18175,7 +18175,7 @@
                     </a:lnT>
                     <a:lnB w="7620" cap="flat" cmpd="sng" algn="ctr">
                       <a:solidFill>
-                        <a:srgbClr val="DCD3C3"/>
+                        <a:srgbClr val="DDD9E5"/>
                       </a:solidFill>
                       <a:prstDash val="solid"/>
                       <a:round/>
@@ -18195,7 +18195,7 @@
                       <a:r>
                         <a:rPr lang="en-US" sz="900" dirty="0">
                           <a:solidFill>
-                            <a:srgbClr val="4A453E"/>
+                            <a:srgbClr val="47444D"/>
                           </a:solidFill>
                           <a:latin typeface="Calibri" pitchFamily="34" charset="0"/>
                           <a:ea typeface="Calibri" pitchFamily="34" charset="-122"/>
@@ -18222,7 +18222,7 @@
                     </a:lnT>
                     <a:lnB w="7620" cap="flat" cmpd="sng" algn="ctr">
                       <a:solidFill>
-                        <a:srgbClr val="DCD3C3"/>
+                        <a:srgbClr val="DDD9E5"/>
                       </a:solidFill>
                       <a:prstDash val="solid"/>
                       <a:round/>
@@ -18242,7 +18242,7 @@
                       <a:r>
                         <a:rPr lang="en-US" sz="900" dirty="0">
                           <a:solidFill>
-                            <a:srgbClr val="4A453E"/>
+                            <a:srgbClr val="47444D"/>
                           </a:solidFill>
                           <a:latin typeface="Calibri" pitchFamily="34" charset="0"/>
                           <a:ea typeface="Calibri" pitchFamily="34" charset="-122"/>
@@ -18269,7 +18269,7 @@
                     </a:lnT>
                     <a:lnB w="7620" cap="flat" cmpd="sng" algn="ctr">
                       <a:solidFill>
-                        <a:srgbClr val="DCD3C3"/>
+                        <a:srgbClr val="DDD9E5"/>
                       </a:solidFill>
                       <a:prstDash val="solid"/>
                       <a:round/>
@@ -18291,7 +18291,7 @@
                       <a:r>
                         <a:rPr lang="en-US" sz="900" b="1" dirty="0">
                           <a:solidFill>
-                            <a:srgbClr val="0F1318"/>
+                            <a:srgbClr val="2A0F57"/>
                           </a:solidFill>
                           <a:latin typeface="Calibri" pitchFamily="34" charset="0"/>
                           <a:ea typeface="Calibri" pitchFamily="34" charset="-122"/>
@@ -18318,7 +18318,7 @@
                     </a:lnT>
                     <a:lnB w="7620" cap="flat" cmpd="sng" algn="ctr">
                       <a:solidFill>
-                        <a:srgbClr val="DCD3C3"/>
+                        <a:srgbClr val="DDD9E5"/>
                       </a:solidFill>
                       <a:prstDash val="solid"/>
                       <a:round/>
@@ -18338,7 +18338,7 @@
                       <a:r>
                         <a:rPr lang="en-US" sz="900" dirty="0">
                           <a:solidFill>
-                            <a:srgbClr val="4A453E"/>
+                            <a:srgbClr val="47444D"/>
                           </a:solidFill>
                           <a:latin typeface="Calibri" pitchFamily="34" charset="0"/>
                           <a:ea typeface="Calibri" pitchFamily="34" charset="-122"/>
@@ -18365,7 +18365,7 @@
                     </a:lnT>
                     <a:lnB w="7620" cap="flat" cmpd="sng" algn="ctr">
                       <a:solidFill>
-                        <a:srgbClr val="DCD3C3"/>
+                        <a:srgbClr val="DDD9E5"/>
                       </a:solidFill>
                       <a:prstDash val="solid"/>
                       <a:round/>
@@ -18385,7 +18385,7 @@
                       <a:r>
                         <a:rPr lang="en-US" sz="900" dirty="0">
                           <a:solidFill>
-                            <a:srgbClr val="4A453E"/>
+                            <a:srgbClr val="47444D"/>
                           </a:solidFill>
                           <a:latin typeface="Calibri" pitchFamily="34" charset="0"/>
                           <a:ea typeface="Calibri" pitchFamily="34" charset="-122"/>
@@ -18412,7 +18412,7 @@
                     </a:lnT>
                     <a:lnB w="7620" cap="flat" cmpd="sng" algn="ctr">
                       <a:solidFill>
-                        <a:srgbClr val="DCD3C3"/>
+                        <a:srgbClr val="DDD9E5"/>
                       </a:solidFill>
                       <a:prstDash val="solid"/>
                       <a:round/>
@@ -18432,7 +18432,7 @@
                       <a:r>
                         <a:rPr lang="en-US" sz="900" dirty="0">
                           <a:solidFill>
-                            <a:srgbClr val="4A453E"/>
+                            <a:srgbClr val="47444D"/>
                           </a:solidFill>
                           <a:latin typeface="Calibri" pitchFamily="34" charset="0"/>
                           <a:ea typeface="Calibri" pitchFamily="34" charset="-122"/>
@@ -18459,7 +18459,7 @@
                     </a:lnT>
                     <a:lnB w="7620" cap="flat" cmpd="sng" algn="ctr">
                       <a:solidFill>
-                        <a:srgbClr val="DCD3C3"/>
+                        <a:srgbClr val="DDD9E5"/>
                       </a:solidFill>
                       <a:prstDash val="solid"/>
                       <a:round/>
@@ -18481,7 +18481,7 @@
                       <a:r>
                         <a:rPr lang="en-US" sz="900" b="1" dirty="0">
                           <a:solidFill>
-                            <a:srgbClr val="0F1318"/>
+                            <a:srgbClr val="2A0F57"/>
                           </a:solidFill>
                           <a:latin typeface="Calibri" pitchFamily="34" charset="0"/>
                           <a:ea typeface="Calibri" pitchFamily="34" charset="-122"/>
@@ -18508,7 +18508,7 @@
                     </a:lnT>
                     <a:lnB w="7620" cap="flat" cmpd="sng" algn="ctr">
                       <a:solidFill>
-                        <a:srgbClr val="DCD3C3"/>
+                        <a:srgbClr val="DDD9E5"/>
                       </a:solidFill>
                       <a:prstDash val="solid"/>
                       <a:round/>
@@ -18528,7 +18528,7 @@
                       <a:r>
                         <a:rPr lang="en-US" sz="900" dirty="0">
                           <a:solidFill>
-                            <a:srgbClr val="4A453E"/>
+                            <a:srgbClr val="47444D"/>
                           </a:solidFill>
                           <a:latin typeface="Calibri" pitchFamily="34" charset="0"/>
                           <a:ea typeface="Calibri" pitchFamily="34" charset="-122"/>
@@ -18555,7 +18555,7 @@
                     </a:lnT>
                     <a:lnB w="7620" cap="flat" cmpd="sng" algn="ctr">
                       <a:solidFill>
-                        <a:srgbClr val="DCD3C3"/>
+                        <a:srgbClr val="DDD9E5"/>
                       </a:solidFill>
                       <a:prstDash val="solid"/>
                       <a:round/>
@@ -18575,7 +18575,7 @@
                       <a:r>
                         <a:rPr lang="en-US" sz="900" dirty="0">
                           <a:solidFill>
-                            <a:srgbClr val="4A453E"/>
+                            <a:srgbClr val="47444D"/>
                           </a:solidFill>
                           <a:latin typeface="Calibri" pitchFamily="34" charset="0"/>
                           <a:ea typeface="Calibri" pitchFamily="34" charset="-122"/>
@@ -18602,7 +18602,7 @@
                     </a:lnT>
                     <a:lnB w="7620" cap="flat" cmpd="sng" algn="ctr">
                       <a:solidFill>
-                        <a:srgbClr val="DCD3C3"/>
+                        <a:srgbClr val="DDD9E5"/>
                       </a:solidFill>
                       <a:prstDash val="solid"/>
                       <a:round/>
@@ -18622,7 +18622,7 @@
                       <a:r>
                         <a:rPr lang="en-US" sz="900" dirty="0">
                           <a:solidFill>
-                            <a:srgbClr val="4A453E"/>
+                            <a:srgbClr val="47444D"/>
                           </a:solidFill>
                           <a:latin typeface="Calibri" pitchFamily="34" charset="0"/>
                           <a:ea typeface="Calibri" pitchFamily="34" charset="-122"/>
@@ -18649,7 +18649,7 @@
                     </a:lnT>
                     <a:lnB w="7620" cap="flat" cmpd="sng" algn="ctr">
                       <a:solidFill>
-                        <a:srgbClr val="DCD3C3"/>
+                        <a:srgbClr val="DDD9E5"/>
                       </a:solidFill>
                       <a:prstDash val="solid"/>
                       <a:round/>
@@ -18693,7 +18693,7 @@
             <a:r>
               <a:rPr lang="en-US" sz="750" dirty="0">
                 <a:solidFill>
-                  <a:srgbClr val="7C766B"/>
+                  <a:srgbClr val="6C6873"/>
                 </a:solidFill>
                 <a:latin typeface="Calibri" pitchFamily="34" charset="0"/>
                 <a:ea typeface="Calibri" pitchFamily="34" charset="-122"/>
@@ -18735,7 +18735,7 @@
             <a:r>
               <a:rPr lang="en-US" sz="800" dirty="0">
                 <a:solidFill>
-                  <a:srgbClr val="7C766B"/>
+                  <a:srgbClr val="6C6873"/>
                 </a:solidFill>
                 <a:latin typeface="Calibri" pitchFamily="34" charset="0"/>
                 <a:ea typeface="Calibri" pitchFamily="34" charset="-122"/>
@@ -18761,7 +18761,7 @@
     <p:bg>
       <p:bgPr>
         <a:solidFill>
-          <a:srgbClr val="F1ECE3"/>
+          <a:srgbClr val="F6F4F9"/>
         </a:solidFill>
       </p:bgPr>
     </p:bg>
@@ -18794,7 +18794,7 @@
             <a:avLst/>
           </a:prstGeom>
           <a:solidFill>
-            <a:srgbClr val="D98324"/>
+            <a:srgbClr val="6D3FD1"/>
           </a:solidFill>
           <a:ln/>
         </p:spPr>
@@ -18829,7 +18829,7 @@
             <a:r>
               <a:rPr lang="en-US" sz="800" b="1" spc="130" kern="0" dirty="0">
                 <a:solidFill>
-                  <a:srgbClr val="7C766B"/>
+                  <a:srgbClr val="6C6873"/>
                 </a:solidFill>
                 <a:latin typeface="Arial" pitchFamily="34" charset="0"/>
                 <a:ea typeface="Arial" pitchFamily="34" charset="-122"/>
@@ -18871,7 +18871,7 @@
             <a:r>
               <a:rPr lang="en-US" sz="2200" b="1" spc="-30" kern="0" dirty="0">
                 <a:solidFill>
-                  <a:srgbClr val="0F1318"/>
+                  <a:srgbClr val="2A0F57"/>
                 </a:solidFill>
                 <a:latin typeface="Arial" pitchFamily="34" charset="0"/>
                 <a:ea typeface="Arial" pitchFamily="34" charset="-122"/>
@@ -18939,7 +18939,7 @@
                     </a:lnT>
                     <a:lnB w="12700" cap="flat" cmpd="sng" algn="ctr">
                       <a:solidFill>
-                        <a:srgbClr val="0F1318"/>
+                        <a:srgbClr val="2A0F57"/>
                       </a:solidFill>
                       <a:prstDash val="solid"/>
                       <a:round/>
@@ -18959,7 +18959,7 @@
                       <a:r>
                         <a:rPr lang="en-US" sz="750" b="1" spc="100" kern="0" dirty="0">
                           <a:solidFill>
-                            <a:srgbClr val="7C766B"/>
+                            <a:srgbClr val="6C6873"/>
                           </a:solidFill>
                           <a:latin typeface="Arial" pitchFamily="34" charset="0"/>
                           <a:ea typeface="Arial" pitchFamily="34" charset="-122"/>
@@ -18986,7 +18986,7 @@
                     </a:lnT>
                     <a:lnB w="12700" cap="flat" cmpd="sng" algn="ctr">
                       <a:solidFill>
-                        <a:srgbClr val="0F1318"/>
+                        <a:srgbClr val="2A0F57"/>
                       </a:solidFill>
                       <a:prstDash val="solid"/>
                       <a:round/>
@@ -19006,7 +19006,7 @@
                       <a:r>
                         <a:rPr lang="en-US" sz="750" b="1" spc="100" kern="0" dirty="0">
                           <a:solidFill>
-                            <a:srgbClr val="7C766B"/>
+                            <a:srgbClr val="6C6873"/>
                           </a:solidFill>
                           <a:latin typeface="Arial" pitchFamily="34" charset="0"/>
                           <a:ea typeface="Arial" pitchFamily="34" charset="-122"/>
@@ -19033,7 +19033,7 @@
                     </a:lnT>
                     <a:lnB w="12700" cap="flat" cmpd="sng" algn="ctr">
                       <a:solidFill>
-                        <a:srgbClr val="0F1318"/>
+                        <a:srgbClr val="2A0F57"/>
                       </a:solidFill>
                       <a:prstDash val="solid"/>
                       <a:round/>
@@ -19053,7 +19053,7 @@
                       <a:r>
                         <a:rPr lang="en-US" sz="750" b="1" spc="100" kern="0" dirty="0">
                           <a:solidFill>
-                            <a:srgbClr val="7C766B"/>
+                            <a:srgbClr val="6C6873"/>
                           </a:solidFill>
                           <a:latin typeface="Arial" pitchFamily="34" charset="0"/>
                           <a:ea typeface="Arial" pitchFamily="34" charset="-122"/>
@@ -19080,7 +19080,7 @@
                     </a:lnT>
                     <a:lnB w="12700" cap="flat" cmpd="sng" algn="ctr">
                       <a:solidFill>
-                        <a:srgbClr val="0F1318"/>
+                        <a:srgbClr val="2A0F57"/>
                       </a:solidFill>
                       <a:prstDash val="solid"/>
                       <a:round/>
@@ -19102,7 +19102,7 @@
                       <a:r>
                         <a:rPr lang="en-US" sz="1100" b="1" dirty="0">
                           <a:solidFill>
-                            <a:srgbClr val="0F1318"/>
+                            <a:srgbClr val="2A0F57"/>
                           </a:solidFill>
                           <a:latin typeface="Calibri" pitchFamily="34" charset="0"/>
                           <a:ea typeface="Calibri" pitchFamily="34" charset="-122"/>
@@ -19129,7 +19129,7 @@
                     </a:lnT>
                     <a:lnB w="7620" cap="flat" cmpd="sng" algn="ctr">
                       <a:solidFill>
-                        <a:srgbClr val="DCD3C3"/>
+                        <a:srgbClr val="DDD9E5"/>
                       </a:solidFill>
                       <a:prstDash val="solid"/>
                       <a:round/>
@@ -19149,7 +19149,7 @@
                       <a:r>
                         <a:rPr lang="en-US" sz="1100" dirty="0">
                           <a:solidFill>
-                            <a:srgbClr val="4A453E"/>
+                            <a:srgbClr val="47444D"/>
                           </a:solidFill>
                           <a:latin typeface="Calibri" pitchFamily="34" charset="0"/>
                           <a:ea typeface="Calibri" pitchFamily="34" charset="-122"/>
@@ -19176,7 +19176,7 @@
                     </a:lnT>
                     <a:lnB w="7620" cap="flat" cmpd="sng" algn="ctr">
                       <a:solidFill>
-                        <a:srgbClr val="DCD3C3"/>
+                        <a:srgbClr val="DDD9E5"/>
                       </a:solidFill>
                       <a:prstDash val="solid"/>
                       <a:round/>
@@ -19196,7 +19196,7 @@
                       <a:r>
                         <a:rPr lang="en-US" sz="1100" dirty="0">
                           <a:solidFill>
-                            <a:srgbClr val="4A453E"/>
+                            <a:srgbClr val="47444D"/>
                           </a:solidFill>
                           <a:latin typeface="Calibri" pitchFamily="34" charset="0"/>
                           <a:ea typeface="Calibri" pitchFamily="34" charset="-122"/>
@@ -19223,7 +19223,7 @@
                     </a:lnT>
                     <a:lnB w="7620" cap="flat" cmpd="sng" algn="ctr">
                       <a:solidFill>
-                        <a:srgbClr val="DCD3C3"/>
+                        <a:srgbClr val="DDD9E5"/>
                       </a:solidFill>
                       <a:prstDash val="solid"/>
                       <a:round/>
@@ -19243,7 +19243,7 @@
                       <a:r>
                         <a:rPr lang="en-US" sz="1100" dirty="0">
                           <a:solidFill>
-                            <a:srgbClr val="4A453E"/>
+                            <a:srgbClr val="47444D"/>
                           </a:solidFill>
                           <a:latin typeface="Calibri" pitchFamily="34" charset="0"/>
                           <a:ea typeface="Calibri" pitchFamily="34" charset="-122"/>
@@ -19270,7 +19270,7 @@
                     </a:lnT>
                     <a:lnB w="7620" cap="flat" cmpd="sng" algn="ctr">
                       <a:solidFill>
-                        <a:srgbClr val="DCD3C3"/>
+                        <a:srgbClr val="DDD9E5"/>
                       </a:solidFill>
                       <a:prstDash val="solid"/>
                       <a:round/>
@@ -19292,7 +19292,7 @@
                       <a:r>
                         <a:rPr lang="en-US" sz="1100" b="1" dirty="0">
                           <a:solidFill>
-                            <a:srgbClr val="0F1318"/>
+                            <a:srgbClr val="2A0F57"/>
                           </a:solidFill>
                           <a:latin typeface="Calibri" pitchFamily="34" charset="0"/>
                           <a:ea typeface="Calibri" pitchFamily="34" charset="-122"/>
@@ -19319,7 +19319,7 @@
                     </a:lnT>
                     <a:lnB w="7620" cap="flat" cmpd="sng" algn="ctr">
                       <a:solidFill>
-                        <a:srgbClr val="DCD3C3"/>
+                        <a:srgbClr val="DDD9E5"/>
                       </a:solidFill>
                       <a:prstDash val="solid"/>
                       <a:round/>
@@ -19339,7 +19339,7 @@
                       <a:r>
                         <a:rPr lang="en-US" sz="1100" dirty="0">
                           <a:solidFill>
-                            <a:srgbClr val="4A453E"/>
+                            <a:srgbClr val="47444D"/>
                           </a:solidFill>
                           <a:latin typeface="Calibri" pitchFamily="34" charset="0"/>
                           <a:ea typeface="Calibri" pitchFamily="34" charset="-122"/>
@@ -19366,7 +19366,7 @@
                     </a:lnT>
                     <a:lnB w="7620" cap="flat" cmpd="sng" algn="ctr">
                       <a:solidFill>
-                        <a:srgbClr val="DCD3C3"/>
+                        <a:srgbClr val="DDD9E5"/>
                       </a:solidFill>
                       <a:prstDash val="solid"/>
                       <a:round/>
@@ -19386,7 +19386,7 @@
                       <a:r>
                         <a:rPr lang="en-US" sz="1100" dirty="0">
                           <a:solidFill>
-                            <a:srgbClr val="4A453E"/>
+                            <a:srgbClr val="47444D"/>
                           </a:solidFill>
                           <a:latin typeface="Calibri" pitchFamily="34" charset="0"/>
                           <a:ea typeface="Calibri" pitchFamily="34" charset="-122"/>
@@ -19413,7 +19413,7 @@
                     </a:lnT>
                     <a:lnB w="7620" cap="flat" cmpd="sng" algn="ctr">
                       <a:solidFill>
-                        <a:srgbClr val="DCD3C3"/>
+                        <a:srgbClr val="DDD9E5"/>
                       </a:solidFill>
                       <a:prstDash val="solid"/>
                       <a:round/>
@@ -19433,7 +19433,7 @@
                       <a:r>
                         <a:rPr lang="en-US" sz="1100" dirty="0">
                           <a:solidFill>
-                            <a:srgbClr val="4A453E"/>
+                            <a:srgbClr val="47444D"/>
                           </a:solidFill>
                           <a:latin typeface="Calibri" pitchFamily="34" charset="0"/>
                           <a:ea typeface="Calibri" pitchFamily="34" charset="-122"/>
@@ -19460,7 +19460,7 @@
                     </a:lnT>
                     <a:lnB w="7620" cap="flat" cmpd="sng" algn="ctr">
                       <a:solidFill>
-                        <a:srgbClr val="DCD3C3"/>
+                        <a:srgbClr val="DDD9E5"/>
                       </a:solidFill>
                       <a:prstDash val="solid"/>
                       <a:round/>
@@ -19482,7 +19482,7 @@
                       <a:r>
                         <a:rPr lang="en-US" sz="1100" b="1" dirty="0">
                           <a:solidFill>
-                            <a:srgbClr val="0F1318"/>
+                            <a:srgbClr val="2A0F57"/>
                           </a:solidFill>
                           <a:latin typeface="Calibri" pitchFamily="34" charset="0"/>
                           <a:ea typeface="Calibri" pitchFamily="34" charset="-122"/>
@@ -19509,7 +19509,7 @@
                     </a:lnT>
                     <a:lnB w="7620" cap="flat" cmpd="sng" algn="ctr">
                       <a:solidFill>
-                        <a:srgbClr val="DCD3C3"/>
+                        <a:srgbClr val="DDD9E5"/>
                       </a:solidFill>
                       <a:prstDash val="solid"/>
                       <a:round/>
@@ -19529,7 +19529,7 @@
                       <a:r>
                         <a:rPr lang="en-US" sz="1100" dirty="0">
                           <a:solidFill>
-                            <a:srgbClr val="4A453E"/>
+                            <a:srgbClr val="47444D"/>
                           </a:solidFill>
                           <a:latin typeface="Calibri" pitchFamily="34" charset="0"/>
                           <a:ea typeface="Calibri" pitchFamily="34" charset="-122"/>
@@ -19556,7 +19556,7 @@
                     </a:lnT>
                     <a:lnB w="7620" cap="flat" cmpd="sng" algn="ctr">
                       <a:solidFill>
-                        <a:srgbClr val="DCD3C3"/>
+                        <a:srgbClr val="DDD9E5"/>
                       </a:solidFill>
                       <a:prstDash val="solid"/>
                       <a:round/>
@@ -19576,7 +19576,7 @@
                       <a:r>
                         <a:rPr lang="en-US" sz="1100" dirty="0">
                           <a:solidFill>
-                            <a:srgbClr val="4A453E"/>
+                            <a:srgbClr val="47444D"/>
                           </a:solidFill>
                           <a:latin typeface="Calibri" pitchFamily="34" charset="0"/>
                           <a:ea typeface="Calibri" pitchFamily="34" charset="-122"/>
@@ -19603,7 +19603,7 @@
                     </a:lnT>
                     <a:lnB w="7620" cap="flat" cmpd="sng" algn="ctr">
                       <a:solidFill>
-                        <a:srgbClr val="DCD3C3"/>
+                        <a:srgbClr val="DDD9E5"/>
                       </a:solidFill>
                       <a:prstDash val="solid"/>
                       <a:round/>
@@ -19623,7 +19623,7 @@
                       <a:r>
                         <a:rPr lang="en-US" sz="1100" dirty="0">
                           <a:solidFill>
-                            <a:srgbClr val="4A453E"/>
+                            <a:srgbClr val="47444D"/>
                           </a:solidFill>
                           <a:latin typeface="Calibri" pitchFamily="34" charset="0"/>
                           <a:ea typeface="Calibri" pitchFamily="34" charset="-122"/>
@@ -19650,7 +19650,7 @@
                     </a:lnT>
                     <a:lnB w="7620" cap="flat" cmpd="sng" algn="ctr">
                       <a:solidFill>
-                        <a:srgbClr val="DCD3C3"/>
+                        <a:srgbClr val="DDD9E5"/>
                       </a:solidFill>
                       <a:prstDash val="solid"/>
                       <a:round/>
@@ -19672,7 +19672,7 @@
                       <a:r>
                         <a:rPr lang="en-US" sz="1100" b="1" dirty="0">
                           <a:solidFill>
-                            <a:srgbClr val="0F1318"/>
+                            <a:srgbClr val="2A0F57"/>
                           </a:solidFill>
                           <a:latin typeface="Calibri" pitchFamily="34" charset="0"/>
                           <a:ea typeface="Calibri" pitchFamily="34" charset="-122"/>
@@ -19699,7 +19699,7 @@
                     </a:lnT>
                     <a:lnB w="7620" cap="flat" cmpd="sng" algn="ctr">
                       <a:solidFill>
-                        <a:srgbClr val="DCD3C3"/>
+                        <a:srgbClr val="DDD9E5"/>
                       </a:solidFill>
                       <a:prstDash val="solid"/>
                       <a:round/>
@@ -19719,7 +19719,7 @@
                       <a:r>
                         <a:rPr lang="en-US" sz="1100" dirty="0">
                           <a:solidFill>
-                            <a:srgbClr val="4A453E"/>
+                            <a:srgbClr val="47444D"/>
                           </a:solidFill>
                           <a:latin typeface="Calibri" pitchFamily="34" charset="0"/>
                           <a:ea typeface="Calibri" pitchFamily="34" charset="-122"/>
@@ -19746,7 +19746,7 @@
                     </a:lnT>
                     <a:lnB w="7620" cap="flat" cmpd="sng" algn="ctr">
                       <a:solidFill>
-                        <a:srgbClr val="DCD3C3"/>
+                        <a:srgbClr val="DDD9E5"/>
                       </a:solidFill>
                       <a:prstDash val="solid"/>
                       <a:round/>
@@ -19766,7 +19766,7 @@
                       <a:r>
                         <a:rPr lang="en-US" sz="1100" dirty="0">
                           <a:solidFill>
-                            <a:srgbClr val="4A453E"/>
+                            <a:srgbClr val="47444D"/>
                           </a:solidFill>
                           <a:latin typeface="Calibri" pitchFamily="34" charset="0"/>
                           <a:ea typeface="Calibri" pitchFamily="34" charset="-122"/>
@@ -19793,7 +19793,7 @@
                     </a:lnT>
                     <a:lnB w="7620" cap="flat" cmpd="sng" algn="ctr">
                       <a:solidFill>
-                        <a:srgbClr val="DCD3C3"/>
+                        <a:srgbClr val="DDD9E5"/>
                       </a:solidFill>
                       <a:prstDash val="solid"/>
                       <a:round/>
@@ -19813,7 +19813,7 @@
                       <a:r>
                         <a:rPr lang="en-US" sz="1100" dirty="0">
                           <a:solidFill>
-                            <a:srgbClr val="4A453E"/>
+                            <a:srgbClr val="47444D"/>
                           </a:solidFill>
                           <a:latin typeface="Calibri" pitchFamily="34" charset="0"/>
                           <a:ea typeface="Calibri" pitchFamily="34" charset="-122"/>
@@ -19840,7 +19840,7 @@
                     </a:lnT>
                     <a:lnB w="7620" cap="flat" cmpd="sng" algn="ctr">
                       <a:solidFill>
-                        <a:srgbClr val="DCD3C3"/>
+                        <a:srgbClr val="DDD9E5"/>
                       </a:solidFill>
                       <a:prstDash val="solid"/>
                       <a:round/>
@@ -19884,7 +19884,7 @@
             <a:r>
               <a:rPr lang="en-US" sz="750" dirty="0">
                 <a:solidFill>
-                  <a:srgbClr val="7C766B"/>
+                  <a:srgbClr val="6C6873"/>
                 </a:solidFill>
                 <a:latin typeface="Calibri" pitchFamily="34" charset="0"/>
                 <a:ea typeface="Calibri" pitchFamily="34" charset="-122"/>
@@ -19926,7 +19926,7 @@
             <a:r>
               <a:rPr lang="en-US" sz="800" dirty="0">
                 <a:solidFill>
-                  <a:srgbClr val="7C766B"/>
+                  <a:srgbClr val="6C6873"/>
                 </a:solidFill>
                 <a:latin typeface="Calibri" pitchFamily="34" charset="0"/>
                 <a:ea typeface="Calibri" pitchFamily="34" charset="-122"/>
@@ -19952,7 +19952,7 @@
     <p:bg>
       <p:bgPr>
         <a:solidFill>
-          <a:srgbClr val="0F1318"/>
+          <a:srgbClr val="2A0F57"/>
         </a:solidFill>
       </p:bgPr>
     </p:bg>
@@ -19985,7 +19985,7 @@
             <a:avLst/>
           </a:prstGeom>
           <a:solidFill>
-            <a:srgbClr val="D98324"/>
+            <a:srgbClr val="6D3FD1"/>
           </a:solidFill>
           <a:ln/>
         </p:spPr>
@@ -20020,7 +20020,7 @@
             <a:r>
               <a:rPr lang="en-US" sz="800" b="1" spc="130" kern="0" dirty="0">
                 <a:solidFill>
-                  <a:srgbClr val="8C8478"/>
+                  <a:srgbClr val="6C6873"/>
                 </a:solidFill>
                 <a:latin typeface="Arial" pitchFamily="34" charset="0"/>
                 <a:ea typeface="Arial" pitchFamily="34" charset="-122"/>
@@ -20062,7 +20062,7 @@
             <a:r>
               <a:rPr lang="en-US" sz="2400" b="1" dirty="0">
                 <a:solidFill>
-                  <a:srgbClr val="F1ECE3"/>
+                  <a:srgbClr val="F6F4F9"/>
                 </a:solidFill>
                 <a:latin typeface="Arial" pitchFamily="34" charset="0"/>
                 <a:ea typeface="Arial" pitchFamily="34" charset="-122"/>
@@ -20104,7 +20104,7 @@
             <a:r>
               <a:rPr lang="en-US" sz="800" b="1" spc="130" kern="0" dirty="0">
                 <a:solidFill>
-                  <a:srgbClr val="D98324"/>
+                  <a:srgbClr val="6D3FD1"/>
                 </a:solidFill>
                 <a:latin typeface="Arial" pitchFamily="34" charset="0"/>
                 <a:ea typeface="Arial" pitchFamily="34" charset="-122"/>
@@ -20152,7 +20152,7 @@
             <a:r>
               <a:rPr lang="en-US" sz="1000" dirty="0">
                 <a:solidFill>
-                  <a:srgbClr val="C6BFB3"/>
+                  <a:srgbClr val="D9CCF5"/>
                 </a:solidFill>
                 <a:latin typeface="Calibri" pitchFamily="34" charset="0"/>
                 <a:ea typeface="Calibri" pitchFamily="34" charset="-122"/>
@@ -20176,7 +20176,7 @@
             <a:r>
               <a:rPr lang="en-US" sz="1000" dirty="0">
                 <a:solidFill>
-                  <a:srgbClr val="C6BFB3"/>
+                  <a:srgbClr val="D9CCF5"/>
                 </a:solidFill>
                 <a:latin typeface="Calibri" pitchFamily="34" charset="0"/>
                 <a:ea typeface="Calibri" pitchFamily="34" charset="-122"/>
@@ -20200,7 +20200,7 @@
             <a:r>
               <a:rPr lang="en-US" sz="1000" dirty="0">
                 <a:solidFill>
-                  <a:srgbClr val="C6BFB3"/>
+                  <a:srgbClr val="D9CCF5"/>
                 </a:solidFill>
                 <a:latin typeface="Calibri" pitchFamily="34" charset="0"/>
                 <a:ea typeface="Calibri" pitchFamily="34" charset="-122"/>
@@ -20224,7 +20224,7 @@
             <a:r>
               <a:rPr lang="en-US" sz="1000" dirty="0">
                 <a:solidFill>
-                  <a:srgbClr val="C6BFB3"/>
+                  <a:srgbClr val="D9CCF5"/>
                 </a:solidFill>
                 <a:latin typeface="Calibri" pitchFamily="34" charset="0"/>
                 <a:ea typeface="Calibri" pitchFamily="34" charset="-122"/>
@@ -20266,7 +20266,7 @@
             <a:r>
               <a:rPr lang="en-US" sz="800" dirty="0">
                 <a:solidFill>
-                  <a:srgbClr val="8C8478"/>
+                  <a:srgbClr val="6C6873"/>
                 </a:solidFill>
                 <a:latin typeface="Calibri" pitchFamily="34" charset="0"/>
                 <a:ea typeface="Calibri" pitchFamily="34" charset="-122"/>
@@ -20292,7 +20292,7 @@
     <p:bg>
       <p:bgPr>
         <a:solidFill>
-          <a:srgbClr val="F1ECE3"/>
+          <a:srgbClr val="F6F4F9"/>
         </a:solidFill>
       </p:bgPr>
     </p:bg>
@@ -20325,7 +20325,7 @@
             <a:avLst/>
           </a:prstGeom>
           <a:solidFill>
-            <a:srgbClr val="D98324"/>
+            <a:srgbClr val="6D3FD1"/>
           </a:solidFill>
           <a:ln/>
         </p:spPr>
@@ -20360,7 +20360,7 @@
             <a:r>
               <a:rPr lang="en-US" sz="800" b="1" spc="130" kern="0" dirty="0">
                 <a:solidFill>
-                  <a:srgbClr val="7C766B"/>
+                  <a:srgbClr val="6C6873"/>
                 </a:solidFill>
                 <a:latin typeface="Arial" pitchFamily="34" charset="0"/>
                 <a:ea typeface="Arial" pitchFamily="34" charset="-122"/>
@@ -20402,7 +20402,7 @@
             <a:r>
               <a:rPr lang="en-US" sz="2200" b="1" spc="-30" kern="0" dirty="0">
                 <a:solidFill>
-                  <a:srgbClr val="0F1318"/>
+                  <a:srgbClr val="2A0F57"/>
                 </a:solidFill>
                 <a:latin typeface="Arial" pitchFamily="34" charset="0"/>
                 <a:ea typeface="Arial" pitchFamily="34" charset="-122"/>
@@ -20449,7 +20449,7 @@
             <a:r>
               <a:rPr lang="en-US" sz="1150" dirty="0">
                 <a:solidFill>
-                  <a:srgbClr val="4A453E"/>
+                  <a:srgbClr val="47444D"/>
                 </a:solidFill>
                 <a:latin typeface="Calibri" pitchFamily="34" charset="0"/>
                 <a:ea typeface="Calibri" pitchFamily="34" charset="-122"/>
@@ -20472,7 +20472,7 @@
             <a:r>
               <a:rPr lang="en-US" sz="1150" dirty="0">
                 <a:solidFill>
-                  <a:srgbClr val="4A453E"/>
+                  <a:srgbClr val="47444D"/>
                 </a:solidFill>
                 <a:latin typeface="Calibri" pitchFamily="34" charset="0"/>
                 <a:ea typeface="Calibri" pitchFamily="34" charset="-122"/>
@@ -20495,7 +20495,7 @@
             <a:r>
               <a:rPr lang="en-US" sz="1150" dirty="0">
                 <a:solidFill>
-                  <a:srgbClr val="4A453E"/>
+                  <a:srgbClr val="47444D"/>
                 </a:solidFill>
                 <a:latin typeface="Calibri" pitchFamily="34" charset="0"/>
                 <a:ea typeface="Calibri" pitchFamily="34" charset="-122"/>
@@ -20518,7 +20518,7 @@
             <a:r>
               <a:rPr lang="en-US" sz="1150" dirty="0">
                 <a:solidFill>
-                  <a:srgbClr val="4A453E"/>
+                  <a:srgbClr val="47444D"/>
                 </a:solidFill>
                 <a:latin typeface="Calibri" pitchFamily="34" charset="0"/>
                 <a:ea typeface="Calibri" pitchFamily="34" charset="-122"/>
@@ -20541,7 +20541,7 @@
             <a:r>
               <a:rPr lang="en-US" sz="1150" dirty="0">
                 <a:solidFill>
-                  <a:srgbClr val="4A453E"/>
+                  <a:srgbClr val="47444D"/>
                 </a:solidFill>
                 <a:latin typeface="Calibri" pitchFamily="34" charset="0"/>
                 <a:ea typeface="Calibri" pitchFamily="34" charset="-122"/>
@@ -20564,7 +20564,7 @@
             <a:r>
               <a:rPr lang="en-US" sz="1150" dirty="0">
                 <a:solidFill>
-                  <a:srgbClr val="4A453E"/>
+                  <a:srgbClr val="47444D"/>
                 </a:solidFill>
                 <a:latin typeface="Calibri" pitchFamily="34" charset="0"/>
                 <a:ea typeface="Calibri" pitchFamily="34" charset="-122"/>
@@ -20616,7 +20616,7 @@
                       <a:r>
                         <a:rPr lang="en-US" sz="750" b="1" spc="100" kern="0" dirty="0">
                           <a:solidFill>
-                            <a:srgbClr val="7C766B"/>
+                            <a:srgbClr val="6C6873"/>
                           </a:solidFill>
                           <a:latin typeface="Arial" pitchFamily="34" charset="0"/>
                           <a:ea typeface="Arial" pitchFamily="34" charset="-122"/>
@@ -20643,7 +20643,7 @@
                     </a:lnT>
                     <a:lnB w="12700" cap="flat" cmpd="sng" algn="ctr">
                       <a:solidFill>
-                        <a:srgbClr val="0F1318"/>
+                        <a:srgbClr val="2A0F57"/>
                       </a:solidFill>
                       <a:prstDash val="solid"/>
                       <a:round/>
@@ -20663,7 +20663,7 @@
                       <a:r>
                         <a:rPr lang="en-US" sz="750" b="1" spc="100" kern="0" dirty="0">
                           <a:solidFill>
-                            <a:srgbClr val="7C766B"/>
+                            <a:srgbClr val="6C6873"/>
                           </a:solidFill>
                           <a:latin typeface="Arial" pitchFamily="34" charset="0"/>
                           <a:ea typeface="Arial" pitchFamily="34" charset="-122"/>
@@ -20690,7 +20690,7 @@
                     </a:lnT>
                     <a:lnB w="12700" cap="flat" cmpd="sng" algn="ctr">
                       <a:solidFill>
-                        <a:srgbClr val="0F1318"/>
+                        <a:srgbClr val="2A0F57"/>
                       </a:solidFill>
                       <a:prstDash val="solid"/>
                       <a:round/>
@@ -20710,7 +20710,7 @@
                       <a:r>
                         <a:rPr lang="en-US" sz="750" b="1" spc="100" kern="0" dirty="0">
                           <a:solidFill>
-                            <a:srgbClr val="7C766B"/>
+                            <a:srgbClr val="6C6873"/>
                           </a:solidFill>
                           <a:latin typeface="Arial" pitchFamily="34" charset="0"/>
                           <a:ea typeface="Arial" pitchFamily="34" charset="-122"/>
@@ -20737,7 +20737,7 @@
                     </a:lnT>
                     <a:lnB w="12700" cap="flat" cmpd="sng" algn="ctr">
                       <a:solidFill>
-                        <a:srgbClr val="0F1318"/>
+                        <a:srgbClr val="2A0F57"/>
                       </a:solidFill>
                       <a:prstDash val="solid"/>
                       <a:round/>
@@ -20757,7 +20757,7 @@
                       <a:r>
                         <a:rPr lang="en-US" sz="750" b="1" spc="100" kern="0" dirty="0">
                           <a:solidFill>
-                            <a:srgbClr val="7C766B"/>
+                            <a:srgbClr val="6C6873"/>
                           </a:solidFill>
                           <a:latin typeface="Arial" pitchFamily="34" charset="0"/>
                           <a:ea typeface="Arial" pitchFamily="34" charset="-122"/>
@@ -20784,7 +20784,7 @@
                     </a:lnT>
                     <a:lnB w="12700" cap="flat" cmpd="sng" algn="ctr">
                       <a:solidFill>
-                        <a:srgbClr val="0F1318"/>
+                        <a:srgbClr val="2A0F57"/>
                       </a:solidFill>
                       <a:prstDash val="solid"/>
                       <a:round/>
@@ -20806,7 +20806,7 @@
                       <a:r>
                         <a:rPr lang="en-US" sz="1100" b="1" dirty="0">
                           <a:solidFill>
-                            <a:srgbClr val="0F1318"/>
+                            <a:srgbClr val="2A0F57"/>
                           </a:solidFill>
                           <a:latin typeface="Calibri" pitchFamily="34" charset="0"/>
                           <a:ea typeface="Calibri" pitchFamily="34" charset="-122"/>
@@ -20833,7 +20833,7 @@
                     </a:lnT>
                     <a:lnB w="7620" cap="flat" cmpd="sng" algn="ctr">
                       <a:solidFill>
-                        <a:srgbClr val="DCD3C3"/>
+                        <a:srgbClr val="DDD9E5"/>
                       </a:solidFill>
                       <a:prstDash val="solid"/>
                       <a:round/>
@@ -20853,7 +20853,7 @@
                       <a:r>
                         <a:rPr lang="en-US" sz="1100" dirty="0">
                           <a:solidFill>
-                            <a:srgbClr val="4A453E"/>
+                            <a:srgbClr val="47444D"/>
                           </a:solidFill>
                           <a:latin typeface="Calibri" pitchFamily="34" charset="0"/>
                           <a:ea typeface="Calibri" pitchFamily="34" charset="-122"/>
@@ -20880,7 +20880,7 @@
                     </a:lnT>
                     <a:lnB w="7620" cap="flat" cmpd="sng" algn="ctr">
                       <a:solidFill>
-                        <a:srgbClr val="DCD3C3"/>
+                        <a:srgbClr val="DDD9E5"/>
                       </a:solidFill>
                       <a:prstDash val="solid"/>
                       <a:round/>
@@ -20900,7 +20900,7 @@
                       <a:r>
                         <a:rPr lang="en-US" sz="1100" dirty="0">
                           <a:solidFill>
-                            <a:srgbClr val="4A453E"/>
+                            <a:srgbClr val="47444D"/>
                           </a:solidFill>
                           <a:latin typeface="Calibri" pitchFamily="34" charset="0"/>
                           <a:ea typeface="Calibri" pitchFamily="34" charset="-122"/>
@@ -20927,7 +20927,7 @@
                     </a:lnT>
                     <a:lnB w="7620" cap="flat" cmpd="sng" algn="ctr">
                       <a:solidFill>
-                        <a:srgbClr val="DCD3C3"/>
+                        <a:srgbClr val="DDD9E5"/>
                       </a:solidFill>
                       <a:prstDash val="solid"/>
                       <a:round/>
@@ -20947,7 +20947,7 @@
                       <a:r>
                         <a:rPr lang="en-US" sz="1100" dirty="0">
                           <a:solidFill>
-                            <a:srgbClr val="4A453E"/>
+                            <a:srgbClr val="47444D"/>
                           </a:solidFill>
                           <a:latin typeface="Calibri" pitchFamily="34" charset="0"/>
                           <a:ea typeface="Calibri" pitchFamily="34" charset="-122"/>
@@ -20974,7 +20974,7 @@
                     </a:lnT>
                     <a:lnB w="7620" cap="flat" cmpd="sng" algn="ctr">
                       <a:solidFill>
-                        <a:srgbClr val="DCD3C3"/>
+                        <a:srgbClr val="DDD9E5"/>
                       </a:solidFill>
                       <a:prstDash val="solid"/>
                       <a:round/>
@@ -20996,7 +20996,7 @@
                       <a:r>
                         <a:rPr lang="en-US" sz="1100" b="1" dirty="0">
                           <a:solidFill>
-                            <a:srgbClr val="0F1318"/>
+                            <a:srgbClr val="2A0F57"/>
                           </a:solidFill>
                           <a:latin typeface="Calibri" pitchFamily="34" charset="0"/>
                           <a:ea typeface="Calibri" pitchFamily="34" charset="-122"/>
@@ -21023,7 +21023,7 @@
                     </a:lnT>
                     <a:lnB w="7620" cap="flat" cmpd="sng" algn="ctr">
                       <a:solidFill>
-                        <a:srgbClr val="DCD3C3"/>
+                        <a:srgbClr val="DDD9E5"/>
                       </a:solidFill>
                       <a:prstDash val="solid"/>
                       <a:round/>
@@ -21043,7 +21043,7 @@
                       <a:r>
                         <a:rPr lang="en-US" sz="1100" dirty="0">
                           <a:solidFill>
-                            <a:srgbClr val="4A453E"/>
+                            <a:srgbClr val="47444D"/>
                           </a:solidFill>
                           <a:latin typeface="Calibri" pitchFamily="34" charset="0"/>
                           <a:ea typeface="Calibri" pitchFamily="34" charset="-122"/>
@@ -21070,7 +21070,7 @@
                     </a:lnT>
                     <a:lnB w="7620" cap="flat" cmpd="sng" algn="ctr">
                       <a:solidFill>
-                        <a:srgbClr val="DCD3C3"/>
+                        <a:srgbClr val="DDD9E5"/>
                       </a:solidFill>
                       <a:prstDash val="solid"/>
                       <a:round/>
@@ -21090,7 +21090,7 @@
                       <a:r>
                         <a:rPr lang="en-US" sz="1100" dirty="0">
                           <a:solidFill>
-                            <a:srgbClr val="4A453E"/>
+                            <a:srgbClr val="47444D"/>
                           </a:solidFill>
                           <a:latin typeface="Calibri" pitchFamily="34" charset="0"/>
                           <a:ea typeface="Calibri" pitchFamily="34" charset="-122"/>
@@ -21117,7 +21117,7 @@
                     </a:lnT>
                     <a:lnB w="7620" cap="flat" cmpd="sng" algn="ctr">
                       <a:solidFill>
-                        <a:srgbClr val="DCD3C3"/>
+                        <a:srgbClr val="DDD9E5"/>
                       </a:solidFill>
                       <a:prstDash val="solid"/>
                       <a:round/>
@@ -21137,7 +21137,7 @@
                       <a:r>
                         <a:rPr lang="en-US" sz="1100" dirty="0">
                           <a:solidFill>
-                            <a:srgbClr val="4A453E"/>
+                            <a:srgbClr val="47444D"/>
                           </a:solidFill>
                           <a:latin typeface="Calibri" pitchFamily="34" charset="0"/>
                           <a:ea typeface="Calibri" pitchFamily="34" charset="-122"/>
@@ -21164,7 +21164,7 @@
                     </a:lnT>
                     <a:lnB w="7620" cap="flat" cmpd="sng" algn="ctr">
                       <a:solidFill>
-                        <a:srgbClr val="DCD3C3"/>
+                        <a:srgbClr val="DDD9E5"/>
                       </a:solidFill>
                       <a:prstDash val="solid"/>
                       <a:round/>
@@ -21186,7 +21186,7 @@
                       <a:r>
                         <a:rPr lang="en-US" sz="1100" b="1" dirty="0">
                           <a:solidFill>
-                            <a:srgbClr val="0F1318"/>
+                            <a:srgbClr val="2A0F57"/>
                           </a:solidFill>
                           <a:latin typeface="Calibri" pitchFamily="34" charset="0"/>
                           <a:ea typeface="Calibri" pitchFamily="34" charset="-122"/>
@@ -21213,7 +21213,7 @@
                     </a:lnT>
                     <a:lnB w="7620" cap="flat" cmpd="sng" algn="ctr">
                       <a:solidFill>
-                        <a:srgbClr val="DCD3C3"/>
+                        <a:srgbClr val="DDD9E5"/>
                       </a:solidFill>
                       <a:prstDash val="solid"/>
                       <a:round/>
@@ -21233,7 +21233,7 @@
                       <a:r>
                         <a:rPr lang="en-US" sz="1100" dirty="0">
                           <a:solidFill>
-                            <a:srgbClr val="4A453E"/>
+                            <a:srgbClr val="47444D"/>
                           </a:solidFill>
                           <a:latin typeface="Calibri" pitchFamily="34" charset="0"/>
                           <a:ea typeface="Calibri" pitchFamily="34" charset="-122"/>
@@ -21260,7 +21260,7 @@
                     </a:lnT>
                     <a:lnB w="7620" cap="flat" cmpd="sng" algn="ctr">
                       <a:solidFill>
-                        <a:srgbClr val="DCD3C3"/>
+                        <a:srgbClr val="DDD9E5"/>
                       </a:solidFill>
                       <a:prstDash val="solid"/>
                       <a:round/>
@@ -21280,7 +21280,7 @@
                       <a:r>
                         <a:rPr lang="en-US" sz="1100" dirty="0">
                           <a:solidFill>
-                            <a:srgbClr val="4A453E"/>
+                            <a:srgbClr val="47444D"/>
                           </a:solidFill>
                           <a:latin typeface="Calibri" pitchFamily="34" charset="0"/>
                           <a:ea typeface="Calibri" pitchFamily="34" charset="-122"/>
@@ -21307,7 +21307,7 @@
                     </a:lnT>
                     <a:lnB w="7620" cap="flat" cmpd="sng" algn="ctr">
                       <a:solidFill>
-                        <a:srgbClr val="DCD3C3"/>
+                        <a:srgbClr val="DDD9E5"/>
                       </a:solidFill>
                       <a:prstDash val="solid"/>
                       <a:round/>
@@ -21327,7 +21327,7 @@
                       <a:r>
                         <a:rPr lang="en-US" sz="1100" dirty="0">
                           <a:solidFill>
-                            <a:srgbClr val="4A453E"/>
+                            <a:srgbClr val="47444D"/>
                           </a:solidFill>
                           <a:latin typeface="Calibri" pitchFamily="34" charset="0"/>
                           <a:ea typeface="Calibri" pitchFamily="34" charset="-122"/>
@@ -21354,7 +21354,7 @@
                     </a:lnT>
                     <a:lnB w="7620" cap="flat" cmpd="sng" algn="ctr">
                       <a:solidFill>
-                        <a:srgbClr val="DCD3C3"/>
+                        <a:srgbClr val="DDD9E5"/>
                       </a:solidFill>
                       <a:prstDash val="solid"/>
                       <a:round/>
@@ -21376,7 +21376,7 @@
                       <a:r>
                         <a:rPr lang="en-US" sz="1100" b="1" dirty="0">
                           <a:solidFill>
-                            <a:srgbClr val="0F1318"/>
+                            <a:srgbClr val="2A0F57"/>
                           </a:solidFill>
                           <a:latin typeface="Calibri" pitchFamily="34" charset="0"/>
                           <a:ea typeface="Calibri" pitchFamily="34" charset="-122"/>
@@ -21403,7 +21403,7 @@
                     </a:lnT>
                     <a:lnB w="7620" cap="flat" cmpd="sng" algn="ctr">
                       <a:solidFill>
-                        <a:srgbClr val="DCD3C3"/>
+                        <a:srgbClr val="DDD9E5"/>
                       </a:solidFill>
                       <a:prstDash val="solid"/>
                       <a:round/>
@@ -21423,7 +21423,7 @@
                       <a:r>
                         <a:rPr lang="en-US" sz="1100" dirty="0">
                           <a:solidFill>
-                            <a:srgbClr val="4A453E"/>
+                            <a:srgbClr val="47444D"/>
                           </a:solidFill>
                           <a:latin typeface="Calibri" pitchFamily="34" charset="0"/>
                           <a:ea typeface="Calibri" pitchFamily="34" charset="-122"/>
@@ -21450,7 +21450,7 @@
                     </a:lnT>
                     <a:lnB w="7620" cap="flat" cmpd="sng" algn="ctr">
                       <a:solidFill>
-                        <a:srgbClr val="DCD3C3"/>
+                        <a:srgbClr val="DDD9E5"/>
                       </a:solidFill>
                       <a:prstDash val="solid"/>
                       <a:round/>
@@ -21470,7 +21470,7 @@
                       <a:r>
                         <a:rPr lang="en-US" sz="1100" dirty="0">
                           <a:solidFill>
-                            <a:srgbClr val="4A453E"/>
+                            <a:srgbClr val="47444D"/>
                           </a:solidFill>
                           <a:latin typeface="Calibri" pitchFamily="34" charset="0"/>
                           <a:ea typeface="Calibri" pitchFamily="34" charset="-122"/>
@@ -21497,7 +21497,7 @@
                     </a:lnT>
                     <a:lnB w="7620" cap="flat" cmpd="sng" algn="ctr">
                       <a:solidFill>
-                        <a:srgbClr val="DCD3C3"/>
+                        <a:srgbClr val="DDD9E5"/>
                       </a:solidFill>
                       <a:prstDash val="solid"/>
                       <a:round/>
@@ -21517,7 +21517,7 @@
                       <a:r>
                         <a:rPr lang="en-US" sz="1100" dirty="0">
                           <a:solidFill>
-                            <a:srgbClr val="4A453E"/>
+                            <a:srgbClr val="47444D"/>
                           </a:solidFill>
                           <a:latin typeface="Calibri" pitchFamily="34" charset="0"/>
                           <a:ea typeface="Calibri" pitchFamily="34" charset="-122"/>
@@ -21544,7 +21544,7 @@
                     </a:lnT>
                     <a:lnB w="7620" cap="flat" cmpd="sng" algn="ctr">
                       <a:solidFill>
-                        <a:srgbClr val="DCD3C3"/>
+                        <a:srgbClr val="DDD9E5"/>
                       </a:solidFill>
                       <a:prstDash val="solid"/>
                       <a:round/>
@@ -21588,7 +21588,7 @@
             <a:r>
               <a:rPr lang="en-US" sz="750" dirty="0">
                 <a:solidFill>
-                  <a:srgbClr val="7C766B"/>
+                  <a:srgbClr val="6C6873"/>
                 </a:solidFill>
                 <a:latin typeface="Calibri" pitchFamily="34" charset="0"/>
                 <a:ea typeface="Calibri" pitchFamily="34" charset="-122"/>
@@ -21630,7 +21630,7 @@
             <a:r>
               <a:rPr lang="en-US" sz="800" dirty="0">
                 <a:solidFill>
-                  <a:srgbClr val="7C766B"/>
+                  <a:srgbClr val="6C6873"/>
                 </a:solidFill>
                 <a:latin typeface="Calibri" pitchFamily="34" charset="0"/>
                 <a:ea typeface="Calibri" pitchFamily="34" charset="-122"/>
@@ -21656,7 +21656,7 @@
     <p:bg>
       <p:bgPr>
         <a:solidFill>
-          <a:srgbClr val="F1ECE3"/>
+          <a:srgbClr val="F6F4F9"/>
         </a:solidFill>
       </p:bgPr>
     </p:bg>
@@ -21689,7 +21689,7 @@
             <a:avLst/>
           </a:prstGeom>
           <a:solidFill>
-            <a:srgbClr val="D98324"/>
+            <a:srgbClr val="6D3FD1"/>
           </a:solidFill>
           <a:ln/>
         </p:spPr>
@@ -21724,7 +21724,7 @@
             <a:r>
               <a:rPr lang="en-US" sz="800" b="1" spc="130" kern="0" dirty="0">
                 <a:solidFill>
-                  <a:srgbClr val="7C766B"/>
+                  <a:srgbClr val="6C6873"/>
                 </a:solidFill>
                 <a:latin typeface="Arial" pitchFamily="34" charset="0"/>
                 <a:ea typeface="Arial" pitchFamily="34" charset="-122"/>
@@ -21766,7 +21766,7 @@
             <a:r>
               <a:rPr lang="en-US" sz="2200" b="1" spc="-30" kern="0" dirty="0">
                 <a:solidFill>
-                  <a:srgbClr val="0F1318"/>
+                  <a:srgbClr val="2A0F57"/>
                 </a:solidFill>
                 <a:latin typeface="Arial" pitchFamily="34" charset="0"/>
                 <a:ea typeface="Arial" pitchFamily="34" charset="-122"/>
@@ -21813,7 +21813,7 @@
             <a:r>
               <a:rPr lang="en-US" sz="1200" dirty="0">
                 <a:solidFill>
-                  <a:srgbClr val="4A453E"/>
+                  <a:srgbClr val="47444D"/>
                 </a:solidFill>
                 <a:latin typeface="Calibri" pitchFamily="34" charset="0"/>
                 <a:ea typeface="Calibri" pitchFamily="34" charset="-122"/>
@@ -21836,7 +21836,7 @@
             <a:r>
               <a:rPr lang="en-US" sz="1200" dirty="0">
                 <a:solidFill>
-                  <a:srgbClr val="4A453E"/>
+                  <a:srgbClr val="47444D"/>
                 </a:solidFill>
                 <a:latin typeface="Calibri" pitchFamily="34" charset="0"/>
                 <a:ea typeface="Calibri" pitchFamily="34" charset="-122"/>
@@ -21859,7 +21859,7 @@
             <a:r>
               <a:rPr lang="en-US" sz="1200" dirty="0">
                 <a:solidFill>
-                  <a:srgbClr val="4A453E"/>
+                  <a:srgbClr val="47444D"/>
                 </a:solidFill>
                 <a:latin typeface="Calibri" pitchFamily="34" charset="0"/>
                 <a:ea typeface="Calibri" pitchFamily="34" charset="-122"/>
@@ -21882,7 +21882,7 @@
             <a:r>
               <a:rPr lang="en-US" sz="1200" dirty="0">
                 <a:solidFill>
-                  <a:srgbClr val="4A453E"/>
+                  <a:srgbClr val="47444D"/>
                 </a:solidFill>
                 <a:latin typeface="Calibri" pitchFamily="34" charset="0"/>
                 <a:ea typeface="Calibri" pitchFamily="34" charset="-122"/>
@@ -21905,7 +21905,7 @@
             <a:r>
               <a:rPr lang="en-US" sz="1200" dirty="0">
                 <a:solidFill>
-                  <a:srgbClr val="4A453E"/>
+                  <a:srgbClr val="47444D"/>
                 </a:solidFill>
                 <a:latin typeface="Calibri" pitchFamily="34" charset="0"/>
                 <a:ea typeface="Calibri" pitchFamily="34" charset="-122"/>
@@ -21947,7 +21947,7 @@
             <a:r>
               <a:rPr lang="en-US" sz="750" dirty="0">
                 <a:solidFill>
-                  <a:srgbClr val="7C766B"/>
+                  <a:srgbClr val="6C6873"/>
                 </a:solidFill>
                 <a:latin typeface="Calibri" pitchFamily="34" charset="0"/>
                 <a:ea typeface="Calibri" pitchFamily="34" charset="-122"/>
@@ -21989,7 +21989,7 @@
             <a:r>
               <a:rPr lang="en-US" sz="800" dirty="0">
                 <a:solidFill>
-                  <a:srgbClr val="7C766B"/>
+                  <a:srgbClr val="6C6873"/>
                 </a:solidFill>
                 <a:latin typeface="Calibri" pitchFamily="34" charset="0"/>
                 <a:ea typeface="Calibri" pitchFamily="34" charset="-122"/>
@@ -22015,7 +22015,7 @@
     <p:bg>
       <p:bgPr>
         <a:solidFill>
-          <a:srgbClr val="F1ECE3"/>
+          <a:srgbClr val="F6F4F9"/>
         </a:solidFill>
       </p:bgPr>
     </p:bg>
@@ -22048,7 +22048,7 @@
             <a:avLst/>
           </a:prstGeom>
           <a:solidFill>
-            <a:srgbClr val="D98324"/>
+            <a:srgbClr val="6D3FD1"/>
           </a:solidFill>
           <a:ln/>
         </p:spPr>
@@ -22083,7 +22083,7 @@
             <a:r>
               <a:rPr lang="en-US" sz="800" b="1" spc="130" kern="0" dirty="0">
                 <a:solidFill>
-                  <a:srgbClr val="7C766B"/>
+                  <a:srgbClr val="6C6873"/>
                 </a:solidFill>
                 <a:latin typeface="Arial" pitchFamily="34" charset="0"/>
                 <a:ea typeface="Arial" pitchFamily="34" charset="-122"/>
@@ -22125,7 +22125,7 @@
             <a:r>
               <a:rPr lang="en-US" sz="2200" b="1" spc="-30" kern="0" dirty="0">
                 <a:solidFill>
-                  <a:srgbClr val="0F1318"/>
+                  <a:srgbClr val="2A0F57"/>
                 </a:solidFill>
                 <a:latin typeface="Arial" pitchFamily="34" charset="0"/>
                 <a:ea typeface="Arial" pitchFamily="34" charset="-122"/>
@@ -22172,7 +22172,7 @@
             <a:r>
               <a:rPr lang="en-US" sz="1200" dirty="0">
                 <a:solidFill>
-                  <a:srgbClr val="4A453E"/>
+                  <a:srgbClr val="47444D"/>
                 </a:solidFill>
                 <a:latin typeface="Calibri" pitchFamily="34" charset="0"/>
                 <a:ea typeface="Calibri" pitchFamily="34" charset="-122"/>
@@ -22195,7 +22195,7 @@
             <a:r>
               <a:rPr lang="en-US" sz="1200" dirty="0">
                 <a:solidFill>
-                  <a:srgbClr val="4A453E"/>
+                  <a:srgbClr val="47444D"/>
                 </a:solidFill>
                 <a:latin typeface="Calibri" pitchFamily="34" charset="0"/>
                 <a:ea typeface="Calibri" pitchFamily="34" charset="-122"/>
@@ -22218,7 +22218,7 @@
             <a:r>
               <a:rPr lang="en-US" sz="1200" dirty="0">
                 <a:solidFill>
-                  <a:srgbClr val="4A453E"/>
+                  <a:srgbClr val="47444D"/>
                 </a:solidFill>
                 <a:latin typeface="Calibri" pitchFamily="34" charset="0"/>
                 <a:ea typeface="Calibri" pitchFamily="34" charset="-122"/>
@@ -22260,7 +22260,7 @@
             <a:r>
               <a:rPr lang="en-US" sz="750" dirty="0">
                 <a:solidFill>
-                  <a:srgbClr val="7C766B"/>
+                  <a:srgbClr val="6C6873"/>
                 </a:solidFill>
                 <a:latin typeface="Calibri" pitchFamily="34" charset="0"/>
                 <a:ea typeface="Calibri" pitchFamily="34" charset="-122"/>
@@ -22302,7 +22302,7 @@
             <a:r>
               <a:rPr lang="en-US" sz="800" dirty="0">
                 <a:solidFill>
-                  <a:srgbClr val="7C766B"/>
+                  <a:srgbClr val="6C6873"/>
                 </a:solidFill>
                 <a:latin typeface="Calibri" pitchFamily="34" charset="0"/>
                 <a:ea typeface="Calibri" pitchFamily="34" charset="-122"/>
@@ -22328,7 +22328,7 @@
     <p:bg>
       <p:bgPr>
         <a:solidFill>
-          <a:srgbClr val="F1ECE3"/>
+          <a:srgbClr val="F6F4F9"/>
         </a:solidFill>
       </p:bgPr>
     </p:bg>
@@ -22361,7 +22361,7 @@
             <a:avLst/>
           </a:prstGeom>
           <a:solidFill>
-            <a:srgbClr val="D98324"/>
+            <a:srgbClr val="6D3FD1"/>
           </a:solidFill>
           <a:ln/>
         </p:spPr>
@@ -22396,7 +22396,7 @@
             <a:r>
               <a:rPr lang="en-US" sz="800" b="1" spc="130" kern="0" dirty="0">
                 <a:solidFill>
-                  <a:srgbClr val="7C766B"/>
+                  <a:srgbClr val="6C6873"/>
                 </a:solidFill>
                 <a:latin typeface="Arial" pitchFamily="34" charset="0"/>
                 <a:ea typeface="Arial" pitchFamily="34" charset="-122"/>
@@ -22438,7 +22438,7 @@
             <a:r>
               <a:rPr lang="en-US" sz="2200" b="1" spc="-30" kern="0" dirty="0">
                 <a:solidFill>
-                  <a:srgbClr val="0F1318"/>
+                  <a:srgbClr val="2A0F57"/>
                 </a:solidFill>
                 <a:latin typeface="Arial" pitchFamily="34" charset="0"/>
                 <a:ea typeface="Arial" pitchFamily="34" charset="-122"/>
@@ -22485,7 +22485,7 @@
             <a:r>
               <a:rPr lang="en-US" sz="1200" dirty="0">
                 <a:solidFill>
-                  <a:srgbClr val="4A453E"/>
+                  <a:srgbClr val="47444D"/>
                 </a:solidFill>
                 <a:latin typeface="Calibri" pitchFamily="34" charset="0"/>
                 <a:ea typeface="Calibri" pitchFamily="34" charset="-122"/>
@@ -22508,7 +22508,7 @@
             <a:r>
               <a:rPr lang="en-US" sz="1200" dirty="0">
                 <a:solidFill>
-                  <a:srgbClr val="4A453E"/>
+                  <a:srgbClr val="47444D"/>
                 </a:solidFill>
                 <a:latin typeface="Calibri" pitchFamily="34" charset="0"/>
                 <a:ea typeface="Calibri" pitchFamily="34" charset="-122"/>
@@ -22531,7 +22531,7 @@
             <a:r>
               <a:rPr lang="en-US" sz="1200" dirty="0">
                 <a:solidFill>
-                  <a:srgbClr val="4A453E"/>
+                  <a:srgbClr val="47444D"/>
                 </a:solidFill>
                 <a:latin typeface="Calibri" pitchFamily="34" charset="0"/>
                 <a:ea typeface="Calibri" pitchFamily="34" charset="-122"/>
@@ -22573,7 +22573,7 @@
             <a:r>
               <a:rPr lang="en-US" sz="750" dirty="0">
                 <a:solidFill>
-                  <a:srgbClr val="7C766B"/>
+                  <a:srgbClr val="6C6873"/>
                 </a:solidFill>
                 <a:latin typeface="Calibri" pitchFamily="34" charset="0"/>
                 <a:ea typeface="Calibri" pitchFamily="34" charset="-122"/>
@@ -22615,7 +22615,7 @@
             <a:r>
               <a:rPr lang="en-US" sz="800" dirty="0">
                 <a:solidFill>
-                  <a:srgbClr val="7C766B"/>
+                  <a:srgbClr val="6C6873"/>
                 </a:solidFill>
                 <a:latin typeface="Calibri" pitchFamily="34" charset="0"/>
                 <a:ea typeface="Calibri" pitchFamily="34" charset="-122"/>
@@ -22641,7 +22641,7 @@
     <p:bg>
       <p:bgPr>
         <a:solidFill>
-          <a:srgbClr val="F1ECE3"/>
+          <a:srgbClr val="F6F4F9"/>
         </a:solidFill>
       </p:bgPr>
     </p:bg>
@@ -22674,7 +22674,7 @@
             <a:avLst/>
           </a:prstGeom>
           <a:solidFill>
-            <a:srgbClr val="D98324"/>
+            <a:srgbClr val="6D3FD1"/>
           </a:solidFill>
           <a:ln/>
         </p:spPr>
@@ -22709,7 +22709,7 @@
             <a:r>
               <a:rPr lang="en-US" sz="800" b="1" spc="130" kern="0" dirty="0">
                 <a:solidFill>
-                  <a:srgbClr val="7C766B"/>
+                  <a:srgbClr val="6C6873"/>
                 </a:solidFill>
                 <a:latin typeface="Arial" pitchFamily="34" charset="0"/>
                 <a:ea typeface="Arial" pitchFamily="34" charset="-122"/>
@@ -22751,7 +22751,7 @@
             <a:r>
               <a:rPr lang="en-US" sz="2200" b="1" spc="-30" kern="0" dirty="0">
                 <a:solidFill>
-                  <a:srgbClr val="0F1318"/>
+                  <a:srgbClr val="2A0F57"/>
                 </a:solidFill>
                 <a:latin typeface="Arial" pitchFamily="34" charset="0"/>
                 <a:ea typeface="Arial" pitchFamily="34" charset="-122"/>
@@ -22798,7 +22798,7 @@
             <a:r>
               <a:rPr lang="en-US" sz="1150" dirty="0">
                 <a:solidFill>
-                  <a:srgbClr val="4A453E"/>
+                  <a:srgbClr val="47444D"/>
                 </a:solidFill>
                 <a:latin typeface="Calibri" pitchFamily="34" charset="0"/>
                 <a:ea typeface="Calibri" pitchFamily="34" charset="-122"/>
@@ -22821,7 +22821,7 @@
             <a:r>
               <a:rPr lang="en-US" sz="1150" dirty="0">
                 <a:solidFill>
-                  <a:srgbClr val="4A453E"/>
+                  <a:srgbClr val="47444D"/>
                 </a:solidFill>
                 <a:latin typeface="Calibri" pitchFamily="34" charset="0"/>
                 <a:ea typeface="Calibri" pitchFamily="34" charset="-122"/>
@@ -22844,7 +22844,7 @@
             <a:r>
               <a:rPr lang="en-US" sz="1150" dirty="0">
                 <a:solidFill>
-                  <a:srgbClr val="4A453E"/>
+                  <a:srgbClr val="47444D"/>
                 </a:solidFill>
                 <a:latin typeface="Calibri" pitchFamily="34" charset="0"/>
                 <a:ea typeface="Calibri" pitchFamily="34" charset="-122"/>
@@ -22867,7 +22867,7 @@
             <a:r>
               <a:rPr lang="en-US" sz="1150" b="1" dirty="0">
                 <a:solidFill>
-                  <a:srgbClr val="4A453E"/>
+                  <a:srgbClr val="47444D"/>
                 </a:solidFill>
                 <a:latin typeface="Calibri" pitchFamily="34" charset="0"/>
                 <a:ea typeface="Calibri" pitchFamily="34" charset="-122"/>
@@ -22890,7 +22890,7 @@
             <a:r>
               <a:rPr lang="en-US" sz="1150" dirty="0">
                 <a:solidFill>
-                  <a:srgbClr val="4A453E"/>
+                  <a:srgbClr val="47444D"/>
                 </a:solidFill>
                 <a:latin typeface="Calibri" pitchFamily="34" charset="0"/>
                 <a:ea typeface="Calibri" pitchFamily="34" charset="-122"/>
@@ -22940,7 +22940,7 @@
                       <a:r>
                         <a:rPr lang="en-US" sz="750" b="1" spc="100" kern="0" dirty="0">
                           <a:solidFill>
-                            <a:srgbClr val="7C766B"/>
+                            <a:srgbClr val="6C6873"/>
                           </a:solidFill>
                           <a:latin typeface="Arial" pitchFamily="34" charset="0"/>
                           <a:ea typeface="Arial" pitchFamily="34" charset="-122"/>
@@ -22967,7 +22967,7 @@
                     </a:lnT>
                     <a:lnB w="12700" cap="flat" cmpd="sng" algn="ctr">
                       <a:solidFill>
-                        <a:srgbClr val="0F1318"/>
+                        <a:srgbClr val="2A0F57"/>
                       </a:solidFill>
                       <a:prstDash val="solid"/>
                       <a:round/>
@@ -22987,7 +22987,7 @@
                       <a:r>
                         <a:rPr lang="en-US" sz="750" b="1" spc="100" kern="0" dirty="0">
                           <a:solidFill>
-                            <a:srgbClr val="7C766B"/>
+                            <a:srgbClr val="6C6873"/>
                           </a:solidFill>
                           <a:latin typeface="Arial" pitchFamily="34" charset="0"/>
                           <a:ea typeface="Arial" pitchFamily="34" charset="-122"/>
@@ -23014,7 +23014,7 @@
                     </a:lnT>
                     <a:lnB w="12700" cap="flat" cmpd="sng" algn="ctr">
                       <a:solidFill>
-                        <a:srgbClr val="0F1318"/>
+                        <a:srgbClr val="2A0F57"/>
                       </a:solidFill>
                       <a:prstDash val="solid"/>
                       <a:round/>
@@ -23036,7 +23036,7 @@
                       <a:r>
                         <a:rPr lang="en-US" sz="1100" b="1" dirty="0">
                           <a:solidFill>
-                            <a:srgbClr val="0F1318"/>
+                            <a:srgbClr val="2A0F57"/>
                           </a:solidFill>
                           <a:latin typeface="Calibri" pitchFamily="34" charset="0"/>
                           <a:ea typeface="Calibri" pitchFamily="34" charset="-122"/>
@@ -23063,7 +23063,7 @@
                     </a:lnT>
                     <a:lnB w="7620" cap="flat" cmpd="sng" algn="ctr">
                       <a:solidFill>
-                        <a:srgbClr val="DCD3C3"/>
+                        <a:srgbClr val="DDD9E5"/>
                       </a:solidFill>
                       <a:prstDash val="solid"/>
                       <a:round/>
@@ -23083,7 +23083,7 @@
                       <a:r>
                         <a:rPr lang="en-US" sz="1100" dirty="0">
                           <a:solidFill>
-                            <a:srgbClr val="4A453E"/>
+                            <a:srgbClr val="47444D"/>
                           </a:solidFill>
                           <a:latin typeface="Calibri" pitchFamily="34" charset="0"/>
                           <a:ea typeface="Calibri" pitchFamily="34" charset="-122"/>
@@ -23110,7 +23110,7 @@
                     </a:lnT>
                     <a:lnB w="7620" cap="flat" cmpd="sng" algn="ctr">
                       <a:solidFill>
-                        <a:srgbClr val="DCD3C3"/>
+                        <a:srgbClr val="DDD9E5"/>
                       </a:solidFill>
                       <a:prstDash val="solid"/>
                       <a:round/>
@@ -23132,7 +23132,7 @@
                       <a:r>
                         <a:rPr lang="en-US" sz="1100" b="1" dirty="0">
                           <a:solidFill>
-                            <a:srgbClr val="0F1318"/>
+                            <a:srgbClr val="2A0F57"/>
                           </a:solidFill>
                           <a:latin typeface="Calibri" pitchFamily="34" charset="0"/>
                           <a:ea typeface="Calibri" pitchFamily="34" charset="-122"/>
@@ -23159,7 +23159,7 @@
                     </a:lnT>
                     <a:lnB w="7620" cap="flat" cmpd="sng" algn="ctr">
                       <a:solidFill>
-                        <a:srgbClr val="DCD3C3"/>
+                        <a:srgbClr val="DDD9E5"/>
                       </a:solidFill>
                       <a:prstDash val="solid"/>
                       <a:round/>
@@ -23179,7 +23179,7 @@
                       <a:r>
                         <a:rPr lang="en-US" sz="1100" dirty="0">
                           <a:solidFill>
-                            <a:srgbClr val="4A453E"/>
+                            <a:srgbClr val="47444D"/>
                           </a:solidFill>
                           <a:latin typeface="Calibri" pitchFamily="34" charset="0"/>
                           <a:ea typeface="Calibri" pitchFamily="34" charset="-122"/>
@@ -23206,7 +23206,7 @@
                     </a:lnT>
                     <a:lnB w="7620" cap="flat" cmpd="sng" algn="ctr">
                       <a:solidFill>
-                        <a:srgbClr val="DCD3C3"/>
+                        <a:srgbClr val="DDD9E5"/>
                       </a:solidFill>
                       <a:prstDash val="solid"/>
                       <a:round/>
@@ -23228,7 +23228,7 @@
                       <a:r>
                         <a:rPr lang="en-US" sz="1100" b="1" dirty="0">
                           <a:solidFill>
-                            <a:srgbClr val="0F1318"/>
+                            <a:srgbClr val="2A0F57"/>
                           </a:solidFill>
                           <a:latin typeface="Calibri" pitchFamily="34" charset="0"/>
                           <a:ea typeface="Calibri" pitchFamily="34" charset="-122"/>
@@ -23255,7 +23255,7 @@
                     </a:lnT>
                     <a:lnB w="7620" cap="flat" cmpd="sng" algn="ctr">
                       <a:solidFill>
-                        <a:srgbClr val="DCD3C3"/>
+                        <a:srgbClr val="DDD9E5"/>
                       </a:solidFill>
                       <a:prstDash val="solid"/>
                       <a:round/>
@@ -23275,7 +23275,7 @@
                       <a:r>
                         <a:rPr lang="en-US" sz="1100" dirty="0">
                           <a:solidFill>
-                            <a:srgbClr val="4A453E"/>
+                            <a:srgbClr val="47444D"/>
                           </a:solidFill>
                           <a:latin typeface="Calibri" pitchFamily="34" charset="0"/>
                           <a:ea typeface="Calibri" pitchFamily="34" charset="-122"/>
@@ -23302,7 +23302,7 @@
                     </a:lnT>
                     <a:lnB w="7620" cap="flat" cmpd="sng" algn="ctr">
                       <a:solidFill>
-                        <a:srgbClr val="DCD3C3"/>
+                        <a:srgbClr val="DDD9E5"/>
                       </a:solidFill>
                       <a:prstDash val="solid"/>
                       <a:round/>
@@ -23346,7 +23346,7 @@
             <a:r>
               <a:rPr lang="en-US" sz="750" dirty="0">
                 <a:solidFill>
-                  <a:srgbClr val="7C766B"/>
+                  <a:srgbClr val="6C6873"/>
                 </a:solidFill>
                 <a:latin typeface="Calibri" pitchFamily="34" charset="0"/>
                 <a:ea typeface="Calibri" pitchFamily="34" charset="-122"/>
@@ -23388,7 +23388,7 @@
             <a:r>
               <a:rPr lang="en-US" sz="800" dirty="0">
                 <a:solidFill>
-                  <a:srgbClr val="7C766B"/>
+                  <a:srgbClr val="6C6873"/>
                 </a:solidFill>
                 <a:latin typeface="Calibri" pitchFamily="34" charset="0"/>
                 <a:ea typeface="Calibri" pitchFamily="34" charset="-122"/>
@@ -23414,7 +23414,7 @@
     <p:bg>
       <p:bgPr>
         <a:solidFill>
-          <a:srgbClr val="F1ECE3"/>
+          <a:srgbClr val="F6F4F9"/>
         </a:solidFill>
       </p:bgPr>
     </p:bg>
@@ -23447,7 +23447,7 @@
             <a:avLst/>
           </a:prstGeom>
           <a:solidFill>
-            <a:srgbClr val="D98324"/>
+            <a:srgbClr val="6D3FD1"/>
           </a:solidFill>
           <a:ln/>
         </p:spPr>
@@ -23482,7 +23482,7 @@
             <a:r>
               <a:rPr lang="en-US" sz="800" b="1" spc="130" kern="0" dirty="0">
                 <a:solidFill>
-                  <a:srgbClr val="7C766B"/>
+                  <a:srgbClr val="6C6873"/>
                 </a:solidFill>
                 <a:latin typeface="Arial" pitchFamily="34" charset="0"/>
                 <a:ea typeface="Arial" pitchFamily="34" charset="-122"/>
@@ -23524,7 +23524,7 @@
             <a:r>
               <a:rPr lang="en-US" sz="2200" b="1" spc="-30" kern="0" dirty="0">
                 <a:solidFill>
-                  <a:srgbClr val="0F1318"/>
+                  <a:srgbClr val="2A0F57"/>
                 </a:solidFill>
                 <a:latin typeface="Arial" pitchFamily="34" charset="0"/>
                 <a:ea typeface="Arial" pitchFamily="34" charset="-122"/>
@@ -23571,7 +23571,7 @@
             <a:r>
               <a:rPr lang="en-US" sz="1150" dirty="0">
                 <a:solidFill>
-                  <a:srgbClr val="4A453E"/>
+                  <a:srgbClr val="47444D"/>
                 </a:solidFill>
                 <a:latin typeface="Calibri" pitchFamily="34" charset="0"/>
                 <a:ea typeface="Calibri" pitchFamily="34" charset="-122"/>
@@ -23594,7 +23594,7 @@
             <a:r>
               <a:rPr lang="en-US" sz="1150" b="1" dirty="0">
                 <a:solidFill>
-                  <a:srgbClr val="4A453E"/>
+                  <a:srgbClr val="47444D"/>
                 </a:solidFill>
                 <a:latin typeface="Calibri" pitchFamily="34" charset="0"/>
                 <a:ea typeface="Calibri" pitchFamily="34" charset="-122"/>
@@ -23617,7 +23617,7 @@
             <a:r>
               <a:rPr lang="en-US" sz="1150" b="1" dirty="0">
                 <a:solidFill>
-                  <a:srgbClr val="4A453E"/>
+                  <a:srgbClr val="47444D"/>
                 </a:solidFill>
                 <a:latin typeface="Calibri" pitchFamily="34" charset="0"/>
                 <a:ea typeface="Calibri" pitchFamily="34" charset="-122"/>
@@ -23640,7 +23640,7 @@
             <a:r>
               <a:rPr lang="en-US" sz="1150" b="1" dirty="0">
                 <a:solidFill>
-                  <a:srgbClr val="4A453E"/>
+                  <a:srgbClr val="47444D"/>
                 </a:solidFill>
                 <a:latin typeface="Calibri" pitchFamily="34" charset="0"/>
                 <a:ea typeface="Calibri" pitchFamily="34" charset="-122"/>
@@ -23663,7 +23663,7 @@
             <a:r>
               <a:rPr lang="en-US" sz="1150" dirty="0">
                 <a:solidFill>
-                  <a:srgbClr val="4A453E"/>
+                  <a:srgbClr val="47444D"/>
                 </a:solidFill>
                 <a:latin typeface="Calibri" pitchFamily="34" charset="0"/>
                 <a:ea typeface="Calibri" pitchFamily="34" charset="-122"/>
@@ -23715,7 +23715,7 @@
                       <a:r>
                         <a:rPr lang="en-US" sz="750" b="1" spc="100" kern="0" dirty="0">
                           <a:solidFill>
-                            <a:srgbClr val="7C766B"/>
+                            <a:srgbClr val="6C6873"/>
                           </a:solidFill>
                           <a:latin typeface="Arial" pitchFamily="34" charset="0"/>
                           <a:ea typeface="Arial" pitchFamily="34" charset="-122"/>
@@ -23742,7 +23742,7 @@
                     </a:lnT>
                     <a:lnB w="12700" cap="flat" cmpd="sng" algn="ctr">
                       <a:solidFill>
-                        <a:srgbClr val="0F1318"/>
+                        <a:srgbClr val="2A0F57"/>
                       </a:solidFill>
                       <a:prstDash val="solid"/>
                       <a:round/>
@@ -23762,7 +23762,7 @@
                       <a:r>
                         <a:rPr lang="en-US" sz="750" b="1" spc="100" kern="0" dirty="0">
                           <a:solidFill>
-                            <a:srgbClr val="7C766B"/>
+                            <a:srgbClr val="6C6873"/>
                           </a:solidFill>
                           <a:latin typeface="Arial" pitchFamily="34" charset="0"/>
                           <a:ea typeface="Arial" pitchFamily="34" charset="-122"/>
@@ -23789,7 +23789,7 @@
                     </a:lnT>
                     <a:lnB w="12700" cap="flat" cmpd="sng" algn="ctr">
                       <a:solidFill>
-                        <a:srgbClr val="0F1318"/>
+                        <a:srgbClr val="2A0F57"/>
                       </a:solidFill>
                       <a:prstDash val="solid"/>
                       <a:round/>
@@ -23809,7 +23809,7 @@
                       <a:r>
                         <a:rPr lang="en-US" sz="750" b="1" spc="100" kern="0" dirty="0">
                           <a:solidFill>
-                            <a:srgbClr val="7C766B"/>
+                            <a:srgbClr val="6C6873"/>
                           </a:solidFill>
                           <a:latin typeface="Arial" pitchFamily="34" charset="0"/>
                           <a:ea typeface="Arial" pitchFamily="34" charset="-122"/>
@@ -23836,7 +23836,7 @@
                     </a:lnT>
                     <a:lnB w="12700" cap="flat" cmpd="sng" algn="ctr">
                       <a:solidFill>
-                        <a:srgbClr val="0F1318"/>
+                        <a:srgbClr val="2A0F57"/>
                       </a:solidFill>
                       <a:prstDash val="solid"/>
                       <a:round/>
@@ -23856,7 +23856,7 @@
                       <a:r>
                         <a:rPr lang="en-US" sz="750" b="1" spc="100" kern="0" dirty="0">
                           <a:solidFill>
-                            <a:srgbClr val="7C766B"/>
+                            <a:srgbClr val="6C6873"/>
                           </a:solidFill>
                           <a:latin typeface="Arial" pitchFamily="34" charset="0"/>
                           <a:ea typeface="Arial" pitchFamily="34" charset="-122"/>
@@ -23883,7 +23883,7 @@
                     </a:lnT>
                     <a:lnB w="12700" cap="flat" cmpd="sng" algn="ctr">
                       <a:solidFill>
-                        <a:srgbClr val="0F1318"/>
+                        <a:srgbClr val="2A0F57"/>
                       </a:solidFill>
                       <a:prstDash val="solid"/>
                       <a:round/>
@@ -23905,7 +23905,7 @@
                       <a:r>
                         <a:rPr lang="en-US" sz="1000" b="1" dirty="0">
                           <a:solidFill>
-                            <a:srgbClr val="0F1318"/>
+                            <a:srgbClr val="2A0F57"/>
                           </a:solidFill>
                           <a:latin typeface="Calibri" pitchFamily="34" charset="0"/>
                           <a:ea typeface="Calibri" pitchFamily="34" charset="-122"/>
@@ -23932,7 +23932,7 @@
                     </a:lnT>
                     <a:lnB w="7620" cap="flat" cmpd="sng" algn="ctr">
                       <a:solidFill>
-                        <a:srgbClr val="DCD3C3"/>
+                        <a:srgbClr val="DDD9E5"/>
                       </a:solidFill>
                       <a:prstDash val="solid"/>
                       <a:round/>
@@ -23952,7 +23952,7 @@
                       <a:r>
                         <a:rPr lang="en-US" sz="1000" dirty="0">
                           <a:solidFill>
-                            <a:srgbClr val="4A453E"/>
+                            <a:srgbClr val="47444D"/>
                           </a:solidFill>
                           <a:latin typeface="Calibri" pitchFamily="34" charset="0"/>
                           <a:ea typeface="Calibri" pitchFamily="34" charset="-122"/>
@@ -23979,7 +23979,7 @@
                     </a:lnT>
                     <a:lnB w="7620" cap="flat" cmpd="sng" algn="ctr">
                       <a:solidFill>
-                        <a:srgbClr val="DCD3C3"/>
+                        <a:srgbClr val="DDD9E5"/>
                       </a:solidFill>
                       <a:prstDash val="solid"/>
                       <a:round/>
@@ -23999,7 +23999,7 @@
                       <a:r>
                         <a:rPr lang="en-US" sz="1000" dirty="0">
                           <a:solidFill>
-                            <a:srgbClr val="4A453E"/>
+                            <a:srgbClr val="47444D"/>
                           </a:solidFill>
                           <a:latin typeface="Calibri" pitchFamily="34" charset="0"/>
                           <a:ea typeface="Calibri" pitchFamily="34" charset="-122"/>
@@ -24026,7 +24026,7 @@
                     </a:lnT>
                     <a:lnB w="7620" cap="flat" cmpd="sng" algn="ctr">
                       <a:solidFill>
-                        <a:srgbClr val="DCD3C3"/>
+                        <a:srgbClr val="DDD9E5"/>
                       </a:solidFill>
                       <a:prstDash val="solid"/>
                       <a:round/>
@@ -24046,7 +24046,7 @@
                       <a:r>
                         <a:rPr lang="en-US" sz="1000" dirty="0">
                           <a:solidFill>
-                            <a:srgbClr val="4A453E"/>
+                            <a:srgbClr val="47444D"/>
                           </a:solidFill>
                           <a:latin typeface="Calibri" pitchFamily="34" charset="0"/>
                           <a:ea typeface="Calibri" pitchFamily="34" charset="-122"/>
@@ -24073,7 +24073,7 @@
                     </a:lnT>
                     <a:lnB w="7620" cap="flat" cmpd="sng" algn="ctr">
                       <a:solidFill>
-                        <a:srgbClr val="DCD3C3"/>
+                        <a:srgbClr val="DDD9E5"/>
                       </a:solidFill>
                       <a:prstDash val="solid"/>
                       <a:round/>
@@ -24095,7 +24095,7 @@
                       <a:r>
                         <a:rPr lang="en-US" sz="1000" b="1" dirty="0">
                           <a:solidFill>
-                            <a:srgbClr val="0F1318"/>
+                            <a:srgbClr val="2A0F57"/>
                           </a:solidFill>
                           <a:latin typeface="Calibri" pitchFamily="34" charset="0"/>
                           <a:ea typeface="Calibri" pitchFamily="34" charset="-122"/>
@@ -24122,7 +24122,7 @@
                     </a:lnT>
                     <a:lnB w="7620" cap="flat" cmpd="sng" algn="ctr">
                       <a:solidFill>
-                        <a:srgbClr val="DCD3C3"/>
+                        <a:srgbClr val="DDD9E5"/>
                       </a:solidFill>
                       <a:prstDash val="solid"/>
                       <a:round/>
@@ -24142,7 +24142,7 @@
                       <a:r>
                         <a:rPr lang="en-US" sz="1000" dirty="0">
                           <a:solidFill>
-                            <a:srgbClr val="4A453E"/>
+                            <a:srgbClr val="47444D"/>
                           </a:solidFill>
                           <a:latin typeface="Calibri" pitchFamily="34" charset="0"/>
                           <a:ea typeface="Calibri" pitchFamily="34" charset="-122"/>
@@ -24169,7 +24169,7 @@
                     </a:lnT>
                     <a:lnB w="7620" cap="flat" cmpd="sng" algn="ctr">
                       <a:solidFill>
-                        <a:srgbClr val="DCD3C3"/>
+                        <a:srgbClr val="DDD9E5"/>
                       </a:solidFill>
                       <a:prstDash val="solid"/>
                       <a:round/>
@@ -24189,7 +24189,7 @@
                       <a:r>
                         <a:rPr lang="en-US" sz="1000" dirty="0">
                           <a:solidFill>
-                            <a:srgbClr val="4A453E"/>
+                            <a:srgbClr val="47444D"/>
                           </a:solidFill>
                           <a:latin typeface="Calibri" pitchFamily="34" charset="0"/>
                           <a:ea typeface="Calibri" pitchFamily="34" charset="-122"/>
@@ -24216,7 +24216,7 @@
                     </a:lnT>
                     <a:lnB w="7620" cap="flat" cmpd="sng" algn="ctr">
                       <a:solidFill>
-                        <a:srgbClr val="DCD3C3"/>
+                        <a:srgbClr val="DDD9E5"/>
                       </a:solidFill>
                       <a:prstDash val="solid"/>
                       <a:round/>
@@ -24236,7 +24236,7 @@
                       <a:r>
                         <a:rPr lang="en-US" sz="1000" dirty="0">
                           <a:solidFill>
-                            <a:srgbClr val="4A453E"/>
+                            <a:srgbClr val="47444D"/>
                           </a:solidFill>
                           <a:latin typeface="Calibri" pitchFamily="34" charset="0"/>
                           <a:ea typeface="Calibri" pitchFamily="34" charset="-122"/>
@@ -24263,7 +24263,7 @@
                     </a:lnT>
                     <a:lnB w="7620" cap="flat" cmpd="sng" algn="ctr">
                       <a:solidFill>
-                        <a:srgbClr val="DCD3C3"/>
+                        <a:srgbClr val="DDD9E5"/>
                       </a:solidFill>
                       <a:prstDash val="solid"/>
                       <a:round/>
@@ -24285,7 +24285,7 @@
                       <a:r>
                         <a:rPr lang="en-US" sz="1000" b="1" dirty="0">
                           <a:solidFill>
-                            <a:srgbClr val="0F1318"/>
+                            <a:srgbClr val="2A0F57"/>
                           </a:solidFill>
                           <a:latin typeface="Calibri" pitchFamily="34" charset="0"/>
                           <a:ea typeface="Calibri" pitchFamily="34" charset="-122"/>
@@ -24312,7 +24312,7 @@
                     </a:lnT>
                     <a:lnB w="7620" cap="flat" cmpd="sng" algn="ctr">
                       <a:solidFill>
-                        <a:srgbClr val="DCD3C3"/>
+                        <a:srgbClr val="DDD9E5"/>
                       </a:solidFill>
                       <a:prstDash val="solid"/>
                       <a:round/>
@@ -24332,7 +24332,7 @@
                       <a:r>
                         <a:rPr lang="en-US" sz="1000" dirty="0">
                           <a:solidFill>
-                            <a:srgbClr val="4A453E"/>
+                            <a:srgbClr val="47444D"/>
                           </a:solidFill>
                           <a:latin typeface="Calibri" pitchFamily="34" charset="0"/>
                           <a:ea typeface="Calibri" pitchFamily="34" charset="-122"/>
@@ -24359,7 +24359,7 @@
                     </a:lnT>
                     <a:lnB w="7620" cap="flat" cmpd="sng" algn="ctr">
                       <a:solidFill>
-                        <a:srgbClr val="DCD3C3"/>
+                        <a:srgbClr val="DDD9E5"/>
                       </a:solidFill>
                       <a:prstDash val="solid"/>
                       <a:round/>
@@ -24379,7 +24379,7 @@
                       <a:r>
                         <a:rPr lang="en-US" sz="1000" dirty="0">
                           <a:solidFill>
-                            <a:srgbClr val="4A453E"/>
+                            <a:srgbClr val="47444D"/>
                           </a:solidFill>
                           <a:latin typeface="Calibri" pitchFamily="34" charset="0"/>
                           <a:ea typeface="Calibri" pitchFamily="34" charset="-122"/>
@@ -24406,7 +24406,7 @@
                     </a:lnT>
                     <a:lnB w="7620" cap="flat" cmpd="sng" algn="ctr">
                       <a:solidFill>
-                        <a:srgbClr val="DCD3C3"/>
+                        <a:srgbClr val="DDD9E5"/>
                       </a:solidFill>
                       <a:prstDash val="solid"/>
                       <a:round/>
@@ -24426,7 +24426,7 @@
                       <a:r>
                         <a:rPr lang="en-US" sz="1000" dirty="0">
                           <a:solidFill>
-                            <a:srgbClr val="4A453E"/>
+                            <a:srgbClr val="47444D"/>
                           </a:solidFill>
                           <a:latin typeface="Calibri" pitchFamily="34" charset="0"/>
                           <a:ea typeface="Calibri" pitchFamily="34" charset="-122"/>
@@ -24453,7 +24453,7 @@
                     </a:lnT>
                     <a:lnB w="7620" cap="flat" cmpd="sng" algn="ctr">
                       <a:solidFill>
-                        <a:srgbClr val="DCD3C3"/>
+                        <a:srgbClr val="DDD9E5"/>
                       </a:solidFill>
                       <a:prstDash val="solid"/>
                       <a:round/>
@@ -24475,7 +24475,7 @@
                       <a:r>
                         <a:rPr lang="en-US" sz="1000" b="1" dirty="0">
                           <a:solidFill>
-                            <a:srgbClr val="0F1318"/>
+                            <a:srgbClr val="2A0F57"/>
                           </a:solidFill>
                           <a:latin typeface="Calibri" pitchFamily="34" charset="0"/>
                           <a:ea typeface="Calibri" pitchFamily="34" charset="-122"/>
@@ -24502,7 +24502,7 @@
                     </a:lnT>
                     <a:lnB w="7620" cap="flat" cmpd="sng" algn="ctr">
                       <a:solidFill>
-                        <a:srgbClr val="DCD3C3"/>
+                        <a:srgbClr val="DDD9E5"/>
                       </a:solidFill>
                       <a:prstDash val="solid"/>
                       <a:round/>
@@ -24522,7 +24522,7 @@
                       <a:r>
                         <a:rPr lang="en-US" sz="1000" dirty="0">
                           <a:solidFill>
-                            <a:srgbClr val="4A453E"/>
+                            <a:srgbClr val="47444D"/>
                           </a:solidFill>
                           <a:latin typeface="Calibri" pitchFamily="34" charset="0"/>
                           <a:ea typeface="Calibri" pitchFamily="34" charset="-122"/>
@@ -24549,7 +24549,7 @@
                     </a:lnT>
                     <a:lnB w="7620" cap="flat" cmpd="sng" algn="ctr">
                       <a:solidFill>
-                        <a:srgbClr val="DCD3C3"/>
+                        <a:srgbClr val="DDD9E5"/>
                       </a:solidFill>
                       <a:prstDash val="solid"/>
                       <a:round/>
@@ -24569,7 +24569,7 @@
                       <a:r>
                         <a:rPr lang="en-US" sz="1000" dirty="0">
                           <a:solidFill>
-                            <a:srgbClr val="4A453E"/>
+                            <a:srgbClr val="47444D"/>
                           </a:solidFill>
                           <a:latin typeface="Calibri" pitchFamily="34" charset="0"/>
                           <a:ea typeface="Calibri" pitchFamily="34" charset="-122"/>
@@ -24596,7 +24596,7 @@
                     </a:lnT>
                     <a:lnB w="7620" cap="flat" cmpd="sng" algn="ctr">
                       <a:solidFill>
-                        <a:srgbClr val="DCD3C3"/>
+                        <a:srgbClr val="DDD9E5"/>
                       </a:solidFill>
                       <a:prstDash val="solid"/>
                       <a:round/>
@@ -24616,7 +24616,7 @@
                       <a:r>
                         <a:rPr lang="en-US" sz="1000" dirty="0">
                           <a:solidFill>
-                            <a:srgbClr val="4A453E"/>
+                            <a:srgbClr val="47444D"/>
                           </a:solidFill>
                           <a:latin typeface="Calibri" pitchFamily="34" charset="0"/>
                           <a:ea typeface="Calibri" pitchFamily="34" charset="-122"/>
@@ -24643,7 +24643,7 @@
                     </a:lnT>
                     <a:lnB w="7620" cap="flat" cmpd="sng" algn="ctr">
                       <a:solidFill>
-                        <a:srgbClr val="DCD3C3"/>
+                        <a:srgbClr val="DDD9E5"/>
                       </a:solidFill>
                       <a:prstDash val="solid"/>
                       <a:round/>
@@ -24665,7 +24665,7 @@
                       <a:r>
                         <a:rPr lang="en-US" sz="1000" b="1" dirty="0">
                           <a:solidFill>
-                            <a:srgbClr val="0F1318"/>
+                            <a:srgbClr val="2A0F57"/>
                           </a:solidFill>
                           <a:latin typeface="Calibri" pitchFamily="34" charset="0"/>
                           <a:ea typeface="Calibri" pitchFamily="34" charset="-122"/>
@@ -24692,7 +24692,7 @@
                     </a:lnT>
                     <a:lnB w="7620" cap="flat" cmpd="sng" algn="ctr">
                       <a:solidFill>
-                        <a:srgbClr val="DCD3C3"/>
+                        <a:srgbClr val="DDD9E5"/>
                       </a:solidFill>
                       <a:prstDash val="solid"/>
                       <a:round/>
@@ -24712,7 +24712,7 @@
                       <a:r>
                         <a:rPr lang="en-US" sz="1000" dirty="0">
                           <a:solidFill>
-                            <a:srgbClr val="4A453E"/>
+                            <a:srgbClr val="47444D"/>
                           </a:solidFill>
                           <a:latin typeface="Calibri" pitchFamily="34" charset="0"/>
                           <a:ea typeface="Calibri" pitchFamily="34" charset="-122"/>
@@ -24739,7 +24739,7 @@
                     </a:lnT>
                     <a:lnB w="7620" cap="flat" cmpd="sng" algn="ctr">
                       <a:solidFill>
-                        <a:srgbClr val="DCD3C3"/>
+                        <a:srgbClr val="DDD9E5"/>
                       </a:solidFill>
                       <a:prstDash val="solid"/>
                       <a:round/>
@@ -24759,7 +24759,7 @@
                       <a:r>
                         <a:rPr lang="en-US" sz="1000" dirty="0">
                           <a:solidFill>
-                            <a:srgbClr val="4A453E"/>
+                            <a:srgbClr val="47444D"/>
                           </a:solidFill>
                           <a:latin typeface="Calibri" pitchFamily="34" charset="0"/>
                           <a:ea typeface="Calibri" pitchFamily="34" charset="-122"/>
@@ -24786,7 +24786,7 @@
                     </a:lnT>
                     <a:lnB w="7620" cap="flat" cmpd="sng" algn="ctr">
                       <a:solidFill>
-                        <a:srgbClr val="DCD3C3"/>
+                        <a:srgbClr val="DDD9E5"/>
                       </a:solidFill>
                       <a:prstDash val="solid"/>
                       <a:round/>
@@ -24806,7 +24806,7 @@
                       <a:r>
                         <a:rPr lang="en-US" sz="1000" dirty="0">
                           <a:solidFill>
-                            <a:srgbClr val="4A453E"/>
+                            <a:srgbClr val="47444D"/>
                           </a:solidFill>
                           <a:latin typeface="Calibri" pitchFamily="34" charset="0"/>
                           <a:ea typeface="Calibri" pitchFamily="34" charset="-122"/>
@@ -24833,7 +24833,7 @@
                     </a:lnT>
                     <a:lnB w="7620" cap="flat" cmpd="sng" algn="ctr">
                       <a:solidFill>
-                        <a:srgbClr val="DCD3C3"/>
+                        <a:srgbClr val="DDD9E5"/>
                       </a:solidFill>
                       <a:prstDash val="solid"/>
                       <a:round/>
@@ -24855,7 +24855,7 @@
                       <a:r>
                         <a:rPr lang="en-US" sz="1000" b="1" dirty="0">
                           <a:solidFill>
-                            <a:srgbClr val="0F1318"/>
+                            <a:srgbClr val="2A0F57"/>
                           </a:solidFill>
                           <a:latin typeface="Calibri" pitchFamily="34" charset="0"/>
                           <a:ea typeface="Calibri" pitchFamily="34" charset="-122"/>
@@ -24882,7 +24882,7 @@
                     </a:lnT>
                     <a:lnB w="7620" cap="flat" cmpd="sng" algn="ctr">
                       <a:solidFill>
-                        <a:srgbClr val="DCD3C3"/>
+                        <a:srgbClr val="DDD9E5"/>
                       </a:solidFill>
                       <a:prstDash val="solid"/>
                       <a:round/>
@@ -24902,7 +24902,7 @@
                       <a:r>
                         <a:rPr lang="en-US" sz="1000" dirty="0">
                           <a:solidFill>
-                            <a:srgbClr val="4A453E"/>
+                            <a:srgbClr val="47444D"/>
                           </a:solidFill>
                           <a:latin typeface="Calibri" pitchFamily="34" charset="0"/>
                           <a:ea typeface="Calibri" pitchFamily="34" charset="-122"/>
@@ -24929,7 +24929,7 @@
                     </a:lnT>
                     <a:lnB w="7620" cap="flat" cmpd="sng" algn="ctr">
                       <a:solidFill>
-                        <a:srgbClr val="DCD3C3"/>
+                        <a:srgbClr val="DDD9E5"/>
                       </a:solidFill>
                       <a:prstDash val="solid"/>
                       <a:round/>
@@ -24949,7 +24949,7 @@
                       <a:r>
                         <a:rPr lang="en-US" sz="1000" dirty="0">
                           <a:solidFill>
-                            <a:srgbClr val="4A453E"/>
+                            <a:srgbClr val="47444D"/>
                           </a:solidFill>
                           <a:latin typeface="Calibri" pitchFamily="34" charset="0"/>
                           <a:ea typeface="Calibri" pitchFamily="34" charset="-122"/>
@@ -24976,7 +24976,7 @@
                     </a:lnT>
                     <a:lnB w="7620" cap="flat" cmpd="sng" algn="ctr">
                       <a:solidFill>
-                        <a:srgbClr val="DCD3C3"/>
+                        <a:srgbClr val="DDD9E5"/>
                       </a:solidFill>
                       <a:prstDash val="solid"/>
                       <a:round/>
@@ -24996,7 +24996,7 @@
                       <a:r>
                         <a:rPr lang="en-US" sz="1000" dirty="0">
                           <a:solidFill>
-                            <a:srgbClr val="4A453E"/>
+                            <a:srgbClr val="47444D"/>
                           </a:solidFill>
                           <a:latin typeface="Calibri" pitchFamily="34" charset="0"/>
                           <a:ea typeface="Calibri" pitchFamily="34" charset="-122"/>
@@ -25023,7 +25023,7 @@
                     </a:lnT>
                     <a:lnB w="7620" cap="flat" cmpd="sng" algn="ctr">
                       <a:solidFill>
-                        <a:srgbClr val="DCD3C3"/>
+                        <a:srgbClr val="DDD9E5"/>
                       </a:solidFill>
                       <a:prstDash val="solid"/>
                       <a:round/>
@@ -25067,7 +25067,7 @@
             <a:r>
               <a:rPr lang="en-US" sz="750" dirty="0">
                 <a:solidFill>
-                  <a:srgbClr val="7C766B"/>
+                  <a:srgbClr val="6C6873"/>
                 </a:solidFill>
                 <a:latin typeface="Calibri" pitchFamily="34" charset="0"/>
                 <a:ea typeface="Calibri" pitchFamily="34" charset="-122"/>
@@ -25109,7 +25109,7 @@
             <a:r>
               <a:rPr lang="en-US" sz="800" dirty="0">
                 <a:solidFill>
-                  <a:srgbClr val="7C766B"/>
+                  <a:srgbClr val="6C6873"/>
                 </a:solidFill>
                 <a:latin typeface="Calibri" pitchFamily="34" charset="0"/>
                 <a:ea typeface="Calibri" pitchFamily="34" charset="-122"/>
@@ -25135,7 +25135,7 @@
     <p:bg>
       <p:bgPr>
         <a:solidFill>
-          <a:srgbClr val="0F1318"/>
+          <a:srgbClr val="2A0F57"/>
         </a:solidFill>
       </p:bgPr>
     </p:bg>
@@ -25168,7 +25168,7 @@
             <a:avLst/>
           </a:prstGeom>
           <a:solidFill>
-            <a:srgbClr val="D98324"/>
+            <a:srgbClr val="6D3FD1"/>
           </a:solidFill>
           <a:ln/>
         </p:spPr>
@@ -25203,7 +25203,7 @@
             <a:r>
               <a:rPr lang="en-US" sz="800" b="1" spc="130" kern="0" dirty="0">
                 <a:solidFill>
-                  <a:srgbClr val="8C8478"/>
+                  <a:srgbClr val="6C6873"/>
                 </a:solidFill>
                 <a:latin typeface="Arial" pitchFamily="34" charset="0"/>
                 <a:ea typeface="Arial" pitchFamily="34" charset="-122"/>
@@ -25245,7 +25245,7 @@
             <a:r>
               <a:rPr lang="en-US" sz="2400" b="1" dirty="0">
                 <a:solidFill>
-                  <a:srgbClr val="F1ECE3"/>
+                  <a:srgbClr val="F6F4F9"/>
                 </a:solidFill>
                 <a:latin typeface="Arial" pitchFamily="34" charset="0"/>
                 <a:ea typeface="Arial" pitchFamily="34" charset="-122"/>
@@ -25287,7 +25287,7 @@
             <a:r>
               <a:rPr lang="en-US" sz="800" b="1" spc="130" kern="0" dirty="0">
                 <a:solidFill>
-                  <a:srgbClr val="D98324"/>
+                  <a:srgbClr val="6D3FD1"/>
                 </a:solidFill>
                 <a:latin typeface="Arial" pitchFamily="34" charset="0"/>
                 <a:ea typeface="Arial" pitchFamily="34" charset="-122"/>
@@ -25335,7 +25335,7 @@
             <a:r>
               <a:rPr lang="en-US" sz="1000" dirty="0">
                 <a:solidFill>
-                  <a:srgbClr val="C6BFB3"/>
+                  <a:srgbClr val="D9CCF5"/>
                 </a:solidFill>
                 <a:latin typeface="Calibri" pitchFamily="34" charset="0"/>
                 <a:ea typeface="Calibri" pitchFamily="34" charset="-122"/>
@@ -25359,7 +25359,7 @@
             <a:r>
               <a:rPr lang="en-US" sz="1000" dirty="0">
                 <a:solidFill>
-                  <a:srgbClr val="C6BFB3"/>
+                  <a:srgbClr val="D9CCF5"/>
                 </a:solidFill>
                 <a:latin typeface="Calibri" pitchFamily="34" charset="0"/>
                 <a:ea typeface="Calibri" pitchFamily="34" charset="-122"/>
@@ -25383,7 +25383,7 @@
             <a:r>
               <a:rPr lang="en-US" sz="1000" dirty="0">
                 <a:solidFill>
-                  <a:srgbClr val="C6BFB3"/>
+                  <a:srgbClr val="D9CCF5"/>
                 </a:solidFill>
                 <a:latin typeface="Calibri" pitchFamily="34" charset="0"/>
                 <a:ea typeface="Calibri" pitchFamily="34" charset="-122"/>
@@ -25407,7 +25407,7 @@
             <a:r>
               <a:rPr lang="en-US" sz="1000" dirty="0">
                 <a:solidFill>
-                  <a:srgbClr val="C6BFB3"/>
+                  <a:srgbClr val="D9CCF5"/>
                 </a:solidFill>
                 <a:latin typeface="Calibri" pitchFamily="34" charset="0"/>
                 <a:ea typeface="Calibri" pitchFamily="34" charset="-122"/>
@@ -25449,7 +25449,7 @@
             <a:r>
               <a:rPr lang="en-US" sz="800" dirty="0">
                 <a:solidFill>
-                  <a:srgbClr val="8C8478"/>
+                  <a:srgbClr val="6C6873"/>
                 </a:solidFill>
                 <a:latin typeface="Calibri" pitchFamily="34" charset="0"/>
                 <a:ea typeface="Calibri" pitchFamily="34" charset="-122"/>
